--- a/Holy Forever.pptx
+++ b/Holy Forever.pptx
@@ -5,24 +5,23 @@
     <p:sldMasterId id="2147483660" r:id="rId1"/>
   </p:sldMasterIdLst>
   <p:sldIdLst>
-    <p:sldId id="256" r:id="rId2"/>
-    <p:sldId id="274" r:id="rId3"/>
-    <p:sldId id="295" r:id="rId4"/>
-    <p:sldId id="286" r:id="rId5"/>
-    <p:sldId id="277" r:id="rId6"/>
-    <p:sldId id="287" r:id="rId7"/>
-    <p:sldId id="276" r:id="rId8"/>
-    <p:sldId id="278" r:id="rId9"/>
-    <p:sldId id="288" r:id="rId10"/>
-    <p:sldId id="289" r:id="rId11"/>
-    <p:sldId id="280" r:id="rId12"/>
-    <p:sldId id="290" r:id="rId13"/>
-    <p:sldId id="291" r:id="rId14"/>
-    <p:sldId id="296" r:id="rId15"/>
-    <p:sldId id="297" r:id="rId16"/>
-    <p:sldId id="292" r:id="rId17"/>
-    <p:sldId id="293" r:id="rId18"/>
-    <p:sldId id="294" r:id="rId19"/>
+    <p:sldId id="274" r:id="rId2"/>
+    <p:sldId id="295" r:id="rId3"/>
+    <p:sldId id="286" r:id="rId4"/>
+    <p:sldId id="277" r:id="rId5"/>
+    <p:sldId id="287" r:id="rId6"/>
+    <p:sldId id="276" r:id="rId7"/>
+    <p:sldId id="278" r:id="rId8"/>
+    <p:sldId id="288" r:id="rId9"/>
+    <p:sldId id="289" r:id="rId10"/>
+    <p:sldId id="280" r:id="rId11"/>
+    <p:sldId id="290" r:id="rId12"/>
+    <p:sldId id="291" r:id="rId13"/>
+    <p:sldId id="296" r:id="rId14"/>
+    <p:sldId id="297" r:id="rId15"/>
+    <p:sldId id="292" r:id="rId16"/>
+    <p:sldId id="293" r:id="rId17"/>
+    <p:sldId id="294" r:id="rId18"/>
   </p:sldIdLst>
   <p:sldSz cx="9144000" cy="6858000" type="screen4x3"/>
   <p:notesSz cx="6858000" cy="9144000"/>
@@ -260,7 +259,7 @@
           <a:p>
             <a:fld id="{E759A0DE-F190-5444-87AC-4719D5F20D15}" type="datetimeFigureOut">
               <a:rPr lang="en-US" smtClean="0"/>
-              <a:t>6/11/26</a:t>
+              <a:t>6/13/26</a:t>
             </a:fld>
             <a:endParaRPr lang="en-US"/>
           </a:p>
@@ -430,7 +429,7 @@
           <a:p>
             <a:fld id="{E759A0DE-F190-5444-87AC-4719D5F20D15}" type="datetimeFigureOut">
               <a:rPr lang="en-US" smtClean="0"/>
-              <a:t>6/11/26</a:t>
+              <a:t>6/13/26</a:t>
             </a:fld>
             <a:endParaRPr lang="en-US"/>
           </a:p>
@@ -610,7 +609,7 @@
           <a:p>
             <a:fld id="{E759A0DE-F190-5444-87AC-4719D5F20D15}" type="datetimeFigureOut">
               <a:rPr lang="en-US" smtClean="0"/>
-              <a:t>6/11/26</a:t>
+              <a:t>6/13/26</a:t>
             </a:fld>
             <a:endParaRPr lang="en-US"/>
           </a:p>
@@ -780,7 +779,7 @@
           <a:p>
             <a:fld id="{E759A0DE-F190-5444-87AC-4719D5F20D15}" type="datetimeFigureOut">
               <a:rPr lang="en-US" smtClean="0"/>
-              <a:t>6/11/26</a:t>
+              <a:t>6/13/26</a:t>
             </a:fld>
             <a:endParaRPr lang="en-US"/>
           </a:p>
@@ -1026,7 +1025,7 @@
           <a:p>
             <a:fld id="{E759A0DE-F190-5444-87AC-4719D5F20D15}" type="datetimeFigureOut">
               <a:rPr lang="en-US" smtClean="0"/>
-              <a:t>6/11/26</a:t>
+              <a:t>6/13/26</a:t>
             </a:fld>
             <a:endParaRPr lang="en-US"/>
           </a:p>
@@ -1258,7 +1257,7 @@
           <a:p>
             <a:fld id="{E759A0DE-F190-5444-87AC-4719D5F20D15}" type="datetimeFigureOut">
               <a:rPr lang="en-US" smtClean="0"/>
-              <a:t>6/11/26</a:t>
+              <a:t>6/13/26</a:t>
             </a:fld>
             <a:endParaRPr lang="en-US"/>
           </a:p>
@@ -1625,7 +1624,7 @@
           <a:p>
             <a:fld id="{E759A0DE-F190-5444-87AC-4719D5F20D15}" type="datetimeFigureOut">
               <a:rPr lang="en-US" smtClean="0"/>
-              <a:t>6/11/26</a:t>
+              <a:t>6/13/26</a:t>
             </a:fld>
             <a:endParaRPr lang="en-US"/>
           </a:p>
@@ -1743,7 +1742,7 @@
           <a:p>
             <a:fld id="{E759A0DE-F190-5444-87AC-4719D5F20D15}" type="datetimeFigureOut">
               <a:rPr lang="en-US" smtClean="0"/>
-              <a:t>6/11/26</a:t>
+              <a:t>6/13/26</a:t>
             </a:fld>
             <a:endParaRPr lang="en-US"/>
           </a:p>
@@ -1838,7 +1837,7 @@
           <a:p>
             <a:fld id="{E759A0DE-F190-5444-87AC-4719D5F20D15}" type="datetimeFigureOut">
               <a:rPr lang="en-US" smtClean="0"/>
-              <a:t>6/11/26</a:t>
+              <a:t>6/13/26</a:t>
             </a:fld>
             <a:endParaRPr lang="en-US"/>
           </a:p>
@@ -2115,7 +2114,7 @@
           <a:p>
             <a:fld id="{E759A0DE-F190-5444-87AC-4719D5F20D15}" type="datetimeFigureOut">
               <a:rPr lang="en-US" smtClean="0"/>
-              <a:t>6/11/26</a:t>
+              <a:t>6/13/26</a:t>
             </a:fld>
             <a:endParaRPr lang="en-US"/>
           </a:p>
@@ -2372,7 +2371,7 @@
           <a:p>
             <a:fld id="{E759A0DE-F190-5444-87AC-4719D5F20D15}" type="datetimeFigureOut">
               <a:rPr lang="en-US" smtClean="0"/>
-              <a:t>6/11/26</a:t>
+              <a:t>6/13/26</a:t>
             </a:fld>
             <a:endParaRPr lang="en-US"/>
           </a:p>
@@ -2585,7 +2584,7 @@
           <a:p>
             <a:fld id="{E759A0DE-F190-5444-87AC-4719D5F20D15}" type="datetimeFigureOut">
               <a:rPr lang="en-US" smtClean="0"/>
-              <a:t>6/11/26</a:t>
+              <a:t>6/13/26</a:t>
             </a:fld>
             <a:endParaRPr lang="en-US"/>
           </a:p>
@@ -2979,14 +2978,20 @@
     <p:bg>
       <p:bgPr>
         <a:solidFill>
-          <a:schemeClr val="bg1"/>
+          <a:schemeClr val="tx1"/>
         </a:solidFill>
         <a:effectLst/>
       </p:bgPr>
     </p:bg>
     <p:spTree>
       <p:nvGrpSpPr>
-        <p:cNvPr id="1" name=""/>
+        <p:cNvPr id="1" name="">
+          <a:extLst>
+            <a:ext uri="{FF2B5EF4-FFF2-40B4-BE49-F238E27FC236}">
+              <a16:creationId xmlns:a16="http://schemas.microsoft.com/office/drawing/2014/main" id="{0C7F1709-70D9-7011-5D92-F7E57F5604D0}"/>
+            </a:ext>
+          </a:extLst>
+        </p:cNvPr>
         <p:cNvGrpSpPr/>
         <p:nvPr/>
       </p:nvGrpSpPr>
@@ -2998,223 +3003,41 @@
           <a:chExt cx="0" cy="0"/>
         </a:xfrm>
       </p:grpSpPr>
-      <p:sp useBgFill="1">
-        <p:nvSpPr>
-          <p:cNvPr id="10" name="Rectangle 9">
+      <p:sp>
+        <p:nvSpPr>
+          <p:cNvPr id="3" name="Subtitle 2">
             <a:extLst>
               <a:ext uri="{FF2B5EF4-FFF2-40B4-BE49-F238E27FC236}">
-                <a16:creationId xmlns:a16="http://schemas.microsoft.com/office/drawing/2014/main" id="{ECC07320-C2CA-4E29-8481-9D9E143C7788}"/>
-              </a:ext>
-              <a:ext uri="{C183D7F6-B498-43B3-948B-1728B52AA6E4}">
-                <adec:decorative xmlns:adec="http://schemas.microsoft.com/office/drawing/2017/decorative" val="1"/>
+                <a16:creationId xmlns:a16="http://schemas.microsoft.com/office/drawing/2014/main" id="{C25DBF04-8174-1226-1E95-AC7FB0F1B0E0}"/>
               </a:ext>
             </a:extLst>
           </p:cNvPr>
           <p:cNvSpPr>
-            <a:spLocks noGrp="1" noRot="1" noChangeAspect="1" noMove="1" noResize="1" noEditPoints="1" noAdjustHandles="1" noChangeArrowheads="1" noChangeShapeType="1" noTextEdit="1"/>
-          </p:cNvSpPr>
-          <p:nvPr>
-            <p:extLst>
-              <p:ext uri="{386F3935-93C4-4BCD-93E2-E3B085C9AB24}">
-                <p16:designElem xmlns:p16="http://schemas.microsoft.com/office/powerpoint/2015/main" val="1"/>
-              </p:ext>
-            </p:extLst>
+            <a:spLocks noGrp="1"/>
+          </p:cNvSpPr>
+          <p:nvPr>
+            <p:ph type="subTitle" idx="1"/>
           </p:nvPr>
         </p:nvSpPr>
         <p:spPr>
           <a:xfrm>
-            <a:off x="0" y="0"/>
-            <a:ext cx="9141713" cy="6858000"/>
+            <a:off x="84221" y="159488"/>
+            <a:ext cx="8964086" cy="6485861"/>
           </a:xfrm>
-          <a:prstGeom prst="rect">
-            <a:avLst/>
-          </a:prstGeom>
-          <a:ln>
-            <a:noFill/>
-          </a:ln>
         </p:spPr>
-        <p:style>
-          <a:lnRef idx="2">
-            <a:schemeClr val="accent1">
-              <a:shade val="50000"/>
-            </a:schemeClr>
-          </a:lnRef>
-          <a:fillRef idx="1">
-            <a:schemeClr val="accent1"/>
-          </a:fillRef>
-          <a:effectRef idx="0">
-            <a:schemeClr val="accent1"/>
-          </a:effectRef>
-          <a:fontRef idx="minor">
-            <a:schemeClr val="lt1"/>
-          </a:fontRef>
-        </p:style>
-        <p:txBody>
-          <a:bodyPr rtlCol="0" anchor="ctr"/>
-          <a:lstStyle/>
-          <a:p>
-            <a:pPr algn="ctr"/>
-            <a:endParaRPr lang="en-US"/>
-          </a:p>
-        </p:txBody>
-      </p:sp>
-      <p:pic>
-        <p:nvPicPr>
-          <p:cNvPr id="5" name="Picture 4" descr="A mountain with snow and a sunset&#10;&#10;AI-generated content may be incorrect.">
-            <a:extLst>
-              <a:ext uri="{FF2B5EF4-FFF2-40B4-BE49-F238E27FC236}">
-                <a16:creationId xmlns:a16="http://schemas.microsoft.com/office/drawing/2014/main" id="{6A4D72FC-DF1E-94F8-76BF-4DA02F41FD53}"/>
-              </a:ext>
-            </a:extLst>
-          </p:cNvPr>
-          <p:cNvPicPr>
-            <a:picLocks noChangeAspect="1"/>
-          </p:cNvPicPr>
-          <p:nvPr/>
-        </p:nvPicPr>
-        <p:blipFill>
-          <a:blip r:embed="rId2"/>
-          <a:srcRect l="15280" r="15984"/>
-          <a:stretch>
-            <a:fillRect/>
-          </a:stretch>
-        </p:blipFill>
-        <p:spPr>
-          <a:xfrm>
-            <a:off x="20" y="10"/>
-            <a:ext cx="7252212" cy="6857990"/>
-          </a:xfrm>
-          <a:prstGeom prst="rect">
-            <a:avLst/>
-          </a:prstGeom>
-        </p:spPr>
-      </p:pic>
-      <p:sp>
-        <p:nvSpPr>
-          <p:cNvPr id="12" name="Rectangle 11">
-            <a:extLst>
-              <a:ext uri="{FF2B5EF4-FFF2-40B4-BE49-F238E27FC236}">
-                <a16:creationId xmlns:a16="http://schemas.microsoft.com/office/drawing/2014/main" id="{178FB36B-5BFE-42CA-BC60-1115E0D95EEC}"/>
-              </a:ext>
-              <a:ext uri="{C183D7F6-B498-43B3-948B-1728B52AA6E4}">
-                <adec:decorative xmlns:adec="http://schemas.microsoft.com/office/drawing/2017/decorative" val="1"/>
-              </a:ext>
-            </a:extLst>
-          </p:cNvPr>
-          <p:cNvSpPr>
-            <a:spLocks noGrp="1" noRot="1" noChangeAspect="1" noMove="1" noResize="1" noEditPoints="1" noAdjustHandles="1" noChangeArrowheads="1" noChangeShapeType="1" noTextEdit="1"/>
-          </p:cNvSpPr>
-          <p:nvPr>
-            <p:extLst>
-              <p:ext uri="{386F3935-93C4-4BCD-93E2-E3B085C9AB24}">
-                <p16:designElem xmlns:p16="http://schemas.microsoft.com/office/powerpoint/2015/main" val="1"/>
-              </p:ext>
-            </p:extLst>
-          </p:nvPr>
-        </p:nvSpPr>
-        <p:spPr>
-          <a:xfrm flipH="1">
-            <a:off x="3843764" y="0"/>
-            <a:ext cx="5300233" cy="6858000"/>
-          </a:xfrm>
-          <a:prstGeom prst="rect">
-            <a:avLst/>
-          </a:prstGeom>
-          <a:gradFill>
-            <a:gsLst>
-              <a:gs pos="48000">
-                <a:schemeClr val="bg1"/>
-              </a:gs>
-              <a:gs pos="35000">
-                <a:schemeClr val="bg1">
-                  <a:alpha val="77000"/>
-                </a:schemeClr>
-              </a:gs>
-              <a:gs pos="19000">
-                <a:schemeClr val="bg1">
-                  <a:alpha val="38000"/>
-                </a:schemeClr>
-              </a:gs>
-              <a:gs pos="0">
-                <a:schemeClr val="bg1">
-                  <a:alpha val="0"/>
-                </a:schemeClr>
-              </a:gs>
-              <a:gs pos="100000">
-                <a:schemeClr val="bg1"/>
-              </a:gs>
-            </a:gsLst>
-            <a:lin ang="10800000" scaled="0"/>
-          </a:gradFill>
-          <a:ln>
-            <a:noFill/>
-          </a:ln>
-        </p:spPr>
-        <p:style>
-          <a:lnRef idx="2">
-            <a:schemeClr val="accent1">
-              <a:shade val="50000"/>
-            </a:schemeClr>
-          </a:lnRef>
-          <a:fillRef idx="1">
-            <a:schemeClr val="accent1"/>
-          </a:fillRef>
-          <a:effectRef idx="0">
-            <a:schemeClr val="accent1"/>
-          </a:effectRef>
-          <a:fontRef idx="minor">
-            <a:schemeClr val="lt1"/>
-          </a:fontRef>
-        </p:style>
-        <p:txBody>
-          <a:bodyPr rtlCol="0" anchor="ctr"/>
-          <a:lstStyle/>
-          <a:p>
-            <a:pPr algn="ctr"/>
-            <a:endParaRPr lang="en-US" dirty="0"/>
-          </a:p>
-        </p:txBody>
-      </p:sp>
-      <p:sp>
-        <p:nvSpPr>
-          <p:cNvPr id="3" name="Subtitle 2">
-            <a:extLst>
-              <a:ext uri="{FF2B5EF4-FFF2-40B4-BE49-F238E27FC236}">
-                <a16:creationId xmlns:a16="http://schemas.microsoft.com/office/drawing/2014/main" id="{BDDF4048-2958-B759-F7D1-45755BE99DD7}"/>
-              </a:ext>
-            </a:extLst>
-          </p:cNvPr>
-          <p:cNvSpPr>
-            <a:spLocks noGrp="1"/>
-          </p:cNvSpPr>
-          <p:nvPr>
-            <p:ph type="subTitle" idx="1"/>
-          </p:nvPr>
-        </p:nvSpPr>
-        <p:spPr>
-          <a:xfrm>
-            <a:off x="5951552" y="4629234"/>
-            <a:ext cx="2584324" cy="1485319"/>
-          </a:xfrm>
-          <a:noFill/>
-        </p:spPr>
         <p:txBody>
           <a:bodyPr>
-            <a:normAutofit/>
+            <a:noAutofit/>
           </a:bodyPr>
           <a:lstStyle/>
           <a:p>
             <a:pPr algn="l"/>
-            <a:endParaRPr lang="en-US" dirty="0">
-              <a:latin typeface="Avenir Medium" panose="02000503020000020003" pitchFamily="2" charset="0"/>
-              <a:ea typeface="Bodoni Ornaments" pitchFamily="2" charset="0"/>
-            </a:endParaRPr>
-          </a:p>
-          <a:p>
-            <a:pPr algn="l"/>
-            <a:r>
-              <a:rPr lang="en-US" i="1">
-                <a:latin typeface="Avenir Oblique" panose="02000503020000020003" pitchFamily="2" charset="0"/>
+            <a:r>
+              <a:rPr lang="en-US" sz="7200" dirty="0">
+                <a:solidFill>
+                  <a:schemeClr val="bg1"/>
+                </a:solidFill>
+                <a:latin typeface="Avenir Medium" panose="02000503020000020003" pitchFamily="2" charset="0"/>
                 <a:ea typeface="Bodoni Ornaments" pitchFamily="2" charset="0"/>
               </a:rPr>
               <a:t>Holy Forever</a:t>
@@ -3225,117 +3048,2138 @@
     </p:spTree>
     <p:extLst>
       <p:ext uri="{BB962C8B-B14F-4D97-AF65-F5344CB8AC3E}">
-        <p14:creationId xmlns:p14="http://schemas.microsoft.com/office/powerpoint/2010/main" val="1687888858"/>
+        <p14:creationId xmlns:p14="http://schemas.microsoft.com/office/powerpoint/2010/main" val="3164163406"/>
       </p:ext>
     </p:extLst>
   </p:cSld>
   <p:clrMapOvr>
     <a:masterClrMapping/>
   </p:clrMapOvr>
-  <p:timing>
-    <p:tnLst>
-      <p:par>
-        <p:cTn id="1" dur="indefinite" restart="never" nodeType="tmRoot">
-          <p:childTnLst>
-            <p:seq concurrent="1" nextAc="seek">
-              <p:cTn id="2" dur="indefinite" nodeType="mainSeq">
-                <p:childTnLst>
-                  <p:par>
-                    <p:cTn id="3" fill="hold">
-                      <p:stCondLst>
-                        <p:cond delay="indefinite"/>
-                        <p:cond evt="onBegin" delay="0">
-                          <p:tn val="2"/>
-                        </p:cond>
-                      </p:stCondLst>
-                      <p:childTnLst>
-                        <p:par>
-                          <p:cTn id="4" fill="hold">
-                            <p:stCondLst>
-                              <p:cond delay="0"/>
-                            </p:stCondLst>
-                            <p:childTnLst>
-                              <p:par>
-                                <p:cTn id="5" presetID="10" presetClass="entr" presetSubtype="0" fill="hold" grpId="0" nodeType="withEffect">
-                                  <p:stCondLst>
-                                    <p:cond delay="1500"/>
-                                  </p:stCondLst>
-                                  <p:iterate>
-                                    <p:tmPct val="10000"/>
-                                  </p:iterate>
-                                  <p:childTnLst>
-                                    <p:set>
-                                      <p:cBhvr>
-                                        <p:cTn id="6" dur="1" fill="hold">
-                                          <p:stCondLst>
-                                            <p:cond delay="0"/>
-                                          </p:stCondLst>
-                                        </p:cTn>
-                                        <p:tgtEl>
-                                          <p:spTgt spid="3">
-                                            <p:txEl>
-                                              <p:pRg st="1" end="1"/>
-                                            </p:txEl>
-                                          </p:spTgt>
-                                        </p:tgtEl>
-                                        <p:attrNameLst>
-                                          <p:attrName>style.visibility</p:attrName>
-                                        </p:attrNameLst>
-                                      </p:cBhvr>
-                                      <p:to>
-                                        <p:strVal val="visible"/>
-                                      </p:to>
-                                    </p:set>
-                                    <p:animEffect transition="in" filter="fade">
-                                      <p:cBhvr>
-                                        <p:cTn id="7" dur="700"/>
-                                        <p:tgtEl>
-                                          <p:spTgt spid="3">
-                                            <p:txEl>
-                                              <p:pRg st="1" end="1"/>
-                                            </p:txEl>
-                                          </p:spTgt>
-                                        </p:tgtEl>
-                                      </p:cBhvr>
-                                    </p:animEffect>
-                                  </p:childTnLst>
-                                </p:cTn>
-                              </p:par>
-                            </p:childTnLst>
-                          </p:cTn>
-                        </p:par>
-                      </p:childTnLst>
-                    </p:cTn>
-                  </p:par>
-                </p:childTnLst>
-              </p:cTn>
-              <p:prevCondLst>
-                <p:cond evt="onPrev" delay="0">
-                  <p:tgtEl>
-                    <p:sldTgt/>
-                  </p:tgtEl>
-                </p:cond>
-              </p:prevCondLst>
-              <p:nextCondLst>
-                <p:cond evt="onNext" delay="0">
-                  <p:tgtEl>
-                    <p:sldTgt/>
-                  </p:tgtEl>
-                </p:cond>
-              </p:nextCondLst>
-            </p:seq>
-          </p:childTnLst>
-        </p:cTn>
-      </p:par>
-    </p:tnLst>
-    <p:bldLst>
-      <p:bldP spid="3" grpId="0" build="p"/>
-    </p:bldLst>
-  </p:timing>
 </p:sld>
 </file>
 
 <file path=ppt/slides/slide10.xml><?xml version="1.0" encoding="utf-8"?>
+<p:sld xmlns:a="http://schemas.openxmlformats.org/drawingml/2006/main" xmlns:r="http://schemas.openxmlformats.org/officeDocument/2006/relationships" xmlns:p="http://schemas.openxmlformats.org/presentationml/2006/main">
+  <p:cSld>
+    <p:bg>
+      <p:bgPr>
+        <a:solidFill>
+          <a:schemeClr val="tx1"/>
+        </a:solidFill>
+        <a:effectLst/>
+      </p:bgPr>
+    </p:bg>
+    <p:spTree>
+      <p:nvGrpSpPr>
+        <p:cNvPr id="1" name="">
+          <a:extLst>
+            <a:ext uri="{FF2B5EF4-FFF2-40B4-BE49-F238E27FC236}">
+              <a16:creationId xmlns:a16="http://schemas.microsoft.com/office/drawing/2014/main" id="{BD880269-F0C2-8131-4EE0-D78851E0F0DF}"/>
+            </a:ext>
+          </a:extLst>
+        </p:cNvPr>
+        <p:cNvGrpSpPr/>
+        <p:nvPr/>
+      </p:nvGrpSpPr>
+      <p:grpSpPr>
+        <a:xfrm>
+          <a:off x="0" y="0"/>
+          <a:ext cx="0" cy="0"/>
+          <a:chOff x="0" y="0"/>
+          <a:chExt cx="0" cy="0"/>
+        </a:xfrm>
+      </p:grpSpPr>
+      <p:sp>
+        <p:nvSpPr>
+          <p:cNvPr id="3" name="Subtitle 2">
+            <a:extLst>
+              <a:ext uri="{FF2B5EF4-FFF2-40B4-BE49-F238E27FC236}">
+                <a16:creationId xmlns:a16="http://schemas.microsoft.com/office/drawing/2014/main" id="{F0FFD390-F883-D262-DD50-1D3C4A74F4EA}"/>
+              </a:ext>
+            </a:extLst>
+          </p:cNvPr>
+          <p:cNvSpPr>
+            <a:spLocks noGrp="1"/>
+          </p:cNvSpPr>
+          <p:nvPr>
+            <p:ph type="subTitle" idx="1"/>
+          </p:nvPr>
+        </p:nvSpPr>
+        <p:spPr>
+          <a:xfrm>
+            <a:off x="144379" y="127591"/>
+            <a:ext cx="8903369" cy="6528390"/>
+          </a:xfrm>
+        </p:spPr>
+        <p:txBody>
+          <a:bodyPr>
+            <a:noAutofit/>
+          </a:bodyPr>
+          <a:lstStyle/>
+          <a:p>
+            <a:r>
+              <a:rPr lang="en-US" sz="4400" dirty="0">
+                <a:solidFill>
+                  <a:schemeClr val="bg1"/>
+                </a:solidFill>
+                <a:latin typeface="Avenir Medium" panose="02000503020000020003" pitchFamily="2" charset="0"/>
+                <a:ea typeface="Bodoni Ornaments" pitchFamily="2" charset="0"/>
+              </a:rPr>
+              <a:t> </a:t>
+            </a:r>
+          </a:p>
+          <a:p>
+            <a:endParaRPr lang="en-US" sz="4400" dirty="0">
+              <a:solidFill>
+                <a:schemeClr val="bg1"/>
+              </a:solidFill>
+              <a:latin typeface="Avenir Medium" panose="02000503020000020003" pitchFamily="2" charset="0"/>
+              <a:ea typeface="Bodoni Ornaments" pitchFamily="2" charset="0"/>
+            </a:endParaRPr>
+          </a:p>
+          <a:p>
+            <a:r>
+              <a:rPr lang="en-US" sz="4400" dirty="0">
+                <a:solidFill>
+                  <a:schemeClr val="bg1"/>
+                </a:solidFill>
+                <a:latin typeface="Avenir Medium" panose="02000503020000020003" pitchFamily="2" charset="0"/>
+                <a:ea typeface="Bodoni Ornaments" pitchFamily="2" charset="0"/>
+              </a:rPr>
+              <a:t>Hear your people sing "Holy"</a:t>
+            </a:r>
+          </a:p>
+          <a:p>
+            <a:r>
+              <a:rPr lang="en-US" sz="4400" dirty="0">
+                <a:solidFill>
+                  <a:schemeClr val="bg1"/>
+                </a:solidFill>
+                <a:latin typeface="Avenir Medium" panose="02000503020000020003" pitchFamily="2" charset="0"/>
+                <a:ea typeface="Bodoni Ornaments" pitchFamily="2" charset="0"/>
+              </a:rPr>
+              <a:t>To the King of Kings "Holy"</a:t>
+            </a:r>
+          </a:p>
+          <a:p>
+            <a:r>
+              <a:rPr lang="en-US" sz="4400" dirty="0">
+                <a:solidFill>
+                  <a:schemeClr val="bg1"/>
+                </a:solidFill>
+                <a:latin typeface="Avenir Medium" panose="02000503020000020003" pitchFamily="2" charset="0"/>
+                <a:ea typeface="Bodoni Ornaments" pitchFamily="2" charset="0"/>
+              </a:rPr>
+              <a:t>You will always be holy</a:t>
+            </a:r>
+          </a:p>
+          <a:p>
+            <a:r>
+              <a:rPr lang="en-US" sz="4400" dirty="0">
+                <a:solidFill>
+                  <a:schemeClr val="bg1"/>
+                </a:solidFill>
+                <a:latin typeface="Avenir Medium" panose="02000503020000020003" pitchFamily="2" charset="0"/>
+                <a:ea typeface="Bodoni Ornaments" pitchFamily="2" charset="0"/>
+              </a:rPr>
+              <a:t>Holy forever</a:t>
+            </a:r>
+          </a:p>
+        </p:txBody>
+      </p:sp>
+    </p:spTree>
+    <p:extLst>
+      <p:ext uri="{BB962C8B-B14F-4D97-AF65-F5344CB8AC3E}">
+        <p14:creationId xmlns:p14="http://schemas.microsoft.com/office/powerpoint/2010/main" val="1326796751"/>
+      </p:ext>
+    </p:extLst>
+  </p:cSld>
+  <p:clrMapOvr>
+    <a:masterClrMapping/>
+  </p:clrMapOvr>
+</p:sld>
+</file>
+
+<file path=ppt/slides/slide11.xml><?xml version="1.0" encoding="utf-8"?>
+<p:sld xmlns:a="http://schemas.openxmlformats.org/drawingml/2006/main" xmlns:r="http://schemas.openxmlformats.org/officeDocument/2006/relationships" xmlns:p="http://schemas.openxmlformats.org/presentationml/2006/main">
+  <p:cSld>
+    <p:bg>
+      <p:bgPr>
+        <a:solidFill>
+          <a:schemeClr val="tx1"/>
+        </a:solidFill>
+        <a:effectLst/>
+      </p:bgPr>
+    </p:bg>
+    <p:spTree>
+      <p:nvGrpSpPr>
+        <p:cNvPr id="1" name="">
+          <a:extLst>
+            <a:ext uri="{FF2B5EF4-FFF2-40B4-BE49-F238E27FC236}">
+              <a16:creationId xmlns:a16="http://schemas.microsoft.com/office/drawing/2014/main" id="{D80DF180-4776-F955-8F77-3594FD509252}"/>
+            </a:ext>
+          </a:extLst>
+        </p:cNvPr>
+        <p:cNvGrpSpPr/>
+        <p:nvPr/>
+      </p:nvGrpSpPr>
+      <p:grpSpPr>
+        <a:xfrm>
+          <a:off x="0" y="0"/>
+          <a:ext cx="0" cy="0"/>
+          <a:chOff x="0" y="0"/>
+          <a:chExt cx="0" cy="0"/>
+        </a:xfrm>
+      </p:grpSpPr>
+      <p:sp>
+        <p:nvSpPr>
+          <p:cNvPr id="3" name="Subtitle 2">
+            <a:extLst>
+              <a:ext uri="{FF2B5EF4-FFF2-40B4-BE49-F238E27FC236}">
+                <a16:creationId xmlns:a16="http://schemas.microsoft.com/office/drawing/2014/main" id="{C79F6856-D620-D2BA-AE81-819D3A03C60C}"/>
+              </a:ext>
+            </a:extLst>
+          </p:cNvPr>
+          <p:cNvSpPr>
+            <a:spLocks noGrp="1"/>
+          </p:cNvSpPr>
+          <p:nvPr>
+            <p:ph type="subTitle" idx="1"/>
+          </p:nvPr>
+        </p:nvSpPr>
+        <p:spPr>
+          <a:xfrm>
+            <a:off x="84221" y="116958"/>
+            <a:ext cx="8891337" cy="6602819"/>
+          </a:xfrm>
+        </p:spPr>
+        <p:txBody>
+          <a:bodyPr>
+            <a:noAutofit/>
+          </a:bodyPr>
+          <a:lstStyle/>
+          <a:p>
+            <a:endParaRPr lang="en-US" sz="4400" dirty="0">
+              <a:solidFill>
+                <a:schemeClr val="bg1"/>
+              </a:solidFill>
+              <a:latin typeface="Avenir Medium" panose="02000503020000020003" pitchFamily="2" charset="0"/>
+              <a:ea typeface="Bodoni Ornaments" pitchFamily="2" charset="0"/>
+            </a:endParaRPr>
+          </a:p>
+          <a:p>
+            <a:endParaRPr lang="en-US" sz="4400" dirty="0">
+              <a:solidFill>
+                <a:schemeClr val="bg1"/>
+              </a:solidFill>
+              <a:latin typeface="Avenir Medium" panose="02000503020000020003" pitchFamily="2" charset="0"/>
+              <a:ea typeface="Bodoni Ornaments" pitchFamily="2" charset="0"/>
+            </a:endParaRPr>
+          </a:p>
+          <a:p>
+            <a:r>
+              <a:rPr lang="en-US" sz="4400" dirty="0">
+                <a:solidFill>
+                  <a:schemeClr val="bg1"/>
+                </a:solidFill>
+                <a:latin typeface="Avenir Medium" panose="02000503020000020003" pitchFamily="2" charset="0"/>
+                <a:ea typeface="Bodoni Ornaments" pitchFamily="2" charset="0"/>
+              </a:rPr>
+              <a:t>Your name is the highest</a:t>
+            </a:r>
+          </a:p>
+          <a:p>
+            <a:r>
+              <a:rPr lang="en-US" sz="4400" dirty="0">
+                <a:solidFill>
+                  <a:schemeClr val="bg1"/>
+                </a:solidFill>
+                <a:latin typeface="Avenir Medium" panose="02000503020000020003" pitchFamily="2" charset="0"/>
+                <a:ea typeface="Bodoni Ornaments" pitchFamily="2" charset="0"/>
+              </a:rPr>
+              <a:t>Your name is the greatest</a:t>
+            </a:r>
+          </a:p>
+          <a:p>
+            <a:r>
+              <a:rPr lang="en-US" sz="4400" dirty="0">
+                <a:solidFill>
+                  <a:schemeClr val="bg1"/>
+                </a:solidFill>
+                <a:latin typeface="Avenir Medium" panose="02000503020000020003" pitchFamily="2" charset="0"/>
+                <a:ea typeface="Bodoni Ornaments" pitchFamily="2" charset="0"/>
+              </a:rPr>
+              <a:t>Your name stands above them all</a:t>
+            </a:r>
+          </a:p>
+          <a:p>
+            <a:r>
+              <a:rPr lang="en-US" sz="4400" dirty="0">
+                <a:solidFill>
+                  <a:schemeClr val="bg1"/>
+                </a:solidFill>
+                <a:latin typeface="Avenir Medium" panose="02000503020000020003" pitchFamily="2" charset="0"/>
+                <a:ea typeface="Bodoni Ornaments" pitchFamily="2" charset="0"/>
+              </a:rPr>
+              <a:t> </a:t>
+            </a:r>
+          </a:p>
+        </p:txBody>
+      </p:sp>
+    </p:spTree>
+    <p:extLst>
+      <p:ext uri="{BB962C8B-B14F-4D97-AF65-F5344CB8AC3E}">
+        <p14:creationId xmlns:p14="http://schemas.microsoft.com/office/powerpoint/2010/main" val="375700686"/>
+      </p:ext>
+    </p:extLst>
+  </p:cSld>
+  <p:clrMapOvr>
+    <a:masterClrMapping/>
+  </p:clrMapOvr>
+</p:sld>
+</file>
+
+<file path=ppt/slides/slide12.xml><?xml version="1.0" encoding="utf-8"?>
+<p:sld xmlns:a="http://schemas.openxmlformats.org/drawingml/2006/main" xmlns:r="http://schemas.openxmlformats.org/officeDocument/2006/relationships" xmlns:p="http://schemas.openxmlformats.org/presentationml/2006/main">
+  <p:cSld>
+    <p:bg>
+      <p:bgPr>
+        <a:solidFill>
+          <a:schemeClr val="tx1"/>
+        </a:solidFill>
+        <a:effectLst/>
+      </p:bgPr>
+    </p:bg>
+    <p:spTree>
+      <p:nvGrpSpPr>
+        <p:cNvPr id="1" name="">
+          <a:extLst>
+            <a:ext uri="{FF2B5EF4-FFF2-40B4-BE49-F238E27FC236}">
+              <a16:creationId xmlns:a16="http://schemas.microsoft.com/office/drawing/2014/main" id="{660F44CB-E8B9-E6B1-4410-3F978CBE8CCE}"/>
+            </a:ext>
+          </a:extLst>
+        </p:cNvPr>
+        <p:cNvGrpSpPr/>
+        <p:nvPr/>
+      </p:nvGrpSpPr>
+      <p:grpSpPr>
+        <a:xfrm>
+          <a:off x="0" y="0"/>
+          <a:ext cx="0" cy="0"/>
+          <a:chOff x="0" y="0"/>
+          <a:chExt cx="0" cy="0"/>
+        </a:xfrm>
+      </p:grpSpPr>
+      <p:sp>
+        <p:nvSpPr>
+          <p:cNvPr id="3" name="Subtitle 2">
+            <a:extLst>
+              <a:ext uri="{FF2B5EF4-FFF2-40B4-BE49-F238E27FC236}">
+                <a16:creationId xmlns:a16="http://schemas.microsoft.com/office/drawing/2014/main" id="{8ECFA5D4-3D24-7026-BBCF-DA4F3F2315E6}"/>
+              </a:ext>
+            </a:extLst>
+          </p:cNvPr>
+          <p:cNvSpPr>
+            <a:spLocks noGrp="1"/>
+          </p:cNvSpPr>
+          <p:nvPr>
+            <p:ph type="subTitle" idx="1"/>
+          </p:nvPr>
+        </p:nvSpPr>
+        <p:spPr>
+          <a:xfrm>
+            <a:off x="84221" y="116958"/>
+            <a:ext cx="8891337" cy="6602819"/>
+          </a:xfrm>
+        </p:spPr>
+        <p:txBody>
+          <a:bodyPr>
+            <a:noAutofit/>
+          </a:bodyPr>
+          <a:lstStyle/>
+          <a:p>
+            <a:endParaRPr lang="en-US" sz="4400" dirty="0">
+              <a:solidFill>
+                <a:schemeClr val="bg1"/>
+              </a:solidFill>
+              <a:latin typeface="Avenir Medium" panose="02000503020000020003" pitchFamily="2" charset="0"/>
+              <a:ea typeface="Bodoni Ornaments" pitchFamily="2" charset="0"/>
+            </a:endParaRPr>
+          </a:p>
+          <a:p>
+            <a:endParaRPr lang="en-US" sz="4400" dirty="0">
+              <a:solidFill>
+                <a:schemeClr val="bg1"/>
+              </a:solidFill>
+              <a:latin typeface="Avenir Medium" panose="02000503020000020003" pitchFamily="2" charset="0"/>
+              <a:ea typeface="Bodoni Ornaments" pitchFamily="2" charset="0"/>
+            </a:endParaRPr>
+          </a:p>
+          <a:p>
+            <a:r>
+              <a:rPr lang="en-US" sz="4400" dirty="0">
+                <a:solidFill>
+                  <a:schemeClr val="bg1"/>
+                </a:solidFill>
+                <a:latin typeface="Avenir Medium" panose="02000503020000020003" pitchFamily="2" charset="0"/>
+                <a:ea typeface="Bodoni Ornaments" pitchFamily="2" charset="0"/>
+              </a:rPr>
+              <a:t>All thrones and dominions</a:t>
+            </a:r>
+          </a:p>
+          <a:p>
+            <a:r>
+              <a:rPr lang="en-US" sz="4400" dirty="0">
+                <a:solidFill>
+                  <a:schemeClr val="bg1"/>
+                </a:solidFill>
+                <a:latin typeface="Avenir Medium" panose="02000503020000020003" pitchFamily="2" charset="0"/>
+                <a:ea typeface="Bodoni Ornaments" pitchFamily="2" charset="0"/>
+              </a:rPr>
+              <a:t>All powers and positions</a:t>
+            </a:r>
+          </a:p>
+          <a:p>
+            <a:r>
+              <a:rPr lang="en-US" sz="4400" dirty="0">
+                <a:solidFill>
+                  <a:schemeClr val="bg1"/>
+                </a:solidFill>
+                <a:latin typeface="Avenir Medium" panose="02000503020000020003" pitchFamily="2" charset="0"/>
+                <a:ea typeface="Bodoni Ornaments" pitchFamily="2" charset="0"/>
+              </a:rPr>
+              <a:t>Your name stands above them all</a:t>
+            </a:r>
+          </a:p>
+          <a:p>
+            <a:r>
+              <a:rPr lang="en-US" sz="4400" dirty="0">
+                <a:solidFill>
+                  <a:schemeClr val="bg1"/>
+                </a:solidFill>
+                <a:latin typeface="Avenir Medium" panose="02000503020000020003" pitchFamily="2" charset="0"/>
+                <a:ea typeface="Bodoni Ornaments" pitchFamily="2" charset="0"/>
+              </a:rPr>
+              <a:t> </a:t>
+            </a:r>
+          </a:p>
+        </p:txBody>
+      </p:sp>
+    </p:spTree>
+    <p:extLst>
+      <p:ext uri="{BB962C8B-B14F-4D97-AF65-F5344CB8AC3E}">
+        <p14:creationId xmlns:p14="http://schemas.microsoft.com/office/powerpoint/2010/main" val="3850958701"/>
+      </p:ext>
+    </p:extLst>
+  </p:cSld>
+  <p:clrMapOvr>
+    <a:masterClrMapping/>
+  </p:clrMapOvr>
+</p:sld>
+</file>
+
+<file path=ppt/slides/slide13.xml><?xml version="1.0" encoding="utf-8"?>
+<p:sld xmlns:a="http://schemas.openxmlformats.org/drawingml/2006/main" xmlns:r="http://schemas.openxmlformats.org/officeDocument/2006/relationships" xmlns:p="http://schemas.openxmlformats.org/presentationml/2006/main">
+  <p:cSld>
+    <p:bg>
+      <p:bgPr>
+        <a:solidFill>
+          <a:schemeClr val="tx1"/>
+        </a:solidFill>
+        <a:effectLst/>
+      </p:bgPr>
+    </p:bg>
+    <p:spTree>
+      <p:nvGrpSpPr>
+        <p:cNvPr id="1" name="">
+          <a:extLst>
+            <a:ext uri="{FF2B5EF4-FFF2-40B4-BE49-F238E27FC236}">
+              <a16:creationId xmlns:a16="http://schemas.microsoft.com/office/drawing/2014/main" id="{2C224625-3A83-28F8-F6D4-8773C84C1421}"/>
+            </a:ext>
+          </a:extLst>
+        </p:cNvPr>
+        <p:cNvGrpSpPr/>
+        <p:nvPr/>
+      </p:nvGrpSpPr>
+      <p:grpSpPr>
+        <a:xfrm>
+          <a:off x="0" y="0"/>
+          <a:ext cx="0" cy="0"/>
+          <a:chOff x="0" y="0"/>
+          <a:chExt cx="0" cy="0"/>
+        </a:xfrm>
+      </p:grpSpPr>
+      <p:sp>
+        <p:nvSpPr>
+          <p:cNvPr id="3" name="Subtitle 2">
+            <a:extLst>
+              <a:ext uri="{FF2B5EF4-FFF2-40B4-BE49-F238E27FC236}">
+                <a16:creationId xmlns:a16="http://schemas.microsoft.com/office/drawing/2014/main" id="{794BC0E3-10D5-8037-54C0-EDD5EC08C67B}"/>
+              </a:ext>
+            </a:extLst>
+          </p:cNvPr>
+          <p:cNvSpPr>
+            <a:spLocks noGrp="1"/>
+          </p:cNvSpPr>
+          <p:nvPr>
+            <p:ph type="subTitle" idx="1"/>
+          </p:nvPr>
+        </p:nvSpPr>
+        <p:spPr>
+          <a:xfrm>
+            <a:off x="84221" y="116958"/>
+            <a:ext cx="8891337" cy="6602819"/>
+          </a:xfrm>
+        </p:spPr>
+        <p:txBody>
+          <a:bodyPr>
+            <a:noAutofit/>
+          </a:bodyPr>
+          <a:lstStyle/>
+          <a:p>
+            <a:endParaRPr lang="en-US" sz="4400" dirty="0">
+              <a:solidFill>
+                <a:schemeClr val="bg1"/>
+              </a:solidFill>
+              <a:latin typeface="Avenir Medium" panose="02000503020000020003" pitchFamily="2" charset="0"/>
+              <a:ea typeface="Bodoni Ornaments" pitchFamily="2" charset="0"/>
+            </a:endParaRPr>
+          </a:p>
+          <a:p>
+            <a:endParaRPr lang="en-US" sz="4400" dirty="0">
+              <a:solidFill>
+                <a:schemeClr val="bg1"/>
+              </a:solidFill>
+              <a:latin typeface="Avenir Medium" panose="02000503020000020003" pitchFamily="2" charset="0"/>
+              <a:ea typeface="Bodoni Ornaments" pitchFamily="2" charset="0"/>
+            </a:endParaRPr>
+          </a:p>
+          <a:p>
+            <a:r>
+              <a:rPr lang="en-US" sz="4400" dirty="0">
+                <a:solidFill>
+                  <a:schemeClr val="bg1"/>
+                </a:solidFill>
+                <a:latin typeface="Avenir Medium" panose="02000503020000020003" pitchFamily="2" charset="0"/>
+                <a:ea typeface="Bodoni Ornaments" pitchFamily="2" charset="0"/>
+              </a:rPr>
+              <a:t>Your name is the highest</a:t>
+            </a:r>
+          </a:p>
+          <a:p>
+            <a:r>
+              <a:rPr lang="en-US" sz="4400" dirty="0">
+                <a:solidFill>
+                  <a:schemeClr val="bg1"/>
+                </a:solidFill>
+                <a:latin typeface="Avenir Medium" panose="02000503020000020003" pitchFamily="2" charset="0"/>
+                <a:ea typeface="Bodoni Ornaments" pitchFamily="2" charset="0"/>
+              </a:rPr>
+              <a:t>Your name is the greatest</a:t>
+            </a:r>
+          </a:p>
+          <a:p>
+            <a:r>
+              <a:rPr lang="en-US" sz="4400" dirty="0">
+                <a:solidFill>
+                  <a:schemeClr val="bg1"/>
+                </a:solidFill>
+                <a:latin typeface="Avenir Medium" panose="02000503020000020003" pitchFamily="2" charset="0"/>
+                <a:ea typeface="Bodoni Ornaments" pitchFamily="2" charset="0"/>
+              </a:rPr>
+              <a:t>Your name stands above them all</a:t>
+            </a:r>
+          </a:p>
+          <a:p>
+            <a:r>
+              <a:rPr lang="en-US" sz="4400" dirty="0">
+                <a:solidFill>
+                  <a:schemeClr val="bg1"/>
+                </a:solidFill>
+                <a:latin typeface="Avenir Medium" panose="02000503020000020003" pitchFamily="2" charset="0"/>
+                <a:ea typeface="Bodoni Ornaments" pitchFamily="2" charset="0"/>
+              </a:rPr>
+              <a:t> </a:t>
+            </a:r>
+          </a:p>
+        </p:txBody>
+      </p:sp>
+    </p:spTree>
+    <p:extLst>
+      <p:ext uri="{BB962C8B-B14F-4D97-AF65-F5344CB8AC3E}">
+        <p14:creationId xmlns:p14="http://schemas.microsoft.com/office/powerpoint/2010/main" val="1242102635"/>
+      </p:ext>
+    </p:extLst>
+  </p:cSld>
+  <p:clrMapOvr>
+    <a:masterClrMapping/>
+  </p:clrMapOvr>
+</p:sld>
+</file>
+
+<file path=ppt/slides/slide14.xml><?xml version="1.0" encoding="utf-8"?>
+<p:sld xmlns:a="http://schemas.openxmlformats.org/drawingml/2006/main" xmlns:r="http://schemas.openxmlformats.org/officeDocument/2006/relationships" xmlns:p="http://schemas.openxmlformats.org/presentationml/2006/main">
+  <p:cSld>
+    <p:bg>
+      <p:bgPr>
+        <a:solidFill>
+          <a:schemeClr val="tx1"/>
+        </a:solidFill>
+        <a:effectLst/>
+      </p:bgPr>
+    </p:bg>
+    <p:spTree>
+      <p:nvGrpSpPr>
+        <p:cNvPr id="1" name="">
+          <a:extLst>
+            <a:ext uri="{FF2B5EF4-FFF2-40B4-BE49-F238E27FC236}">
+              <a16:creationId xmlns:a16="http://schemas.microsoft.com/office/drawing/2014/main" id="{79129775-2A77-7E69-6721-06D7269DE39D}"/>
+            </a:ext>
+          </a:extLst>
+        </p:cNvPr>
+        <p:cNvGrpSpPr/>
+        <p:nvPr/>
+      </p:nvGrpSpPr>
+      <p:grpSpPr>
+        <a:xfrm>
+          <a:off x="0" y="0"/>
+          <a:ext cx="0" cy="0"/>
+          <a:chOff x="0" y="0"/>
+          <a:chExt cx="0" cy="0"/>
+        </a:xfrm>
+      </p:grpSpPr>
+      <p:sp>
+        <p:nvSpPr>
+          <p:cNvPr id="3" name="Subtitle 2">
+            <a:extLst>
+              <a:ext uri="{FF2B5EF4-FFF2-40B4-BE49-F238E27FC236}">
+                <a16:creationId xmlns:a16="http://schemas.microsoft.com/office/drawing/2014/main" id="{FB6E4D23-5E95-5F34-1AA5-C25237028F54}"/>
+              </a:ext>
+            </a:extLst>
+          </p:cNvPr>
+          <p:cNvSpPr>
+            <a:spLocks noGrp="1"/>
+          </p:cNvSpPr>
+          <p:nvPr>
+            <p:ph type="subTitle" idx="1"/>
+          </p:nvPr>
+        </p:nvSpPr>
+        <p:spPr>
+          <a:xfrm>
+            <a:off x="84221" y="116958"/>
+            <a:ext cx="8891337" cy="6602819"/>
+          </a:xfrm>
+        </p:spPr>
+        <p:txBody>
+          <a:bodyPr>
+            <a:noAutofit/>
+          </a:bodyPr>
+          <a:lstStyle/>
+          <a:p>
+            <a:endParaRPr lang="en-US" sz="4400" dirty="0">
+              <a:solidFill>
+                <a:schemeClr val="bg1"/>
+              </a:solidFill>
+              <a:latin typeface="Avenir Medium" panose="02000503020000020003" pitchFamily="2" charset="0"/>
+              <a:ea typeface="Bodoni Ornaments" pitchFamily="2" charset="0"/>
+            </a:endParaRPr>
+          </a:p>
+          <a:p>
+            <a:endParaRPr lang="en-US" sz="4400" dirty="0">
+              <a:solidFill>
+                <a:schemeClr val="bg1"/>
+              </a:solidFill>
+              <a:latin typeface="Avenir Medium" panose="02000503020000020003" pitchFamily="2" charset="0"/>
+              <a:ea typeface="Bodoni Ornaments" pitchFamily="2" charset="0"/>
+            </a:endParaRPr>
+          </a:p>
+          <a:p>
+            <a:r>
+              <a:rPr lang="en-US" sz="4400" dirty="0">
+                <a:solidFill>
+                  <a:schemeClr val="bg1"/>
+                </a:solidFill>
+                <a:latin typeface="Avenir Medium" panose="02000503020000020003" pitchFamily="2" charset="0"/>
+                <a:ea typeface="Bodoni Ornaments" pitchFamily="2" charset="0"/>
+              </a:rPr>
+              <a:t>All thrones and dominions</a:t>
+            </a:r>
+          </a:p>
+          <a:p>
+            <a:r>
+              <a:rPr lang="en-US" sz="4400" dirty="0">
+                <a:solidFill>
+                  <a:schemeClr val="bg1"/>
+                </a:solidFill>
+                <a:latin typeface="Avenir Medium" panose="02000503020000020003" pitchFamily="2" charset="0"/>
+                <a:ea typeface="Bodoni Ornaments" pitchFamily="2" charset="0"/>
+              </a:rPr>
+              <a:t>All powers and positions</a:t>
+            </a:r>
+          </a:p>
+          <a:p>
+            <a:r>
+              <a:rPr lang="en-US" sz="4400" dirty="0">
+                <a:solidFill>
+                  <a:schemeClr val="bg1"/>
+                </a:solidFill>
+                <a:latin typeface="Avenir Medium" panose="02000503020000020003" pitchFamily="2" charset="0"/>
+                <a:ea typeface="Bodoni Ornaments" pitchFamily="2" charset="0"/>
+              </a:rPr>
+              <a:t>Your name stands above them all</a:t>
+            </a:r>
+          </a:p>
+          <a:p>
+            <a:r>
+              <a:rPr lang="en-US" sz="4400" dirty="0">
+                <a:solidFill>
+                  <a:schemeClr val="bg1"/>
+                </a:solidFill>
+                <a:latin typeface="Avenir Medium" panose="02000503020000020003" pitchFamily="2" charset="0"/>
+                <a:ea typeface="Bodoni Ornaments" pitchFamily="2" charset="0"/>
+              </a:rPr>
+              <a:t> </a:t>
+            </a:r>
+          </a:p>
+        </p:txBody>
+      </p:sp>
+    </p:spTree>
+    <p:extLst>
+      <p:ext uri="{BB962C8B-B14F-4D97-AF65-F5344CB8AC3E}">
+        <p14:creationId xmlns:p14="http://schemas.microsoft.com/office/powerpoint/2010/main" val="4212294759"/>
+      </p:ext>
+    </p:extLst>
+  </p:cSld>
+  <p:clrMapOvr>
+    <a:masterClrMapping/>
+  </p:clrMapOvr>
+</p:sld>
+</file>
+
+<file path=ppt/slides/slide15.xml><?xml version="1.0" encoding="utf-8"?>
+<p:sld xmlns:a="http://schemas.openxmlformats.org/drawingml/2006/main" xmlns:r="http://schemas.openxmlformats.org/officeDocument/2006/relationships" xmlns:p="http://schemas.openxmlformats.org/presentationml/2006/main">
+  <p:cSld>
+    <p:bg>
+      <p:bgPr>
+        <a:solidFill>
+          <a:schemeClr val="tx1"/>
+        </a:solidFill>
+        <a:effectLst/>
+      </p:bgPr>
+    </p:bg>
+    <p:spTree>
+      <p:nvGrpSpPr>
+        <p:cNvPr id="1" name="">
+          <a:extLst>
+            <a:ext uri="{FF2B5EF4-FFF2-40B4-BE49-F238E27FC236}">
+              <a16:creationId xmlns:a16="http://schemas.microsoft.com/office/drawing/2014/main" id="{80A3F87C-0BAC-57C4-85B2-0EB811CC570C}"/>
+            </a:ext>
+          </a:extLst>
+        </p:cNvPr>
+        <p:cNvGrpSpPr/>
+        <p:nvPr/>
+      </p:nvGrpSpPr>
+      <p:grpSpPr>
+        <a:xfrm>
+          <a:off x="0" y="0"/>
+          <a:ext cx="0" cy="0"/>
+          <a:chOff x="0" y="0"/>
+          <a:chExt cx="0" cy="0"/>
+        </a:xfrm>
+      </p:grpSpPr>
+      <p:sp>
+        <p:nvSpPr>
+          <p:cNvPr id="3" name="Subtitle 2">
+            <a:extLst>
+              <a:ext uri="{FF2B5EF4-FFF2-40B4-BE49-F238E27FC236}">
+                <a16:creationId xmlns:a16="http://schemas.microsoft.com/office/drawing/2014/main" id="{719BB2D9-3879-1FA2-6B62-0AC127D853E9}"/>
+              </a:ext>
+            </a:extLst>
+          </p:cNvPr>
+          <p:cNvSpPr>
+            <a:spLocks noGrp="1"/>
+          </p:cNvSpPr>
+          <p:nvPr>
+            <p:ph type="subTitle" idx="1"/>
+          </p:nvPr>
+        </p:nvSpPr>
+        <p:spPr>
+          <a:xfrm>
+            <a:off x="144379" y="207818"/>
+            <a:ext cx="8903369" cy="6386945"/>
+          </a:xfrm>
+        </p:spPr>
+        <p:txBody>
+          <a:bodyPr>
+            <a:noAutofit/>
+          </a:bodyPr>
+          <a:lstStyle/>
+          <a:p>
+            <a:r>
+              <a:rPr lang="en-US" sz="4400" dirty="0">
+                <a:solidFill>
+                  <a:schemeClr val="bg1"/>
+                </a:solidFill>
+                <a:latin typeface="Avenir Medium" panose="02000503020000020003" pitchFamily="2" charset="0"/>
+                <a:ea typeface="Bodoni Ornaments" pitchFamily="2" charset="0"/>
+              </a:rPr>
+              <a:t> </a:t>
+            </a:r>
+          </a:p>
+          <a:p>
+            <a:endParaRPr lang="en-US" sz="4400" dirty="0">
+              <a:solidFill>
+                <a:schemeClr val="bg1"/>
+              </a:solidFill>
+              <a:latin typeface="Avenir Medium" panose="02000503020000020003" pitchFamily="2" charset="0"/>
+              <a:ea typeface="Bodoni Ornaments" pitchFamily="2" charset="0"/>
+            </a:endParaRPr>
+          </a:p>
+          <a:p>
+            <a:r>
+              <a:rPr lang="en-US" sz="4400" dirty="0">
+                <a:solidFill>
+                  <a:schemeClr val="bg1"/>
+                </a:solidFill>
+                <a:latin typeface="Avenir Medium" panose="02000503020000020003" pitchFamily="2" charset="0"/>
+                <a:ea typeface="Bodoni Ornaments" pitchFamily="2" charset="0"/>
+              </a:rPr>
+              <a:t>And the angels cry "Holy"</a:t>
+            </a:r>
+          </a:p>
+          <a:p>
+            <a:r>
+              <a:rPr lang="en-US" sz="4400" dirty="0">
+                <a:solidFill>
+                  <a:schemeClr val="bg1"/>
+                </a:solidFill>
+                <a:latin typeface="Avenir Medium" panose="02000503020000020003" pitchFamily="2" charset="0"/>
+                <a:ea typeface="Bodoni Ornaments" pitchFamily="2" charset="0"/>
+              </a:rPr>
+              <a:t>All creation cries "Holy"</a:t>
+            </a:r>
+          </a:p>
+          <a:p>
+            <a:r>
+              <a:rPr lang="en-US" sz="4400" dirty="0">
+                <a:solidFill>
+                  <a:schemeClr val="bg1"/>
+                </a:solidFill>
+                <a:latin typeface="Avenir Medium" panose="02000503020000020003" pitchFamily="2" charset="0"/>
+                <a:ea typeface="Bodoni Ornaments" pitchFamily="2" charset="0"/>
+              </a:rPr>
+              <a:t>You are lifted high, holy</a:t>
+            </a:r>
+          </a:p>
+          <a:p>
+            <a:r>
+              <a:rPr lang="en-US" sz="4400" dirty="0">
+                <a:solidFill>
+                  <a:schemeClr val="bg1"/>
+                </a:solidFill>
+                <a:latin typeface="Avenir Medium" panose="02000503020000020003" pitchFamily="2" charset="0"/>
+                <a:ea typeface="Bodoni Ornaments" pitchFamily="2" charset="0"/>
+              </a:rPr>
+              <a:t>Holy forever</a:t>
+            </a:r>
+          </a:p>
+        </p:txBody>
+      </p:sp>
+    </p:spTree>
+    <p:extLst>
+      <p:ext uri="{BB962C8B-B14F-4D97-AF65-F5344CB8AC3E}">
+        <p14:creationId xmlns:p14="http://schemas.microsoft.com/office/powerpoint/2010/main" val="3914943623"/>
+      </p:ext>
+    </p:extLst>
+  </p:cSld>
+  <p:clrMapOvr>
+    <a:masterClrMapping/>
+  </p:clrMapOvr>
+</p:sld>
+</file>
+
+<file path=ppt/slides/slide16.xml><?xml version="1.0" encoding="utf-8"?>
+<p:sld xmlns:a="http://schemas.openxmlformats.org/drawingml/2006/main" xmlns:r="http://schemas.openxmlformats.org/officeDocument/2006/relationships" xmlns:p="http://schemas.openxmlformats.org/presentationml/2006/main">
+  <p:cSld>
+    <p:bg>
+      <p:bgPr>
+        <a:solidFill>
+          <a:schemeClr val="tx1"/>
+        </a:solidFill>
+        <a:effectLst/>
+      </p:bgPr>
+    </p:bg>
+    <p:spTree>
+      <p:nvGrpSpPr>
+        <p:cNvPr id="1" name="">
+          <a:extLst>
+            <a:ext uri="{FF2B5EF4-FFF2-40B4-BE49-F238E27FC236}">
+              <a16:creationId xmlns:a16="http://schemas.microsoft.com/office/drawing/2014/main" id="{FE2941C4-E37D-A15E-24B1-EE43A754F81F}"/>
+            </a:ext>
+          </a:extLst>
+        </p:cNvPr>
+        <p:cNvGrpSpPr/>
+        <p:nvPr/>
+      </p:nvGrpSpPr>
+      <p:grpSpPr>
+        <a:xfrm>
+          <a:off x="0" y="0"/>
+          <a:ext cx="0" cy="0"/>
+          <a:chOff x="0" y="0"/>
+          <a:chExt cx="0" cy="0"/>
+        </a:xfrm>
+      </p:grpSpPr>
+      <p:sp>
+        <p:nvSpPr>
+          <p:cNvPr id="3" name="Subtitle 2">
+            <a:extLst>
+              <a:ext uri="{FF2B5EF4-FFF2-40B4-BE49-F238E27FC236}">
+                <a16:creationId xmlns:a16="http://schemas.microsoft.com/office/drawing/2014/main" id="{17904550-4DEF-3AC9-7F25-88D355DAC93F}"/>
+              </a:ext>
+            </a:extLst>
+          </p:cNvPr>
+          <p:cNvSpPr>
+            <a:spLocks noGrp="1"/>
+          </p:cNvSpPr>
+          <p:nvPr>
+            <p:ph type="subTitle" idx="1"/>
+          </p:nvPr>
+        </p:nvSpPr>
+        <p:spPr>
+          <a:xfrm>
+            <a:off x="144379" y="127591"/>
+            <a:ext cx="8903369" cy="6528390"/>
+          </a:xfrm>
+        </p:spPr>
+        <p:txBody>
+          <a:bodyPr>
+            <a:noAutofit/>
+          </a:bodyPr>
+          <a:lstStyle/>
+          <a:p>
+            <a:r>
+              <a:rPr lang="en-US" sz="4400" dirty="0">
+                <a:solidFill>
+                  <a:schemeClr val="bg1"/>
+                </a:solidFill>
+                <a:latin typeface="Avenir Medium" panose="02000503020000020003" pitchFamily="2" charset="0"/>
+                <a:ea typeface="Bodoni Ornaments" pitchFamily="2" charset="0"/>
+              </a:rPr>
+              <a:t> </a:t>
+            </a:r>
+          </a:p>
+          <a:p>
+            <a:endParaRPr lang="en-US" sz="4400" dirty="0">
+              <a:solidFill>
+                <a:schemeClr val="bg1"/>
+              </a:solidFill>
+              <a:latin typeface="Avenir Medium" panose="02000503020000020003" pitchFamily="2" charset="0"/>
+              <a:ea typeface="Bodoni Ornaments" pitchFamily="2" charset="0"/>
+            </a:endParaRPr>
+          </a:p>
+          <a:p>
+            <a:r>
+              <a:rPr lang="en-US" sz="4400" dirty="0">
+                <a:solidFill>
+                  <a:schemeClr val="bg1"/>
+                </a:solidFill>
+                <a:latin typeface="Avenir Medium" panose="02000503020000020003" pitchFamily="2" charset="0"/>
+                <a:ea typeface="Bodoni Ornaments" pitchFamily="2" charset="0"/>
+              </a:rPr>
+              <a:t>Hear your people sing "Holy"</a:t>
+            </a:r>
+          </a:p>
+          <a:p>
+            <a:r>
+              <a:rPr lang="en-US" sz="4400" dirty="0">
+                <a:solidFill>
+                  <a:schemeClr val="bg1"/>
+                </a:solidFill>
+                <a:latin typeface="Avenir Medium" panose="02000503020000020003" pitchFamily="2" charset="0"/>
+                <a:ea typeface="Bodoni Ornaments" pitchFamily="2" charset="0"/>
+              </a:rPr>
+              <a:t>To the King of Kings "Holy"</a:t>
+            </a:r>
+          </a:p>
+          <a:p>
+            <a:r>
+              <a:rPr lang="en-US" sz="4400" dirty="0">
+                <a:solidFill>
+                  <a:schemeClr val="bg1"/>
+                </a:solidFill>
+                <a:latin typeface="Avenir Medium" panose="02000503020000020003" pitchFamily="2" charset="0"/>
+                <a:ea typeface="Bodoni Ornaments" pitchFamily="2" charset="0"/>
+              </a:rPr>
+              <a:t>You will always be holy</a:t>
+            </a:r>
+          </a:p>
+          <a:p>
+            <a:r>
+              <a:rPr lang="en-US" sz="4400" dirty="0">
+                <a:solidFill>
+                  <a:schemeClr val="bg1"/>
+                </a:solidFill>
+                <a:latin typeface="Avenir Medium" panose="02000503020000020003" pitchFamily="2" charset="0"/>
+                <a:ea typeface="Bodoni Ornaments" pitchFamily="2" charset="0"/>
+              </a:rPr>
+              <a:t>Holy forever</a:t>
+            </a:r>
+          </a:p>
+        </p:txBody>
+      </p:sp>
+    </p:spTree>
+    <p:extLst>
+      <p:ext uri="{BB962C8B-B14F-4D97-AF65-F5344CB8AC3E}">
+        <p14:creationId xmlns:p14="http://schemas.microsoft.com/office/powerpoint/2010/main" val="1732739995"/>
+      </p:ext>
+    </p:extLst>
+  </p:cSld>
+  <p:clrMapOvr>
+    <a:masterClrMapping/>
+  </p:clrMapOvr>
+</p:sld>
+</file>
+
+<file path=ppt/slides/slide17.xml><?xml version="1.0" encoding="utf-8"?>
+<p:sld xmlns:a="http://schemas.openxmlformats.org/drawingml/2006/main" xmlns:r="http://schemas.openxmlformats.org/officeDocument/2006/relationships" xmlns:p="http://schemas.openxmlformats.org/presentationml/2006/main">
+  <p:cSld>
+    <p:bg>
+      <p:bgPr>
+        <a:solidFill>
+          <a:schemeClr val="tx1"/>
+        </a:solidFill>
+        <a:effectLst/>
+      </p:bgPr>
+    </p:bg>
+    <p:spTree>
+      <p:nvGrpSpPr>
+        <p:cNvPr id="1" name="">
+          <a:extLst>
+            <a:ext uri="{FF2B5EF4-FFF2-40B4-BE49-F238E27FC236}">
+              <a16:creationId xmlns:a16="http://schemas.microsoft.com/office/drawing/2014/main" id="{F0302E6B-F34D-D984-3E50-D0F78CD4AF8B}"/>
+            </a:ext>
+          </a:extLst>
+        </p:cNvPr>
+        <p:cNvGrpSpPr/>
+        <p:nvPr/>
+      </p:nvGrpSpPr>
+      <p:grpSpPr>
+        <a:xfrm>
+          <a:off x="0" y="0"/>
+          <a:ext cx="0" cy="0"/>
+          <a:chOff x="0" y="0"/>
+          <a:chExt cx="0" cy="0"/>
+        </a:xfrm>
+      </p:grpSpPr>
+      <p:sp>
+        <p:nvSpPr>
+          <p:cNvPr id="3" name="Subtitle 2">
+            <a:extLst>
+              <a:ext uri="{FF2B5EF4-FFF2-40B4-BE49-F238E27FC236}">
+                <a16:creationId xmlns:a16="http://schemas.microsoft.com/office/drawing/2014/main" id="{58C723EF-F302-BF13-BFE7-8A6535FCBC3B}"/>
+              </a:ext>
+            </a:extLst>
+          </p:cNvPr>
+          <p:cNvSpPr>
+            <a:spLocks noGrp="1"/>
+          </p:cNvSpPr>
+          <p:nvPr>
+            <p:ph type="subTitle" idx="1"/>
+          </p:nvPr>
+        </p:nvSpPr>
+        <p:spPr>
+          <a:xfrm>
+            <a:off x="144379" y="127591"/>
+            <a:ext cx="8903369" cy="6528390"/>
+          </a:xfrm>
+        </p:spPr>
+        <p:txBody>
+          <a:bodyPr>
+            <a:noAutofit/>
+          </a:bodyPr>
+          <a:lstStyle/>
+          <a:p>
+            <a:r>
+              <a:rPr lang="en-US" sz="4400" dirty="0">
+                <a:solidFill>
+                  <a:schemeClr val="bg1"/>
+                </a:solidFill>
+                <a:latin typeface="Avenir Medium" panose="02000503020000020003" pitchFamily="2" charset="0"/>
+                <a:ea typeface="Bodoni Ornaments" pitchFamily="2" charset="0"/>
+              </a:rPr>
+              <a:t> </a:t>
+            </a:r>
+          </a:p>
+          <a:p>
+            <a:endParaRPr lang="en-US" sz="4400" dirty="0">
+              <a:solidFill>
+                <a:schemeClr val="bg1"/>
+              </a:solidFill>
+              <a:latin typeface="Avenir Medium" panose="02000503020000020003" pitchFamily="2" charset="0"/>
+              <a:ea typeface="Bodoni Ornaments" pitchFamily="2" charset="0"/>
+            </a:endParaRPr>
+          </a:p>
+          <a:p>
+            <a:r>
+              <a:rPr lang="en-US" sz="4400" dirty="0">
+                <a:solidFill>
+                  <a:schemeClr val="bg1"/>
+                </a:solidFill>
+                <a:latin typeface="Avenir Medium" panose="02000503020000020003" pitchFamily="2" charset="0"/>
+                <a:ea typeface="Bodoni Ornaments" pitchFamily="2" charset="0"/>
+              </a:rPr>
+              <a:t>You will always be holy</a:t>
+            </a:r>
+          </a:p>
+          <a:p>
+            <a:r>
+              <a:rPr lang="en-US" sz="4400" dirty="0">
+                <a:solidFill>
+                  <a:schemeClr val="bg1"/>
+                </a:solidFill>
+                <a:latin typeface="Avenir Medium" panose="02000503020000020003" pitchFamily="2" charset="0"/>
+                <a:ea typeface="Bodoni Ornaments" pitchFamily="2" charset="0"/>
+              </a:rPr>
+              <a:t>Holy forever</a:t>
+            </a:r>
+          </a:p>
+        </p:txBody>
+      </p:sp>
+      <p:sp>
+        <p:nvSpPr>
+          <p:cNvPr id="2" name="TextBox 1">
+            <a:extLst>
+              <a:ext uri="{FF2B5EF4-FFF2-40B4-BE49-F238E27FC236}">
+                <a16:creationId xmlns:a16="http://schemas.microsoft.com/office/drawing/2014/main" id="{33CC1A8E-22E7-A125-34F9-DF56526AB4F0}"/>
+              </a:ext>
+            </a:extLst>
+          </p:cNvPr>
+          <p:cNvSpPr txBox="1"/>
+          <p:nvPr/>
+        </p:nvSpPr>
+        <p:spPr>
+          <a:xfrm>
+            <a:off x="7390614" y="6488668"/>
+            <a:ext cx="1753386" cy="369332"/>
+          </a:xfrm>
+          <a:prstGeom prst="rect">
+            <a:avLst/>
+          </a:prstGeom>
+          <a:noFill/>
+        </p:spPr>
+        <p:txBody>
+          <a:bodyPr wrap="square" rtlCol="0">
+            <a:spAutoFit/>
+          </a:bodyPr>
+          <a:lstStyle/>
+          <a:p>
+            <a:r>
+              <a:rPr lang="en-US" dirty="0">
+                <a:solidFill>
+                  <a:schemeClr val="bg1"/>
+                </a:solidFill>
+              </a:rPr>
+              <a:t>CCLI#7102397</a:t>
+            </a:r>
+          </a:p>
+        </p:txBody>
+      </p:sp>
+    </p:spTree>
+    <p:extLst>
+      <p:ext uri="{BB962C8B-B14F-4D97-AF65-F5344CB8AC3E}">
+        <p14:creationId xmlns:p14="http://schemas.microsoft.com/office/powerpoint/2010/main" val="1665531096"/>
+      </p:ext>
+    </p:extLst>
+  </p:cSld>
+  <p:clrMapOvr>
+    <a:masterClrMapping/>
+  </p:clrMapOvr>
+</p:sld>
+</file>
+
+<file path=ppt/slides/slide2.xml><?xml version="1.0" encoding="utf-8"?>
+<p:sld xmlns:a="http://schemas.openxmlformats.org/drawingml/2006/main" xmlns:r="http://schemas.openxmlformats.org/officeDocument/2006/relationships" xmlns:p="http://schemas.openxmlformats.org/presentationml/2006/main">
+  <p:cSld>
+    <p:bg>
+      <p:bgPr>
+        <a:solidFill>
+          <a:schemeClr val="tx1"/>
+        </a:solidFill>
+        <a:effectLst/>
+      </p:bgPr>
+    </p:bg>
+    <p:spTree>
+      <p:nvGrpSpPr>
+        <p:cNvPr id="1" name="">
+          <a:extLst>
+            <a:ext uri="{FF2B5EF4-FFF2-40B4-BE49-F238E27FC236}">
+              <a16:creationId xmlns:a16="http://schemas.microsoft.com/office/drawing/2014/main" id="{065384FE-5B61-896B-8EC0-010050A299D1}"/>
+            </a:ext>
+          </a:extLst>
+        </p:cNvPr>
+        <p:cNvGrpSpPr/>
+        <p:nvPr/>
+      </p:nvGrpSpPr>
+      <p:grpSpPr>
+        <a:xfrm>
+          <a:off x="0" y="0"/>
+          <a:ext cx="0" cy="0"/>
+          <a:chOff x="0" y="0"/>
+          <a:chExt cx="0" cy="0"/>
+        </a:xfrm>
+      </p:grpSpPr>
+      <p:sp>
+        <p:nvSpPr>
+          <p:cNvPr id="3" name="Subtitle 2">
+            <a:extLst>
+              <a:ext uri="{FF2B5EF4-FFF2-40B4-BE49-F238E27FC236}">
+                <a16:creationId xmlns:a16="http://schemas.microsoft.com/office/drawing/2014/main" id="{04F408B4-DABE-FDF3-0507-47C81F6EC961}"/>
+              </a:ext>
+            </a:extLst>
+          </p:cNvPr>
+          <p:cNvSpPr>
+            <a:spLocks noGrp="1"/>
+          </p:cNvSpPr>
+          <p:nvPr>
+            <p:ph type="subTitle" idx="1"/>
+          </p:nvPr>
+        </p:nvSpPr>
+        <p:spPr>
+          <a:xfrm>
+            <a:off x="84221" y="159488"/>
+            <a:ext cx="8964086" cy="6485861"/>
+          </a:xfrm>
+        </p:spPr>
+        <p:txBody>
+          <a:bodyPr>
+            <a:noAutofit/>
+          </a:bodyPr>
+          <a:lstStyle/>
+          <a:p>
+            <a:r>
+              <a:rPr lang="en-US" sz="4400" dirty="0">
+                <a:solidFill>
+                  <a:schemeClr val="bg1"/>
+                </a:solidFill>
+                <a:latin typeface="Avenir Medium" panose="02000503020000020003" pitchFamily="2" charset="0"/>
+                <a:ea typeface="Bodoni Ornaments" pitchFamily="2" charset="0"/>
+              </a:rPr>
+              <a:t>  </a:t>
+            </a:r>
+          </a:p>
+          <a:p>
+            <a:endParaRPr lang="en-US" sz="4400" dirty="0">
+              <a:solidFill>
+                <a:schemeClr val="bg1"/>
+              </a:solidFill>
+              <a:latin typeface="Avenir Medium" panose="02000503020000020003" pitchFamily="2" charset="0"/>
+              <a:ea typeface="Bodoni Ornaments" pitchFamily="2" charset="0"/>
+            </a:endParaRPr>
+          </a:p>
+          <a:p>
+            <a:r>
+              <a:rPr lang="en-US" sz="4400" dirty="0">
+                <a:solidFill>
+                  <a:schemeClr val="bg1"/>
+                </a:solidFill>
+                <a:latin typeface="Avenir Medium" panose="02000503020000020003" pitchFamily="2" charset="0"/>
+                <a:ea typeface="Bodoni Ornaments" pitchFamily="2" charset="0"/>
+              </a:rPr>
+              <a:t>A thousand generations </a:t>
+            </a:r>
+          </a:p>
+          <a:p>
+            <a:r>
+              <a:rPr lang="en-US" sz="4400" dirty="0">
+                <a:solidFill>
+                  <a:schemeClr val="bg1"/>
+                </a:solidFill>
+                <a:latin typeface="Avenir Medium" panose="02000503020000020003" pitchFamily="2" charset="0"/>
+                <a:ea typeface="Bodoni Ornaments" pitchFamily="2" charset="0"/>
+              </a:rPr>
+              <a:t>falling down in worship</a:t>
+            </a:r>
+          </a:p>
+          <a:p>
+            <a:r>
+              <a:rPr lang="en-US" sz="4400" dirty="0">
+                <a:solidFill>
+                  <a:schemeClr val="bg1"/>
+                </a:solidFill>
+                <a:latin typeface="Avenir Medium" panose="02000503020000020003" pitchFamily="2" charset="0"/>
+                <a:ea typeface="Bodoni Ornaments" pitchFamily="2" charset="0"/>
+              </a:rPr>
+              <a:t>To sing the song of ages </a:t>
+            </a:r>
+          </a:p>
+          <a:p>
+            <a:r>
+              <a:rPr lang="en-US" sz="4400" dirty="0">
+                <a:solidFill>
+                  <a:schemeClr val="bg1"/>
+                </a:solidFill>
+                <a:latin typeface="Avenir Medium" panose="02000503020000020003" pitchFamily="2" charset="0"/>
+                <a:ea typeface="Bodoni Ornaments" pitchFamily="2" charset="0"/>
+              </a:rPr>
+              <a:t>to the Lamb</a:t>
+            </a:r>
+          </a:p>
+        </p:txBody>
+      </p:sp>
+    </p:spTree>
+    <p:extLst>
+      <p:ext uri="{BB962C8B-B14F-4D97-AF65-F5344CB8AC3E}">
+        <p14:creationId xmlns:p14="http://schemas.microsoft.com/office/powerpoint/2010/main" val="1882323952"/>
+      </p:ext>
+    </p:extLst>
+  </p:cSld>
+  <p:clrMapOvr>
+    <a:masterClrMapping/>
+  </p:clrMapOvr>
+</p:sld>
+</file>
+
+<file path=ppt/slides/slide3.xml><?xml version="1.0" encoding="utf-8"?>
+<p:sld xmlns:a="http://schemas.openxmlformats.org/drawingml/2006/main" xmlns:r="http://schemas.openxmlformats.org/officeDocument/2006/relationships" xmlns:p="http://schemas.openxmlformats.org/presentationml/2006/main">
+  <p:cSld>
+    <p:bg>
+      <p:bgPr>
+        <a:solidFill>
+          <a:schemeClr val="tx1"/>
+        </a:solidFill>
+        <a:effectLst/>
+      </p:bgPr>
+    </p:bg>
+    <p:spTree>
+      <p:nvGrpSpPr>
+        <p:cNvPr id="1" name="">
+          <a:extLst>
+            <a:ext uri="{FF2B5EF4-FFF2-40B4-BE49-F238E27FC236}">
+              <a16:creationId xmlns:a16="http://schemas.microsoft.com/office/drawing/2014/main" id="{B3AADDD7-57D2-B1D4-1258-836FE4D35F75}"/>
+            </a:ext>
+          </a:extLst>
+        </p:cNvPr>
+        <p:cNvGrpSpPr/>
+        <p:nvPr/>
+      </p:nvGrpSpPr>
+      <p:grpSpPr>
+        <a:xfrm>
+          <a:off x="0" y="0"/>
+          <a:ext cx="0" cy="0"/>
+          <a:chOff x="0" y="0"/>
+          <a:chExt cx="0" cy="0"/>
+        </a:xfrm>
+      </p:grpSpPr>
+      <p:sp>
+        <p:nvSpPr>
+          <p:cNvPr id="3" name="Subtitle 2">
+            <a:extLst>
+              <a:ext uri="{FF2B5EF4-FFF2-40B4-BE49-F238E27FC236}">
+                <a16:creationId xmlns:a16="http://schemas.microsoft.com/office/drawing/2014/main" id="{A279A8AE-78F0-D6F8-6202-3F6FAC65CB09}"/>
+              </a:ext>
+            </a:extLst>
+          </p:cNvPr>
+          <p:cNvSpPr>
+            <a:spLocks noGrp="1"/>
+          </p:cNvSpPr>
+          <p:nvPr>
+            <p:ph type="subTitle" idx="1"/>
+          </p:nvPr>
+        </p:nvSpPr>
+        <p:spPr>
+          <a:xfrm>
+            <a:off x="84221" y="159488"/>
+            <a:ext cx="8964086" cy="6485861"/>
+          </a:xfrm>
+        </p:spPr>
+        <p:txBody>
+          <a:bodyPr>
+            <a:noAutofit/>
+          </a:bodyPr>
+          <a:lstStyle/>
+          <a:p>
+            <a:r>
+              <a:rPr lang="en-US" sz="4400" dirty="0">
+                <a:solidFill>
+                  <a:schemeClr val="bg1"/>
+                </a:solidFill>
+                <a:latin typeface="Avenir Medium" panose="02000503020000020003" pitchFamily="2" charset="0"/>
+                <a:ea typeface="Bodoni Ornaments" pitchFamily="2" charset="0"/>
+              </a:rPr>
+              <a:t>  </a:t>
+            </a:r>
+          </a:p>
+          <a:p>
+            <a:endParaRPr lang="en-US" sz="4400" dirty="0">
+              <a:solidFill>
+                <a:schemeClr val="bg1"/>
+              </a:solidFill>
+              <a:latin typeface="Avenir Medium" panose="02000503020000020003" pitchFamily="2" charset="0"/>
+              <a:ea typeface="Bodoni Ornaments" pitchFamily="2" charset="0"/>
+            </a:endParaRPr>
+          </a:p>
+          <a:p>
+            <a:r>
+              <a:rPr lang="en-US" sz="4400" dirty="0">
+                <a:solidFill>
+                  <a:schemeClr val="bg1"/>
+                </a:solidFill>
+                <a:latin typeface="Avenir Medium" panose="02000503020000020003" pitchFamily="2" charset="0"/>
+                <a:ea typeface="Bodoni Ornaments" pitchFamily="2" charset="0"/>
+              </a:rPr>
+              <a:t>And all who've gone before us </a:t>
+            </a:r>
+          </a:p>
+          <a:p>
+            <a:r>
+              <a:rPr lang="en-US" sz="4400" dirty="0">
+                <a:solidFill>
+                  <a:schemeClr val="bg1"/>
+                </a:solidFill>
+                <a:latin typeface="Avenir Medium" panose="02000503020000020003" pitchFamily="2" charset="0"/>
+                <a:ea typeface="Bodoni Ornaments" pitchFamily="2" charset="0"/>
+              </a:rPr>
+              <a:t>and all who will believe</a:t>
+            </a:r>
+          </a:p>
+          <a:p>
+            <a:r>
+              <a:rPr lang="en-US" sz="4400" dirty="0">
+                <a:solidFill>
+                  <a:schemeClr val="bg1"/>
+                </a:solidFill>
+                <a:latin typeface="Avenir Medium" panose="02000503020000020003" pitchFamily="2" charset="0"/>
+                <a:ea typeface="Bodoni Ornaments" pitchFamily="2" charset="0"/>
+              </a:rPr>
+              <a:t>Will sing the song of ages </a:t>
+            </a:r>
+          </a:p>
+          <a:p>
+            <a:r>
+              <a:rPr lang="en-US" sz="4400" dirty="0">
+                <a:solidFill>
+                  <a:schemeClr val="bg1"/>
+                </a:solidFill>
+                <a:latin typeface="Avenir Medium" panose="02000503020000020003" pitchFamily="2" charset="0"/>
+                <a:ea typeface="Bodoni Ornaments" pitchFamily="2" charset="0"/>
+              </a:rPr>
+              <a:t>to the Lamb</a:t>
+            </a:r>
+          </a:p>
+        </p:txBody>
+      </p:sp>
+    </p:spTree>
+    <p:extLst>
+      <p:ext uri="{BB962C8B-B14F-4D97-AF65-F5344CB8AC3E}">
+        <p14:creationId xmlns:p14="http://schemas.microsoft.com/office/powerpoint/2010/main" val="1123141326"/>
+      </p:ext>
+    </p:extLst>
+  </p:cSld>
+  <p:clrMapOvr>
+    <a:masterClrMapping/>
+  </p:clrMapOvr>
+</p:sld>
+</file>
+
+<file path=ppt/slides/slide4.xml><?xml version="1.0" encoding="utf-8"?>
+<p:sld xmlns:a="http://schemas.openxmlformats.org/drawingml/2006/main" xmlns:r="http://schemas.openxmlformats.org/officeDocument/2006/relationships" xmlns:p="http://schemas.openxmlformats.org/presentationml/2006/main">
+  <p:cSld>
+    <p:bg>
+      <p:bgPr>
+        <a:solidFill>
+          <a:schemeClr val="tx1"/>
+        </a:solidFill>
+        <a:effectLst/>
+      </p:bgPr>
+    </p:bg>
+    <p:spTree>
+      <p:nvGrpSpPr>
+        <p:cNvPr id="1" name="">
+          <a:extLst>
+            <a:ext uri="{FF2B5EF4-FFF2-40B4-BE49-F238E27FC236}">
+              <a16:creationId xmlns:a16="http://schemas.microsoft.com/office/drawing/2014/main" id="{1968B144-2502-C8D6-B70F-58B7B0905A68}"/>
+            </a:ext>
+          </a:extLst>
+        </p:cNvPr>
+        <p:cNvGrpSpPr/>
+        <p:nvPr/>
+      </p:nvGrpSpPr>
+      <p:grpSpPr>
+        <a:xfrm>
+          <a:off x="0" y="0"/>
+          <a:ext cx="0" cy="0"/>
+          <a:chOff x="0" y="0"/>
+          <a:chExt cx="0" cy="0"/>
+        </a:xfrm>
+      </p:grpSpPr>
+      <p:sp>
+        <p:nvSpPr>
+          <p:cNvPr id="3" name="Subtitle 2">
+            <a:extLst>
+              <a:ext uri="{FF2B5EF4-FFF2-40B4-BE49-F238E27FC236}">
+                <a16:creationId xmlns:a16="http://schemas.microsoft.com/office/drawing/2014/main" id="{204984C5-02C7-13A0-BE52-02F7D3A1514B}"/>
+              </a:ext>
+            </a:extLst>
+          </p:cNvPr>
+          <p:cNvSpPr>
+            <a:spLocks noGrp="1"/>
+          </p:cNvSpPr>
+          <p:nvPr>
+            <p:ph type="subTitle" idx="1"/>
+          </p:nvPr>
+        </p:nvSpPr>
+        <p:spPr>
+          <a:xfrm>
+            <a:off x="84221" y="116958"/>
+            <a:ext cx="8891337" cy="6602819"/>
+          </a:xfrm>
+        </p:spPr>
+        <p:txBody>
+          <a:bodyPr>
+            <a:noAutofit/>
+          </a:bodyPr>
+          <a:lstStyle/>
+          <a:p>
+            <a:endParaRPr lang="en-US" sz="4400" dirty="0">
+              <a:solidFill>
+                <a:schemeClr val="bg1"/>
+              </a:solidFill>
+              <a:latin typeface="Avenir Medium" panose="02000503020000020003" pitchFamily="2" charset="0"/>
+              <a:ea typeface="Bodoni Ornaments" pitchFamily="2" charset="0"/>
+            </a:endParaRPr>
+          </a:p>
+          <a:p>
+            <a:endParaRPr lang="en-US" sz="4400" dirty="0">
+              <a:solidFill>
+                <a:schemeClr val="bg1"/>
+              </a:solidFill>
+              <a:latin typeface="Avenir Medium" panose="02000503020000020003" pitchFamily="2" charset="0"/>
+              <a:ea typeface="Bodoni Ornaments" pitchFamily="2" charset="0"/>
+            </a:endParaRPr>
+          </a:p>
+          <a:p>
+            <a:r>
+              <a:rPr lang="en-US" sz="4400" dirty="0">
+                <a:solidFill>
+                  <a:schemeClr val="bg1"/>
+                </a:solidFill>
+                <a:latin typeface="Avenir Medium" panose="02000503020000020003" pitchFamily="2" charset="0"/>
+                <a:ea typeface="Bodoni Ornaments" pitchFamily="2" charset="0"/>
+              </a:rPr>
+              <a:t>Your name is the highest</a:t>
+            </a:r>
+          </a:p>
+          <a:p>
+            <a:r>
+              <a:rPr lang="en-US" sz="4400" dirty="0">
+                <a:solidFill>
+                  <a:schemeClr val="bg1"/>
+                </a:solidFill>
+                <a:latin typeface="Avenir Medium" panose="02000503020000020003" pitchFamily="2" charset="0"/>
+                <a:ea typeface="Bodoni Ornaments" pitchFamily="2" charset="0"/>
+              </a:rPr>
+              <a:t>Your name is the greatest</a:t>
+            </a:r>
+          </a:p>
+          <a:p>
+            <a:r>
+              <a:rPr lang="en-US" sz="4400" dirty="0">
+                <a:solidFill>
+                  <a:schemeClr val="bg1"/>
+                </a:solidFill>
+                <a:latin typeface="Avenir Medium" panose="02000503020000020003" pitchFamily="2" charset="0"/>
+                <a:ea typeface="Bodoni Ornaments" pitchFamily="2" charset="0"/>
+              </a:rPr>
+              <a:t>Your name stands above them all</a:t>
+            </a:r>
+          </a:p>
+          <a:p>
+            <a:r>
+              <a:rPr lang="en-US" sz="4400" dirty="0">
+                <a:solidFill>
+                  <a:schemeClr val="bg1"/>
+                </a:solidFill>
+                <a:latin typeface="Avenir Medium" panose="02000503020000020003" pitchFamily="2" charset="0"/>
+                <a:ea typeface="Bodoni Ornaments" pitchFamily="2" charset="0"/>
+              </a:rPr>
+              <a:t> </a:t>
+            </a:r>
+          </a:p>
+        </p:txBody>
+      </p:sp>
+    </p:spTree>
+    <p:extLst>
+      <p:ext uri="{BB962C8B-B14F-4D97-AF65-F5344CB8AC3E}">
+        <p14:creationId xmlns:p14="http://schemas.microsoft.com/office/powerpoint/2010/main" val="1323221337"/>
+      </p:ext>
+    </p:extLst>
+  </p:cSld>
+  <p:clrMapOvr>
+    <a:masterClrMapping/>
+  </p:clrMapOvr>
+</p:sld>
+</file>
+
+<file path=ppt/slides/slide5.xml><?xml version="1.0" encoding="utf-8"?>
+<p:sld xmlns:a="http://schemas.openxmlformats.org/drawingml/2006/main" xmlns:r="http://schemas.openxmlformats.org/officeDocument/2006/relationships" xmlns:p="http://schemas.openxmlformats.org/presentationml/2006/main">
+  <p:cSld>
+    <p:bg>
+      <p:bgPr>
+        <a:solidFill>
+          <a:schemeClr val="tx1"/>
+        </a:solidFill>
+        <a:effectLst/>
+      </p:bgPr>
+    </p:bg>
+    <p:spTree>
+      <p:nvGrpSpPr>
+        <p:cNvPr id="1" name="">
+          <a:extLst>
+            <a:ext uri="{FF2B5EF4-FFF2-40B4-BE49-F238E27FC236}">
+              <a16:creationId xmlns:a16="http://schemas.microsoft.com/office/drawing/2014/main" id="{93BC0E4B-EF7E-96A0-25C8-1E8A65D6CC7A}"/>
+            </a:ext>
+          </a:extLst>
+        </p:cNvPr>
+        <p:cNvGrpSpPr/>
+        <p:nvPr/>
+      </p:nvGrpSpPr>
+      <p:grpSpPr>
+        <a:xfrm>
+          <a:off x="0" y="0"/>
+          <a:ext cx="0" cy="0"/>
+          <a:chOff x="0" y="0"/>
+          <a:chExt cx="0" cy="0"/>
+        </a:xfrm>
+      </p:grpSpPr>
+      <p:sp>
+        <p:nvSpPr>
+          <p:cNvPr id="3" name="Subtitle 2">
+            <a:extLst>
+              <a:ext uri="{FF2B5EF4-FFF2-40B4-BE49-F238E27FC236}">
+                <a16:creationId xmlns:a16="http://schemas.microsoft.com/office/drawing/2014/main" id="{3A686E00-20B6-BF05-EE16-16E46A809120}"/>
+              </a:ext>
+            </a:extLst>
+          </p:cNvPr>
+          <p:cNvSpPr>
+            <a:spLocks noGrp="1"/>
+          </p:cNvSpPr>
+          <p:nvPr>
+            <p:ph type="subTitle" idx="1"/>
+          </p:nvPr>
+        </p:nvSpPr>
+        <p:spPr>
+          <a:xfrm>
+            <a:off x="84221" y="116958"/>
+            <a:ext cx="8891337" cy="6602819"/>
+          </a:xfrm>
+        </p:spPr>
+        <p:txBody>
+          <a:bodyPr>
+            <a:noAutofit/>
+          </a:bodyPr>
+          <a:lstStyle/>
+          <a:p>
+            <a:endParaRPr lang="en-US" sz="4400" dirty="0">
+              <a:solidFill>
+                <a:schemeClr val="bg1"/>
+              </a:solidFill>
+              <a:latin typeface="Avenir Medium" panose="02000503020000020003" pitchFamily="2" charset="0"/>
+              <a:ea typeface="Bodoni Ornaments" pitchFamily="2" charset="0"/>
+            </a:endParaRPr>
+          </a:p>
+          <a:p>
+            <a:endParaRPr lang="en-US" sz="4400" dirty="0">
+              <a:solidFill>
+                <a:schemeClr val="bg1"/>
+              </a:solidFill>
+              <a:latin typeface="Avenir Medium" panose="02000503020000020003" pitchFamily="2" charset="0"/>
+              <a:ea typeface="Bodoni Ornaments" pitchFamily="2" charset="0"/>
+            </a:endParaRPr>
+          </a:p>
+          <a:p>
+            <a:r>
+              <a:rPr lang="en-US" sz="4400" dirty="0">
+                <a:solidFill>
+                  <a:schemeClr val="bg1"/>
+                </a:solidFill>
+                <a:latin typeface="Avenir Medium" panose="02000503020000020003" pitchFamily="2" charset="0"/>
+                <a:ea typeface="Bodoni Ornaments" pitchFamily="2" charset="0"/>
+              </a:rPr>
+              <a:t>All thrones and dominions</a:t>
+            </a:r>
+          </a:p>
+          <a:p>
+            <a:r>
+              <a:rPr lang="en-US" sz="4400" dirty="0">
+                <a:solidFill>
+                  <a:schemeClr val="bg1"/>
+                </a:solidFill>
+                <a:latin typeface="Avenir Medium" panose="02000503020000020003" pitchFamily="2" charset="0"/>
+                <a:ea typeface="Bodoni Ornaments" pitchFamily="2" charset="0"/>
+              </a:rPr>
+              <a:t>All powers and positions</a:t>
+            </a:r>
+          </a:p>
+          <a:p>
+            <a:r>
+              <a:rPr lang="en-US" sz="4400" dirty="0">
+                <a:solidFill>
+                  <a:schemeClr val="bg1"/>
+                </a:solidFill>
+                <a:latin typeface="Avenir Medium" panose="02000503020000020003" pitchFamily="2" charset="0"/>
+                <a:ea typeface="Bodoni Ornaments" pitchFamily="2" charset="0"/>
+              </a:rPr>
+              <a:t>Your name stands above them all</a:t>
+            </a:r>
+          </a:p>
+          <a:p>
+            <a:r>
+              <a:rPr lang="en-US" sz="4400" dirty="0">
+                <a:solidFill>
+                  <a:schemeClr val="bg1"/>
+                </a:solidFill>
+                <a:latin typeface="Avenir Medium" panose="02000503020000020003" pitchFamily="2" charset="0"/>
+                <a:ea typeface="Bodoni Ornaments" pitchFamily="2" charset="0"/>
+              </a:rPr>
+              <a:t> </a:t>
+            </a:r>
+          </a:p>
+        </p:txBody>
+      </p:sp>
+    </p:spTree>
+    <p:extLst>
+      <p:ext uri="{BB962C8B-B14F-4D97-AF65-F5344CB8AC3E}">
+        <p14:creationId xmlns:p14="http://schemas.microsoft.com/office/powerpoint/2010/main" val="124969372"/>
+      </p:ext>
+    </p:extLst>
+  </p:cSld>
+  <p:clrMapOvr>
+    <a:masterClrMapping/>
+  </p:clrMapOvr>
+</p:sld>
+</file>
+
+<file path=ppt/slides/slide6.xml><?xml version="1.0" encoding="utf-8"?>
+<p:sld xmlns:a="http://schemas.openxmlformats.org/drawingml/2006/main" xmlns:r="http://schemas.openxmlformats.org/officeDocument/2006/relationships" xmlns:p="http://schemas.openxmlformats.org/presentationml/2006/main">
+  <p:cSld>
+    <p:bg>
+      <p:bgPr>
+        <a:solidFill>
+          <a:schemeClr val="tx1"/>
+        </a:solidFill>
+        <a:effectLst/>
+      </p:bgPr>
+    </p:bg>
+    <p:spTree>
+      <p:nvGrpSpPr>
+        <p:cNvPr id="1" name="">
+          <a:extLst>
+            <a:ext uri="{FF2B5EF4-FFF2-40B4-BE49-F238E27FC236}">
+              <a16:creationId xmlns:a16="http://schemas.microsoft.com/office/drawing/2014/main" id="{105C7419-E011-28A7-9A00-12DEA80269EF}"/>
+            </a:ext>
+          </a:extLst>
+        </p:cNvPr>
+        <p:cNvGrpSpPr/>
+        <p:nvPr/>
+      </p:nvGrpSpPr>
+      <p:grpSpPr>
+        <a:xfrm>
+          <a:off x="0" y="0"/>
+          <a:ext cx="0" cy="0"/>
+          <a:chOff x="0" y="0"/>
+          <a:chExt cx="0" cy="0"/>
+        </a:xfrm>
+      </p:grpSpPr>
+      <p:sp>
+        <p:nvSpPr>
+          <p:cNvPr id="3" name="Subtitle 2">
+            <a:extLst>
+              <a:ext uri="{FF2B5EF4-FFF2-40B4-BE49-F238E27FC236}">
+                <a16:creationId xmlns:a16="http://schemas.microsoft.com/office/drawing/2014/main" id="{76DA5D01-CA66-E4A3-D9BB-F19A657F5172}"/>
+              </a:ext>
+            </a:extLst>
+          </p:cNvPr>
+          <p:cNvSpPr>
+            <a:spLocks noGrp="1"/>
+          </p:cNvSpPr>
+          <p:nvPr>
+            <p:ph type="subTitle" idx="1"/>
+          </p:nvPr>
+        </p:nvSpPr>
+        <p:spPr>
+          <a:xfrm>
+            <a:off x="144379" y="207818"/>
+            <a:ext cx="8903369" cy="6386945"/>
+          </a:xfrm>
+        </p:spPr>
+        <p:txBody>
+          <a:bodyPr>
+            <a:noAutofit/>
+          </a:bodyPr>
+          <a:lstStyle/>
+          <a:p>
+            <a:r>
+              <a:rPr lang="en-US" sz="4400" dirty="0">
+                <a:solidFill>
+                  <a:schemeClr val="bg1"/>
+                </a:solidFill>
+                <a:latin typeface="Avenir Medium" panose="02000503020000020003" pitchFamily="2" charset="0"/>
+                <a:ea typeface="Bodoni Ornaments" pitchFamily="2" charset="0"/>
+              </a:rPr>
+              <a:t> </a:t>
+            </a:r>
+          </a:p>
+          <a:p>
+            <a:endParaRPr lang="en-US" sz="4400" dirty="0">
+              <a:solidFill>
+                <a:schemeClr val="bg1"/>
+              </a:solidFill>
+              <a:latin typeface="Avenir Medium" panose="02000503020000020003" pitchFamily="2" charset="0"/>
+              <a:ea typeface="Bodoni Ornaments" pitchFamily="2" charset="0"/>
+            </a:endParaRPr>
+          </a:p>
+          <a:p>
+            <a:r>
+              <a:rPr lang="en-US" sz="4400" dirty="0">
+                <a:solidFill>
+                  <a:schemeClr val="bg1"/>
+                </a:solidFill>
+                <a:latin typeface="Avenir Medium" panose="02000503020000020003" pitchFamily="2" charset="0"/>
+                <a:ea typeface="Bodoni Ornaments" pitchFamily="2" charset="0"/>
+              </a:rPr>
+              <a:t>And the angels cry "Holy"</a:t>
+            </a:r>
+          </a:p>
+          <a:p>
+            <a:r>
+              <a:rPr lang="en-US" sz="4400" dirty="0">
+                <a:solidFill>
+                  <a:schemeClr val="bg1"/>
+                </a:solidFill>
+                <a:latin typeface="Avenir Medium" panose="02000503020000020003" pitchFamily="2" charset="0"/>
+                <a:ea typeface="Bodoni Ornaments" pitchFamily="2" charset="0"/>
+              </a:rPr>
+              <a:t>All creation cries "Holy"</a:t>
+            </a:r>
+          </a:p>
+          <a:p>
+            <a:r>
+              <a:rPr lang="en-US" sz="4400" dirty="0">
+                <a:solidFill>
+                  <a:schemeClr val="bg1"/>
+                </a:solidFill>
+                <a:latin typeface="Avenir Medium" panose="02000503020000020003" pitchFamily="2" charset="0"/>
+                <a:ea typeface="Bodoni Ornaments" pitchFamily="2" charset="0"/>
+              </a:rPr>
+              <a:t>You are lifted high, holy</a:t>
+            </a:r>
+          </a:p>
+          <a:p>
+            <a:r>
+              <a:rPr lang="en-US" sz="4400" dirty="0">
+                <a:solidFill>
+                  <a:schemeClr val="bg1"/>
+                </a:solidFill>
+                <a:latin typeface="Avenir Medium" panose="02000503020000020003" pitchFamily="2" charset="0"/>
+                <a:ea typeface="Bodoni Ornaments" pitchFamily="2" charset="0"/>
+              </a:rPr>
+              <a:t>Holy forever</a:t>
+            </a:r>
+          </a:p>
+        </p:txBody>
+      </p:sp>
+    </p:spTree>
+    <p:extLst>
+      <p:ext uri="{BB962C8B-B14F-4D97-AF65-F5344CB8AC3E}">
+        <p14:creationId xmlns:p14="http://schemas.microsoft.com/office/powerpoint/2010/main" val="4254184139"/>
+      </p:ext>
+    </p:extLst>
+  </p:cSld>
+  <p:clrMapOvr>
+    <a:masterClrMapping/>
+  </p:clrMapOvr>
+</p:sld>
+</file>
+
+<file path=ppt/slides/slide7.xml><?xml version="1.0" encoding="utf-8"?>
+<p:sld xmlns:a="http://schemas.openxmlformats.org/drawingml/2006/main" xmlns:r="http://schemas.openxmlformats.org/officeDocument/2006/relationships" xmlns:p="http://schemas.openxmlformats.org/presentationml/2006/main">
+  <p:cSld>
+    <p:bg>
+      <p:bgPr>
+        <a:solidFill>
+          <a:schemeClr val="tx1"/>
+        </a:solidFill>
+        <a:effectLst/>
+      </p:bgPr>
+    </p:bg>
+    <p:spTree>
+      <p:nvGrpSpPr>
+        <p:cNvPr id="1" name="">
+          <a:extLst>
+            <a:ext uri="{FF2B5EF4-FFF2-40B4-BE49-F238E27FC236}">
+              <a16:creationId xmlns:a16="http://schemas.microsoft.com/office/drawing/2014/main" id="{1F68937F-1B0B-D60E-8A2F-8779586E2582}"/>
+            </a:ext>
+          </a:extLst>
+        </p:cNvPr>
+        <p:cNvGrpSpPr/>
+        <p:nvPr/>
+      </p:nvGrpSpPr>
+      <p:grpSpPr>
+        <a:xfrm>
+          <a:off x="0" y="0"/>
+          <a:ext cx="0" cy="0"/>
+          <a:chOff x="0" y="0"/>
+          <a:chExt cx="0" cy="0"/>
+        </a:xfrm>
+      </p:grpSpPr>
+      <p:sp>
+        <p:nvSpPr>
+          <p:cNvPr id="3" name="Subtitle 2">
+            <a:extLst>
+              <a:ext uri="{FF2B5EF4-FFF2-40B4-BE49-F238E27FC236}">
+                <a16:creationId xmlns:a16="http://schemas.microsoft.com/office/drawing/2014/main" id="{56EA6FD0-A174-4866-B88D-F0BE10171AD4}"/>
+              </a:ext>
+            </a:extLst>
+          </p:cNvPr>
+          <p:cNvSpPr>
+            <a:spLocks noGrp="1"/>
+          </p:cNvSpPr>
+          <p:nvPr>
+            <p:ph type="subTitle" idx="1"/>
+          </p:nvPr>
+        </p:nvSpPr>
+        <p:spPr>
+          <a:xfrm>
+            <a:off x="84221" y="207818"/>
+            <a:ext cx="8891337" cy="6373091"/>
+          </a:xfrm>
+        </p:spPr>
+        <p:txBody>
+          <a:bodyPr>
+            <a:noAutofit/>
+          </a:bodyPr>
+          <a:lstStyle/>
+          <a:p>
+            <a:endParaRPr lang="en-US" sz="4400" dirty="0">
+              <a:solidFill>
+                <a:schemeClr val="bg1"/>
+              </a:solidFill>
+              <a:latin typeface="Avenir Medium" panose="02000503020000020003" pitchFamily="2" charset="0"/>
+              <a:ea typeface="Bodoni Ornaments" pitchFamily="2" charset="0"/>
+            </a:endParaRPr>
+          </a:p>
+          <a:p>
+            <a:endParaRPr lang="en-US" sz="4400" dirty="0">
+              <a:solidFill>
+                <a:schemeClr val="bg1"/>
+              </a:solidFill>
+              <a:latin typeface="Avenir Medium" panose="02000503020000020003" pitchFamily="2" charset="0"/>
+              <a:ea typeface="Bodoni Ornaments" pitchFamily="2" charset="0"/>
+            </a:endParaRPr>
+          </a:p>
+          <a:p>
+            <a:r>
+              <a:rPr lang="en-US" sz="4400" dirty="0">
+                <a:solidFill>
+                  <a:schemeClr val="bg1"/>
+                </a:solidFill>
+                <a:latin typeface="Avenir Medium" panose="02000503020000020003" pitchFamily="2" charset="0"/>
+                <a:ea typeface="Bodoni Ornaments" pitchFamily="2" charset="0"/>
+              </a:rPr>
+              <a:t>If you've been forgiven </a:t>
+            </a:r>
+          </a:p>
+          <a:p>
+            <a:r>
+              <a:rPr lang="en-US" sz="4400" dirty="0">
+                <a:solidFill>
+                  <a:schemeClr val="bg1"/>
+                </a:solidFill>
+                <a:latin typeface="Avenir Medium" panose="02000503020000020003" pitchFamily="2" charset="0"/>
+                <a:ea typeface="Bodoni Ornaments" pitchFamily="2" charset="0"/>
+              </a:rPr>
+              <a:t>and if you've been redeemed</a:t>
+            </a:r>
+          </a:p>
+          <a:p>
+            <a:r>
+              <a:rPr lang="en-US" sz="4400" dirty="0">
+                <a:solidFill>
+                  <a:schemeClr val="bg1"/>
+                </a:solidFill>
+                <a:latin typeface="Avenir Medium" panose="02000503020000020003" pitchFamily="2" charset="0"/>
+                <a:ea typeface="Bodoni Ornaments" pitchFamily="2" charset="0"/>
+              </a:rPr>
+              <a:t>Sing the song forever to the Lamb</a:t>
+            </a:r>
+          </a:p>
+        </p:txBody>
+      </p:sp>
+    </p:spTree>
+    <p:extLst>
+      <p:ext uri="{BB962C8B-B14F-4D97-AF65-F5344CB8AC3E}">
+        <p14:creationId xmlns:p14="http://schemas.microsoft.com/office/powerpoint/2010/main" val="1413920667"/>
+      </p:ext>
+    </p:extLst>
+  </p:cSld>
+  <p:clrMapOvr>
+    <a:masterClrMapping/>
+  </p:clrMapOvr>
+</p:sld>
+</file>
+
+<file path=ppt/slides/slide8.xml><?xml version="1.0" encoding="utf-8"?>
+<p:sld xmlns:a="http://schemas.openxmlformats.org/drawingml/2006/main" xmlns:r="http://schemas.openxmlformats.org/officeDocument/2006/relationships" xmlns:p="http://schemas.openxmlformats.org/presentationml/2006/main">
+  <p:cSld>
+    <p:bg>
+      <p:bgPr>
+        <a:solidFill>
+          <a:schemeClr val="tx1"/>
+        </a:solidFill>
+        <a:effectLst/>
+      </p:bgPr>
+    </p:bg>
+    <p:spTree>
+      <p:nvGrpSpPr>
+        <p:cNvPr id="1" name="">
+          <a:extLst>
+            <a:ext uri="{FF2B5EF4-FFF2-40B4-BE49-F238E27FC236}">
+              <a16:creationId xmlns:a16="http://schemas.microsoft.com/office/drawing/2014/main" id="{04162A7D-98CC-40A0-1098-723B4393BE60}"/>
+            </a:ext>
+          </a:extLst>
+        </p:cNvPr>
+        <p:cNvGrpSpPr/>
+        <p:nvPr/>
+      </p:nvGrpSpPr>
+      <p:grpSpPr>
+        <a:xfrm>
+          <a:off x="0" y="0"/>
+          <a:ext cx="0" cy="0"/>
+          <a:chOff x="0" y="0"/>
+          <a:chExt cx="0" cy="0"/>
+        </a:xfrm>
+      </p:grpSpPr>
+      <p:sp>
+        <p:nvSpPr>
+          <p:cNvPr id="3" name="Subtitle 2">
+            <a:extLst>
+              <a:ext uri="{FF2B5EF4-FFF2-40B4-BE49-F238E27FC236}">
+                <a16:creationId xmlns:a16="http://schemas.microsoft.com/office/drawing/2014/main" id="{9C0F5C40-B05A-418B-371B-12542CFEA7E3}"/>
+              </a:ext>
+            </a:extLst>
+          </p:cNvPr>
+          <p:cNvSpPr>
+            <a:spLocks noGrp="1"/>
+          </p:cNvSpPr>
+          <p:nvPr>
+            <p:ph type="subTitle" idx="1"/>
+          </p:nvPr>
+        </p:nvSpPr>
+        <p:spPr>
+          <a:xfrm>
+            <a:off x="84221" y="207818"/>
+            <a:ext cx="8891337" cy="6373091"/>
+          </a:xfrm>
+        </p:spPr>
+        <p:txBody>
+          <a:bodyPr>
+            <a:noAutofit/>
+          </a:bodyPr>
+          <a:lstStyle/>
+          <a:p>
+            <a:endParaRPr lang="en-US" sz="4400" dirty="0">
+              <a:solidFill>
+                <a:schemeClr val="bg1"/>
+              </a:solidFill>
+              <a:latin typeface="Avenir Medium" panose="02000503020000020003" pitchFamily="2" charset="0"/>
+              <a:ea typeface="Bodoni Ornaments" pitchFamily="2" charset="0"/>
+            </a:endParaRPr>
+          </a:p>
+          <a:p>
+            <a:r>
+              <a:rPr lang="en-US" sz="4400" dirty="0">
+                <a:solidFill>
+                  <a:schemeClr val="bg1"/>
+                </a:solidFill>
+                <a:latin typeface="Avenir Medium" panose="02000503020000020003" pitchFamily="2" charset="0"/>
+                <a:ea typeface="Bodoni Ornaments" pitchFamily="2" charset="0"/>
+              </a:rPr>
+              <a:t>If you walk in freedom </a:t>
+            </a:r>
+          </a:p>
+          <a:p>
+            <a:r>
+              <a:rPr lang="en-US" sz="4400" dirty="0">
+                <a:solidFill>
+                  <a:schemeClr val="bg1"/>
+                </a:solidFill>
+                <a:latin typeface="Avenir Medium" panose="02000503020000020003" pitchFamily="2" charset="0"/>
+                <a:ea typeface="Bodoni Ornaments" pitchFamily="2" charset="0"/>
+              </a:rPr>
+              <a:t>and if you bear His name</a:t>
+            </a:r>
+          </a:p>
+          <a:p>
+            <a:r>
+              <a:rPr lang="en-US" sz="4400" dirty="0">
+                <a:solidFill>
+                  <a:schemeClr val="bg1"/>
+                </a:solidFill>
+                <a:latin typeface="Avenir Medium" panose="02000503020000020003" pitchFamily="2" charset="0"/>
+                <a:ea typeface="Bodoni Ornaments" pitchFamily="2" charset="0"/>
+              </a:rPr>
+              <a:t>Sing the song forever to the Lamb</a:t>
+            </a:r>
+          </a:p>
+          <a:p>
+            <a:endParaRPr lang="en-US" sz="4400" dirty="0">
+              <a:solidFill>
+                <a:schemeClr val="bg1"/>
+              </a:solidFill>
+              <a:latin typeface="Avenir Medium" panose="02000503020000020003" pitchFamily="2" charset="0"/>
+              <a:ea typeface="Bodoni Ornaments" pitchFamily="2" charset="0"/>
+            </a:endParaRPr>
+          </a:p>
+          <a:p>
+            <a:r>
+              <a:rPr lang="en-US" sz="4400" dirty="0">
+                <a:solidFill>
+                  <a:schemeClr val="bg1"/>
+                </a:solidFill>
+                <a:latin typeface="Avenir Medium" panose="02000503020000020003" pitchFamily="2" charset="0"/>
+                <a:ea typeface="Bodoni Ornaments" pitchFamily="2" charset="0"/>
+              </a:rPr>
+              <a:t>We'll sing the song forever </a:t>
+            </a:r>
+          </a:p>
+          <a:p>
+            <a:r>
+              <a:rPr lang="en-US" sz="4400" dirty="0">
+                <a:solidFill>
+                  <a:schemeClr val="bg1"/>
+                </a:solidFill>
+                <a:latin typeface="Avenir Medium" panose="02000503020000020003" pitchFamily="2" charset="0"/>
+                <a:ea typeface="Bodoni Ornaments" pitchFamily="2" charset="0"/>
+              </a:rPr>
+              <a:t>and amen</a:t>
+            </a:r>
+          </a:p>
+        </p:txBody>
+      </p:sp>
+    </p:spTree>
+    <p:extLst>
+      <p:ext uri="{BB962C8B-B14F-4D97-AF65-F5344CB8AC3E}">
+        <p14:creationId xmlns:p14="http://schemas.microsoft.com/office/powerpoint/2010/main" val="3917643275"/>
+      </p:ext>
+    </p:extLst>
+  </p:cSld>
+  <p:clrMapOvr>
+    <a:masterClrMapping/>
+  </p:clrMapOvr>
+</p:sld>
+</file>
+
+<file path=ppt/slides/slide9.xml><?xml version="1.0" encoding="utf-8"?>
 <p:sld xmlns:a="http://schemas.openxmlformats.org/drawingml/2006/main" xmlns:r="http://schemas.openxmlformats.org/officeDocument/2006/relationships" xmlns:p="http://schemas.openxmlformats.org/presentationml/2006/main">
   <p:cSld>
     <p:bg>
@@ -3468,2213 +5312,6 @@
     <p:extLst>
       <p:ext uri="{BB962C8B-B14F-4D97-AF65-F5344CB8AC3E}">
         <p14:creationId xmlns:p14="http://schemas.microsoft.com/office/powerpoint/2010/main" val="95335863"/>
-      </p:ext>
-    </p:extLst>
-  </p:cSld>
-  <p:clrMapOvr>
-    <a:masterClrMapping/>
-  </p:clrMapOvr>
-</p:sld>
-</file>
-
-<file path=ppt/slides/slide11.xml><?xml version="1.0" encoding="utf-8"?>
-<p:sld xmlns:a="http://schemas.openxmlformats.org/drawingml/2006/main" xmlns:r="http://schemas.openxmlformats.org/officeDocument/2006/relationships" xmlns:p="http://schemas.openxmlformats.org/presentationml/2006/main">
-  <p:cSld>
-    <p:bg>
-      <p:bgPr>
-        <a:solidFill>
-          <a:schemeClr val="tx1"/>
-        </a:solidFill>
-        <a:effectLst/>
-      </p:bgPr>
-    </p:bg>
-    <p:spTree>
-      <p:nvGrpSpPr>
-        <p:cNvPr id="1" name="">
-          <a:extLst>
-            <a:ext uri="{FF2B5EF4-FFF2-40B4-BE49-F238E27FC236}">
-              <a16:creationId xmlns:a16="http://schemas.microsoft.com/office/drawing/2014/main" id="{BD880269-F0C2-8131-4EE0-D78851E0F0DF}"/>
-            </a:ext>
-          </a:extLst>
-        </p:cNvPr>
-        <p:cNvGrpSpPr/>
-        <p:nvPr/>
-      </p:nvGrpSpPr>
-      <p:grpSpPr>
-        <a:xfrm>
-          <a:off x="0" y="0"/>
-          <a:ext cx="0" cy="0"/>
-          <a:chOff x="0" y="0"/>
-          <a:chExt cx="0" cy="0"/>
-        </a:xfrm>
-      </p:grpSpPr>
-      <p:sp>
-        <p:nvSpPr>
-          <p:cNvPr id="3" name="Subtitle 2">
-            <a:extLst>
-              <a:ext uri="{FF2B5EF4-FFF2-40B4-BE49-F238E27FC236}">
-                <a16:creationId xmlns:a16="http://schemas.microsoft.com/office/drawing/2014/main" id="{F0FFD390-F883-D262-DD50-1D3C4A74F4EA}"/>
-              </a:ext>
-            </a:extLst>
-          </p:cNvPr>
-          <p:cNvSpPr>
-            <a:spLocks noGrp="1"/>
-          </p:cNvSpPr>
-          <p:nvPr>
-            <p:ph type="subTitle" idx="1"/>
-          </p:nvPr>
-        </p:nvSpPr>
-        <p:spPr>
-          <a:xfrm>
-            <a:off x="144379" y="127591"/>
-            <a:ext cx="8903369" cy="6528390"/>
-          </a:xfrm>
-        </p:spPr>
-        <p:txBody>
-          <a:bodyPr>
-            <a:noAutofit/>
-          </a:bodyPr>
-          <a:lstStyle/>
-          <a:p>
-            <a:r>
-              <a:rPr lang="en-US" sz="4400" dirty="0">
-                <a:solidFill>
-                  <a:schemeClr val="bg1"/>
-                </a:solidFill>
-                <a:latin typeface="Avenir Medium" panose="02000503020000020003" pitchFamily="2" charset="0"/>
-                <a:ea typeface="Bodoni Ornaments" pitchFamily="2" charset="0"/>
-              </a:rPr>
-              <a:t> </a:t>
-            </a:r>
-          </a:p>
-          <a:p>
-            <a:endParaRPr lang="en-US" sz="4400" dirty="0">
-              <a:solidFill>
-                <a:schemeClr val="bg1"/>
-              </a:solidFill>
-              <a:latin typeface="Avenir Medium" panose="02000503020000020003" pitchFamily="2" charset="0"/>
-              <a:ea typeface="Bodoni Ornaments" pitchFamily="2" charset="0"/>
-            </a:endParaRPr>
-          </a:p>
-          <a:p>
-            <a:r>
-              <a:rPr lang="en-US" sz="4400" dirty="0">
-                <a:solidFill>
-                  <a:schemeClr val="bg1"/>
-                </a:solidFill>
-                <a:latin typeface="Avenir Medium" panose="02000503020000020003" pitchFamily="2" charset="0"/>
-                <a:ea typeface="Bodoni Ornaments" pitchFamily="2" charset="0"/>
-              </a:rPr>
-              <a:t>Hear your people sing "Holy"</a:t>
-            </a:r>
-          </a:p>
-          <a:p>
-            <a:r>
-              <a:rPr lang="en-US" sz="4400" dirty="0">
-                <a:solidFill>
-                  <a:schemeClr val="bg1"/>
-                </a:solidFill>
-                <a:latin typeface="Avenir Medium" panose="02000503020000020003" pitchFamily="2" charset="0"/>
-                <a:ea typeface="Bodoni Ornaments" pitchFamily="2" charset="0"/>
-              </a:rPr>
-              <a:t>To the King of Kings "Holy"</a:t>
-            </a:r>
-          </a:p>
-          <a:p>
-            <a:r>
-              <a:rPr lang="en-US" sz="4400" dirty="0">
-                <a:solidFill>
-                  <a:schemeClr val="bg1"/>
-                </a:solidFill>
-                <a:latin typeface="Avenir Medium" panose="02000503020000020003" pitchFamily="2" charset="0"/>
-                <a:ea typeface="Bodoni Ornaments" pitchFamily="2" charset="0"/>
-              </a:rPr>
-              <a:t>You will always be holy</a:t>
-            </a:r>
-          </a:p>
-          <a:p>
-            <a:r>
-              <a:rPr lang="en-US" sz="4400" dirty="0">
-                <a:solidFill>
-                  <a:schemeClr val="bg1"/>
-                </a:solidFill>
-                <a:latin typeface="Avenir Medium" panose="02000503020000020003" pitchFamily="2" charset="0"/>
-                <a:ea typeface="Bodoni Ornaments" pitchFamily="2" charset="0"/>
-              </a:rPr>
-              <a:t>Holy forever</a:t>
-            </a:r>
-          </a:p>
-        </p:txBody>
-      </p:sp>
-    </p:spTree>
-    <p:extLst>
-      <p:ext uri="{BB962C8B-B14F-4D97-AF65-F5344CB8AC3E}">
-        <p14:creationId xmlns:p14="http://schemas.microsoft.com/office/powerpoint/2010/main" val="1326796751"/>
-      </p:ext>
-    </p:extLst>
-  </p:cSld>
-  <p:clrMapOvr>
-    <a:masterClrMapping/>
-  </p:clrMapOvr>
-</p:sld>
-</file>
-
-<file path=ppt/slides/slide12.xml><?xml version="1.0" encoding="utf-8"?>
-<p:sld xmlns:a="http://schemas.openxmlformats.org/drawingml/2006/main" xmlns:r="http://schemas.openxmlformats.org/officeDocument/2006/relationships" xmlns:p="http://schemas.openxmlformats.org/presentationml/2006/main">
-  <p:cSld>
-    <p:bg>
-      <p:bgPr>
-        <a:solidFill>
-          <a:schemeClr val="tx1"/>
-        </a:solidFill>
-        <a:effectLst/>
-      </p:bgPr>
-    </p:bg>
-    <p:spTree>
-      <p:nvGrpSpPr>
-        <p:cNvPr id="1" name="">
-          <a:extLst>
-            <a:ext uri="{FF2B5EF4-FFF2-40B4-BE49-F238E27FC236}">
-              <a16:creationId xmlns:a16="http://schemas.microsoft.com/office/drawing/2014/main" id="{D80DF180-4776-F955-8F77-3594FD509252}"/>
-            </a:ext>
-          </a:extLst>
-        </p:cNvPr>
-        <p:cNvGrpSpPr/>
-        <p:nvPr/>
-      </p:nvGrpSpPr>
-      <p:grpSpPr>
-        <a:xfrm>
-          <a:off x="0" y="0"/>
-          <a:ext cx="0" cy="0"/>
-          <a:chOff x="0" y="0"/>
-          <a:chExt cx="0" cy="0"/>
-        </a:xfrm>
-      </p:grpSpPr>
-      <p:sp>
-        <p:nvSpPr>
-          <p:cNvPr id="3" name="Subtitle 2">
-            <a:extLst>
-              <a:ext uri="{FF2B5EF4-FFF2-40B4-BE49-F238E27FC236}">
-                <a16:creationId xmlns:a16="http://schemas.microsoft.com/office/drawing/2014/main" id="{C79F6856-D620-D2BA-AE81-819D3A03C60C}"/>
-              </a:ext>
-            </a:extLst>
-          </p:cNvPr>
-          <p:cNvSpPr>
-            <a:spLocks noGrp="1"/>
-          </p:cNvSpPr>
-          <p:nvPr>
-            <p:ph type="subTitle" idx="1"/>
-          </p:nvPr>
-        </p:nvSpPr>
-        <p:spPr>
-          <a:xfrm>
-            <a:off x="84221" y="116958"/>
-            <a:ext cx="8891337" cy="6602819"/>
-          </a:xfrm>
-        </p:spPr>
-        <p:txBody>
-          <a:bodyPr>
-            <a:noAutofit/>
-          </a:bodyPr>
-          <a:lstStyle/>
-          <a:p>
-            <a:endParaRPr lang="en-US" sz="4400" dirty="0">
-              <a:solidFill>
-                <a:schemeClr val="bg1"/>
-              </a:solidFill>
-              <a:latin typeface="Avenir Medium" panose="02000503020000020003" pitchFamily="2" charset="0"/>
-              <a:ea typeface="Bodoni Ornaments" pitchFamily="2" charset="0"/>
-            </a:endParaRPr>
-          </a:p>
-          <a:p>
-            <a:endParaRPr lang="en-US" sz="4400" dirty="0">
-              <a:solidFill>
-                <a:schemeClr val="bg1"/>
-              </a:solidFill>
-              <a:latin typeface="Avenir Medium" panose="02000503020000020003" pitchFamily="2" charset="0"/>
-              <a:ea typeface="Bodoni Ornaments" pitchFamily="2" charset="0"/>
-            </a:endParaRPr>
-          </a:p>
-          <a:p>
-            <a:r>
-              <a:rPr lang="en-US" sz="4400" dirty="0">
-                <a:solidFill>
-                  <a:schemeClr val="bg1"/>
-                </a:solidFill>
-                <a:latin typeface="Avenir Medium" panose="02000503020000020003" pitchFamily="2" charset="0"/>
-                <a:ea typeface="Bodoni Ornaments" pitchFamily="2" charset="0"/>
-              </a:rPr>
-              <a:t>Your name is the highest</a:t>
-            </a:r>
-          </a:p>
-          <a:p>
-            <a:r>
-              <a:rPr lang="en-US" sz="4400" dirty="0">
-                <a:solidFill>
-                  <a:schemeClr val="bg1"/>
-                </a:solidFill>
-                <a:latin typeface="Avenir Medium" panose="02000503020000020003" pitchFamily="2" charset="0"/>
-                <a:ea typeface="Bodoni Ornaments" pitchFamily="2" charset="0"/>
-              </a:rPr>
-              <a:t>Your name is the greatest</a:t>
-            </a:r>
-          </a:p>
-          <a:p>
-            <a:r>
-              <a:rPr lang="en-US" sz="4400" dirty="0">
-                <a:solidFill>
-                  <a:schemeClr val="bg1"/>
-                </a:solidFill>
-                <a:latin typeface="Avenir Medium" panose="02000503020000020003" pitchFamily="2" charset="0"/>
-                <a:ea typeface="Bodoni Ornaments" pitchFamily="2" charset="0"/>
-              </a:rPr>
-              <a:t>Your name stands above them all</a:t>
-            </a:r>
-          </a:p>
-          <a:p>
-            <a:r>
-              <a:rPr lang="en-US" sz="4400" dirty="0">
-                <a:solidFill>
-                  <a:schemeClr val="bg1"/>
-                </a:solidFill>
-                <a:latin typeface="Avenir Medium" panose="02000503020000020003" pitchFamily="2" charset="0"/>
-                <a:ea typeface="Bodoni Ornaments" pitchFamily="2" charset="0"/>
-              </a:rPr>
-              <a:t> </a:t>
-            </a:r>
-          </a:p>
-        </p:txBody>
-      </p:sp>
-    </p:spTree>
-    <p:extLst>
-      <p:ext uri="{BB962C8B-B14F-4D97-AF65-F5344CB8AC3E}">
-        <p14:creationId xmlns:p14="http://schemas.microsoft.com/office/powerpoint/2010/main" val="375700686"/>
-      </p:ext>
-    </p:extLst>
-  </p:cSld>
-  <p:clrMapOvr>
-    <a:masterClrMapping/>
-  </p:clrMapOvr>
-</p:sld>
-</file>
-
-<file path=ppt/slides/slide13.xml><?xml version="1.0" encoding="utf-8"?>
-<p:sld xmlns:a="http://schemas.openxmlformats.org/drawingml/2006/main" xmlns:r="http://schemas.openxmlformats.org/officeDocument/2006/relationships" xmlns:p="http://schemas.openxmlformats.org/presentationml/2006/main">
-  <p:cSld>
-    <p:bg>
-      <p:bgPr>
-        <a:solidFill>
-          <a:schemeClr val="tx1"/>
-        </a:solidFill>
-        <a:effectLst/>
-      </p:bgPr>
-    </p:bg>
-    <p:spTree>
-      <p:nvGrpSpPr>
-        <p:cNvPr id="1" name="">
-          <a:extLst>
-            <a:ext uri="{FF2B5EF4-FFF2-40B4-BE49-F238E27FC236}">
-              <a16:creationId xmlns:a16="http://schemas.microsoft.com/office/drawing/2014/main" id="{660F44CB-E8B9-E6B1-4410-3F978CBE8CCE}"/>
-            </a:ext>
-          </a:extLst>
-        </p:cNvPr>
-        <p:cNvGrpSpPr/>
-        <p:nvPr/>
-      </p:nvGrpSpPr>
-      <p:grpSpPr>
-        <a:xfrm>
-          <a:off x="0" y="0"/>
-          <a:ext cx="0" cy="0"/>
-          <a:chOff x="0" y="0"/>
-          <a:chExt cx="0" cy="0"/>
-        </a:xfrm>
-      </p:grpSpPr>
-      <p:sp>
-        <p:nvSpPr>
-          <p:cNvPr id="3" name="Subtitle 2">
-            <a:extLst>
-              <a:ext uri="{FF2B5EF4-FFF2-40B4-BE49-F238E27FC236}">
-                <a16:creationId xmlns:a16="http://schemas.microsoft.com/office/drawing/2014/main" id="{8ECFA5D4-3D24-7026-BBCF-DA4F3F2315E6}"/>
-              </a:ext>
-            </a:extLst>
-          </p:cNvPr>
-          <p:cNvSpPr>
-            <a:spLocks noGrp="1"/>
-          </p:cNvSpPr>
-          <p:nvPr>
-            <p:ph type="subTitle" idx="1"/>
-          </p:nvPr>
-        </p:nvSpPr>
-        <p:spPr>
-          <a:xfrm>
-            <a:off x="84221" y="116958"/>
-            <a:ext cx="8891337" cy="6602819"/>
-          </a:xfrm>
-        </p:spPr>
-        <p:txBody>
-          <a:bodyPr>
-            <a:noAutofit/>
-          </a:bodyPr>
-          <a:lstStyle/>
-          <a:p>
-            <a:endParaRPr lang="en-US" sz="4400" dirty="0">
-              <a:solidFill>
-                <a:schemeClr val="bg1"/>
-              </a:solidFill>
-              <a:latin typeface="Avenir Medium" panose="02000503020000020003" pitchFamily="2" charset="0"/>
-              <a:ea typeface="Bodoni Ornaments" pitchFamily="2" charset="0"/>
-            </a:endParaRPr>
-          </a:p>
-          <a:p>
-            <a:endParaRPr lang="en-US" sz="4400" dirty="0">
-              <a:solidFill>
-                <a:schemeClr val="bg1"/>
-              </a:solidFill>
-              <a:latin typeface="Avenir Medium" panose="02000503020000020003" pitchFamily="2" charset="0"/>
-              <a:ea typeface="Bodoni Ornaments" pitchFamily="2" charset="0"/>
-            </a:endParaRPr>
-          </a:p>
-          <a:p>
-            <a:r>
-              <a:rPr lang="en-US" sz="4400" dirty="0">
-                <a:solidFill>
-                  <a:schemeClr val="bg1"/>
-                </a:solidFill>
-                <a:latin typeface="Avenir Medium" panose="02000503020000020003" pitchFamily="2" charset="0"/>
-                <a:ea typeface="Bodoni Ornaments" pitchFamily="2" charset="0"/>
-              </a:rPr>
-              <a:t>All thrones and dominions</a:t>
-            </a:r>
-          </a:p>
-          <a:p>
-            <a:r>
-              <a:rPr lang="en-US" sz="4400" dirty="0">
-                <a:solidFill>
-                  <a:schemeClr val="bg1"/>
-                </a:solidFill>
-                <a:latin typeface="Avenir Medium" panose="02000503020000020003" pitchFamily="2" charset="0"/>
-                <a:ea typeface="Bodoni Ornaments" pitchFamily="2" charset="0"/>
-              </a:rPr>
-              <a:t>All powers and positions</a:t>
-            </a:r>
-          </a:p>
-          <a:p>
-            <a:r>
-              <a:rPr lang="en-US" sz="4400" dirty="0">
-                <a:solidFill>
-                  <a:schemeClr val="bg1"/>
-                </a:solidFill>
-                <a:latin typeface="Avenir Medium" panose="02000503020000020003" pitchFamily="2" charset="0"/>
-                <a:ea typeface="Bodoni Ornaments" pitchFamily="2" charset="0"/>
-              </a:rPr>
-              <a:t>Your name stands above them all</a:t>
-            </a:r>
-          </a:p>
-          <a:p>
-            <a:r>
-              <a:rPr lang="en-US" sz="4400" dirty="0">
-                <a:solidFill>
-                  <a:schemeClr val="bg1"/>
-                </a:solidFill>
-                <a:latin typeface="Avenir Medium" panose="02000503020000020003" pitchFamily="2" charset="0"/>
-                <a:ea typeface="Bodoni Ornaments" pitchFamily="2" charset="0"/>
-              </a:rPr>
-              <a:t> </a:t>
-            </a:r>
-          </a:p>
-        </p:txBody>
-      </p:sp>
-    </p:spTree>
-    <p:extLst>
-      <p:ext uri="{BB962C8B-B14F-4D97-AF65-F5344CB8AC3E}">
-        <p14:creationId xmlns:p14="http://schemas.microsoft.com/office/powerpoint/2010/main" val="3850958701"/>
-      </p:ext>
-    </p:extLst>
-  </p:cSld>
-  <p:clrMapOvr>
-    <a:masterClrMapping/>
-  </p:clrMapOvr>
-</p:sld>
-</file>
-
-<file path=ppt/slides/slide14.xml><?xml version="1.0" encoding="utf-8"?>
-<p:sld xmlns:a="http://schemas.openxmlformats.org/drawingml/2006/main" xmlns:r="http://schemas.openxmlformats.org/officeDocument/2006/relationships" xmlns:p="http://schemas.openxmlformats.org/presentationml/2006/main">
-  <p:cSld>
-    <p:bg>
-      <p:bgPr>
-        <a:solidFill>
-          <a:schemeClr val="tx1"/>
-        </a:solidFill>
-        <a:effectLst/>
-      </p:bgPr>
-    </p:bg>
-    <p:spTree>
-      <p:nvGrpSpPr>
-        <p:cNvPr id="1" name="">
-          <a:extLst>
-            <a:ext uri="{FF2B5EF4-FFF2-40B4-BE49-F238E27FC236}">
-              <a16:creationId xmlns:a16="http://schemas.microsoft.com/office/drawing/2014/main" id="{2C224625-3A83-28F8-F6D4-8773C84C1421}"/>
-            </a:ext>
-          </a:extLst>
-        </p:cNvPr>
-        <p:cNvGrpSpPr/>
-        <p:nvPr/>
-      </p:nvGrpSpPr>
-      <p:grpSpPr>
-        <a:xfrm>
-          <a:off x="0" y="0"/>
-          <a:ext cx="0" cy="0"/>
-          <a:chOff x="0" y="0"/>
-          <a:chExt cx="0" cy="0"/>
-        </a:xfrm>
-      </p:grpSpPr>
-      <p:sp>
-        <p:nvSpPr>
-          <p:cNvPr id="3" name="Subtitle 2">
-            <a:extLst>
-              <a:ext uri="{FF2B5EF4-FFF2-40B4-BE49-F238E27FC236}">
-                <a16:creationId xmlns:a16="http://schemas.microsoft.com/office/drawing/2014/main" id="{794BC0E3-10D5-8037-54C0-EDD5EC08C67B}"/>
-              </a:ext>
-            </a:extLst>
-          </p:cNvPr>
-          <p:cNvSpPr>
-            <a:spLocks noGrp="1"/>
-          </p:cNvSpPr>
-          <p:nvPr>
-            <p:ph type="subTitle" idx="1"/>
-          </p:nvPr>
-        </p:nvSpPr>
-        <p:spPr>
-          <a:xfrm>
-            <a:off x="84221" y="116958"/>
-            <a:ext cx="8891337" cy="6602819"/>
-          </a:xfrm>
-        </p:spPr>
-        <p:txBody>
-          <a:bodyPr>
-            <a:noAutofit/>
-          </a:bodyPr>
-          <a:lstStyle/>
-          <a:p>
-            <a:endParaRPr lang="en-US" sz="4400" dirty="0">
-              <a:solidFill>
-                <a:schemeClr val="bg1"/>
-              </a:solidFill>
-              <a:latin typeface="Avenir Medium" panose="02000503020000020003" pitchFamily="2" charset="0"/>
-              <a:ea typeface="Bodoni Ornaments" pitchFamily="2" charset="0"/>
-            </a:endParaRPr>
-          </a:p>
-          <a:p>
-            <a:endParaRPr lang="en-US" sz="4400" dirty="0">
-              <a:solidFill>
-                <a:schemeClr val="bg1"/>
-              </a:solidFill>
-              <a:latin typeface="Avenir Medium" panose="02000503020000020003" pitchFamily="2" charset="0"/>
-              <a:ea typeface="Bodoni Ornaments" pitchFamily="2" charset="0"/>
-            </a:endParaRPr>
-          </a:p>
-          <a:p>
-            <a:r>
-              <a:rPr lang="en-US" sz="4400" dirty="0">
-                <a:solidFill>
-                  <a:schemeClr val="bg1"/>
-                </a:solidFill>
-                <a:latin typeface="Avenir Medium" panose="02000503020000020003" pitchFamily="2" charset="0"/>
-                <a:ea typeface="Bodoni Ornaments" pitchFamily="2" charset="0"/>
-              </a:rPr>
-              <a:t>Your name is the highest</a:t>
-            </a:r>
-          </a:p>
-          <a:p>
-            <a:r>
-              <a:rPr lang="en-US" sz="4400" dirty="0">
-                <a:solidFill>
-                  <a:schemeClr val="bg1"/>
-                </a:solidFill>
-                <a:latin typeface="Avenir Medium" panose="02000503020000020003" pitchFamily="2" charset="0"/>
-                <a:ea typeface="Bodoni Ornaments" pitchFamily="2" charset="0"/>
-              </a:rPr>
-              <a:t>Your name is the greatest</a:t>
-            </a:r>
-          </a:p>
-          <a:p>
-            <a:r>
-              <a:rPr lang="en-US" sz="4400" dirty="0">
-                <a:solidFill>
-                  <a:schemeClr val="bg1"/>
-                </a:solidFill>
-                <a:latin typeface="Avenir Medium" panose="02000503020000020003" pitchFamily="2" charset="0"/>
-                <a:ea typeface="Bodoni Ornaments" pitchFamily="2" charset="0"/>
-              </a:rPr>
-              <a:t>Your name stands above them all</a:t>
-            </a:r>
-          </a:p>
-          <a:p>
-            <a:r>
-              <a:rPr lang="en-US" sz="4400" dirty="0">
-                <a:solidFill>
-                  <a:schemeClr val="bg1"/>
-                </a:solidFill>
-                <a:latin typeface="Avenir Medium" panose="02000503020000020003" pitchFamily="2" charset="0"/>
-                <a:ea typeface="Bodoni Ornaments" pitchFamily="2" charset="0"/>
-              </a:rPr>
-              <a:t> </a:t>
-            </a:r>
-          </a:p>
-        </p:txBody>
-      </p:sp>
-    </p:spTree>
-    <p:extLst>
-      <p:ext uri="{BB962C8B-B14F-4D97-AF65-F5344CB8AC3E}">
-        <p14:creationId xmlns:p14="http://schemas.microsoft.com/office/powerpoint/2010/main" val="1242102635"/>
-      </p:ext>
-    </p:extLst>
-  </p:cSld>
-  <p:clrMapOvr>
-    <a:masterClrMapping/>
-  </p:clrMapOvr>
-</p:sld>
-</file>
-
-<file path=ppt/slides/slide15.xml><?xml version="1.0" encoding="utf-8"?>
-<p:sld xmlns:a="http://schemas.openxmlformats.org/drawingml/2006/main" xmlns:r="http://schemas.openxmlformats.org/officeDocument/2006/relationships" xmlns:p="http://schemas.openxmlformats.org/presentationml/2006/main">
-  <p:cSld>
-    <p:bg>
-      <p:bgPr>
-        <a:solidFill>
-          <a:schemeClr val="tx1"/>
-        </a:solidFill>
-        <a:effectLst/>
-      </p:bgPr>
-    </p:bg>
-    <p:spTree>
-      <p:nvGrpSpPr>
-        <p:cNvPr id="1" name="">
-          <a:extLst>
-            <a:ext uri="{FF2B5EF4-FFF2-40B4-BE49-F238E27FC236}">
-              <a16:creationId xmlns:a16="http://schemas.microsoft.com/office/drawing/2014/main" id="{79129775-2A77-7E69-6721-06D7269DE39D}"/>
-            </a:ext>
-          </a:extLst>
-        </p:cNvPr>
-        <p:cNvGrpSpPr/>
-        <p:nvPr/>
-      </p:nvGrpSpPr>
-      <p:grpSpPr>
-        <a:xfrm>
-          <a:off x="0" y="0"/>
-          <a:ext cx="0" cy="0"/>
-          <a:chOff x="0" y="0"/>
-          <a:chExt cx="0" cy="0"/>
-        </a:xfrm>
-      </p:grpSpPr>
-      <p:sp>
-        <p:nvSpPr>
-          <p:cNvPr id="3" name="Subtitle 2">
-            <a:extLst>
-              <a:ext uri="{FF2B5EF4-FFF2-40B4-BE49-F238E27FC236}">
-                <a16:creationId xmlns:a16="http://schemas.microsoft.com/office/drawing/2014/main" id="{FB6E4D23-5E95-5F34-1AA5-C25237028F54}"/>
-              </a:ext>
-            </a:extLst>
-          </p:cNvPr>
-          <p:cNvSpPr>
-            <a:spLocks noGrp="1"/>
-          </p:cNvSpPr>
-          <p:nvPr>
-            <p:ph type="subTitle" idx="1"/>
-          </p:nvPr>
-        </p:nvSpPr>
-        <p:spPr>
-          <a:xfrm>
-            <a:off x="84221" y="116958"/>
-            <a:ext cx="8891337" cy="6602819"/>
-          </a:xfrm>
-        </p:spPr>
-        <p:txBody>
-          <a:bodyPr>
-            <a:noAutofit/>
-          </a:bodyPr>
-          <a:lstStyle/>
-          <a:p>
-            <a:endParaRPr lang="en-US" sz="4400" dirty="0">
-              <a:solidFill>
-                <a:schemeClr val="bg1"/>
-              </a:solidFill>
-              <a:latin typeface="Avenir Medium" panose="02000503020000020003" pitchFamily="2" charset="0"/>
-              <a:ea typeface="Bodoni Ornaments" pitchFamily="2" charset="0"/>
-            </a:endParaRPr>
-          </a:p>
-          <a:p>
-            <a:endParaRPr lang="en-US" sz="4400" dirty="0">
-              <a:solidFill>
-                <a:schemeClr val="bg1"/>
-              </a:solidFill>
-              <a:latin typeface="Avenir Medium" panose="02000503020000020003" pitchFamily="2" charset="0"/>
-              <a:ea typeface="Bodoni Ornaments" pitchFamily="2" charset="0"/>
-            </a:endParaRPr>
-          </a:p>
-          <a:p>
-            <a:r>
-              <a:rPr lang="en-US" sz="4400" dirty="0">
-                <a:solidFill>
-                  <a:schemeClr val="bg1"/>
-                </a:solidFill>
-                <a:latin typeface="Avenir Medium" panose="02000503020000020003" pitchFamily="2" charset="0"/>
-                <a:ea typeface="Bodoni Ornaments" pitchFamily="2" charset="0"/>
-              </a:rPr>
-              <a:t>All thrones and dominions</a:t>
-            </a:r>
-          </a:p>
-          <a:p>
-            <a:r>
-              <a:rPr lang="en-US" sz="4400" dirty="0">
-                <a:solidFill>
-                  <a:schemeClr val="bg1"/>
-                </a:solidFill>
-                <a:latin typeface="Avenir Medium" panose="02000503020000020003" pitchFamily="2" charset="0"/>
-                <a:ea typeface="Bodoni Ornaments" pitchFamily="2" charset="0"/>
-              </a:rPr>
-              <a:t>All powers and positions</a:t>
-            </a:r>
-          </a:p>
-          <a:p>
-            <a:r>
-              <a:rPr lang="en-US" sz="4400" dirty="0">
-                <a:solidFill>
-                  <a:schemeClr val="bg1"/>
-                </a:solidFill>
-                <a:latin typeface="Avenir Medium" panose="02000503020000020003" pitchFamily="2" charset="0"/>
-                <a:ea typeface="Bodoni Ornaments" pitchFamily="2" charset="0"/>
-              </a:rPr>
-              <a:t>Your name stands above them all</a:t>
-            </a:r>
-          </a:p>
-          <a:p>
-            <a:r>
-              <a:rPr lang="en-US" sz="4400" dirty="0">
-                <a:solidFill>
-                  <a:schemeClr val="bg1"/>
-                </a:solidFill>
-                <a:latin typeface="Avenir Medium" panose="02000503020000020003" pitchFamily="2" charset="0"/>
-                <a:ea typeface="Bodoni Ornaments" pitchFamily="2" charset="0"/>
-              </a:rPr>
-              <a:t> </a:t>
-            </a:r>
-          </a:p>
-        </p:txBody>
-      </p:sp>
-    </p:spTree>
-    <p:extLst>
-      <p:ext uri="{BB962C8B-B14F-4D97-AF65-F5344CB8AC3E}">
-        <p14:creationId xmlns:p14="http://schemas.microsoft.com/office/powerpoint/2010/main" val="4212294759"/>
-      </p:ext>
-    </p:extLst>
-  </p:cSld>
-  <p:clrMapOvr>
-    <a:masterClrMapping/>
-  </p:clrMapOvr>
-</p:sld>
-</file>
-
-<file path=ppt/slides/slide16.xml><?xml version="1.0" encoding="utf-8"?>
-<p:sld xmlns:a="http://schemas.openxmlformats.org/drawingml/2006/main" xmlns:r="http://schemas.openxmlformats.org/officeDocument/2006/relationships" xmlns:p="http://schemas.openxmlformats.org/presentationml/2006/main">
-  <p:cSld>
-    <p:bg>
-      <p:bgPr>
-        <a:solidFill>
-          <a:schemeClr val="tx1"/>
-        </a:solidFill>
-        <a:effectLst/>
-      </p:bgPr>
-    </p:bg>
-    <p:spTree>
-      <p:nvGrpSpPr>
-        <p:cNvPr id="1" name="">
-          <a:extLst>
-            <a:ext uri="{FF2B5EF4-FFF2-40B4-BE49-F238E27FC236}">
-              <a16:creationId xmlns:a16="http://schemas.microsoft.com/office/drawing/2014/main" id="{80A3F87C-0BAC-57C4-85B2-0EB811CC570C}"/>
-            </a:ext>
-          </a:extLst>
-        </p:cNvPr>
-        <p:cNvGrpSpPr/>
-        <p:nvPr/>
-      </p:nvGrpSpPr>
-      <p:grpSpPr>
-        <a:xfrm>
-          <a:off x="0" y="0"/>
-          <a:ext cx="0" cy="0"/>
-          <a:chOff x="0" y="0"/>
-          <a:chExt cx="0" cy="0"/>
-        </a:xfrm>
-      </p:grpSpPr>
-      <p:sp>
-        <p:nvSpPr>
-          <p:cNvPr id="3" name="Subtitle 2">
-            <a:extLst>
-              <a:ext uri="{FF2B5EF4-FFF2-40B4-BE49-F238E27FC236}">
-                <a16:creationId xmlns:a16="http://schemas.microsoft.com/office/drawing/2014/main" id="{719BB2D9-3879-1FA2-6B62-0AC127D853E9}"/>
-              </a:ext>
-            </a:extLst>
-          </p:cNvPr>
-          <p:cNvSpPr>
-            <a:spLocks noGrp="1"/>
-          </p:cNvSpPr>
-          <p:nvPr>
-            <p:ph type="subTitle" idx="1"/>
-          </p:nvPr>
-        </p:nvSpPr>
-        <p:spPr>
-          <a:xfrm>
-            <a:off x="144379" y="207818"/>
-            <a:ext cx="8903369" cy="6386945"/>
-          </a:xfrm>
-        </p:spPr>
-        <p:txBody>
-          <a:bodyPr>
-            <a:noAutofit/>
-          </a:bodyPr>
-          <a:lstStyle/>
-          <a:p>
-            <a:r>
-              <a:rPr lang="en-US" sz="4400" dirty="0">
-                <a:solidFill>
-                  <a:schemeClr val="bg1"/>
-                </a:solidFill>
-                <a:latin typeface="Avenir Medium" panose="02000503020000020003" pitchFamily="2" charset="0"/>
-                <a:ea typeface="Bodoni Ornaments" pitchFamily="2" charset="0"/>
-              </a:rPr>
-              <a:t> </a:t>
-            </a:r>
-          </a:p>
-          <a:p>
-            <a:endParaRPr lang="en-US" sz="4400" dirty="0">
-              <a:solidFill>
-                <a:schemeClr val="bg1"/>
-              </a:solidFill>
-              <a:latin typeface="Avenir Medium" panose="02000503020000020003" pitchFamily="2" charset="0"/>
-              <a:ea typeface="Bodoni Ornaments" pitchFamily="2" charset="0"/>
-            </a:endParaRPr>
-          </a:p>
-          <a:p>
-            <a:r>
-              <a:rPr lang="en-US" sz="4400" dirty="0">
-                <a:solidFill>
-                  <a:schemeClr val="bg1"/>
-                </a:solidFill>
-                <a:latin typeface="Avenir Medium" panose="02000503020000020003" pitchFamily="2" charset="0"/>
-                <a:ea typeface="Bodoni Ornaments" pitchFamily="2" charset="0"/>
-              </a:rPr>
-              <a:t>And the angels cry "Holy"</a:t>
-            </a:r>
-          </a:p>
-          <a:p>
-            <a:r>
-              <a:rPr lang="en-US" sz="4400" dirty="0">
-                <a:solidFill>
-                  <a:schemeClr val="bg1"/>
-                </a:solidFill>
-                <a:latin typeface="Avenir Medium" panose="02000503020000020003" pitchFamily="2" charset="0"/>
-                <a:ea typeface="Bodoni Ornaments" pitchFamily="2" charset="0"/>
-              </a:rPr>
-              <a:t>All creation cries "Holy"</a:t>
-            </a:r>
-          </a:p>
-          <a:p>
-            <a:r>
-              <a:rPr lang="en-US" sz="4400" dirty="0">
-                <a:solidFill>
-                  <a:schemeClr val="bg1"/>
-                </a:solidFill>
-                <a:latin typeface="Avenir Medium" panose="02000503020000020003" pitchFamily="2" charset="0"/>
-                <a:ea typeface="Bodoni Ornaments" pitchFamily="2" charset="0"/>
-              </a:rPr>
-              <a:t>You are lifted high, holy</a:t>
-            </a:r>
-          </a:p>
-          <a:p>
-            <a:r>
-              <a:rPr lang="en-US" sz="4400" dirty="0">
-                <a:solidFill>
-                  <a:schemeClr val="bg1"/>
-                </a:solidFill>
-                <a:latin typeface="Avenir Medium" panose="02000503020000020003" pitchFamily="2" charset="0"/>
-                <a:ea typeface="Bodoni Ornaments" pitchFamily="2" charset="0"/>
-              </a:rPr>
-              <a:t>Holy forever</a:t>
-            </a:r>
-          </a:p>
-        </p:txBody>
-      </p:sp>
-    </p:spTree>
-    <p:extLst>
-      <p:ext uri="{BB962C8B-B14F-4D97-AF65-F5344CB8AC3E}">
-        <p14:creationId xmlns:p14="http://schemas.microsoft.com/office/powerpoint/2010/main" val="3914943623"/>
-      </p:ext>
-    </p:extLst>
-  </p:cSld>
-  <p:clrMapOvr>
-    <a:masterClrMapping/>
-  </p:clrMapOvr>
-</p:sld>
-</file>
-
-<file path=ppt/slides/slide17.xml><?xml version="1.0" encoding="utf-8"?>
-<p:sld xmlns:a="http://schemas.openxmlformats.org/drawingml/2006/main" xmlns:r="http://schemas.openxmlformats.org/officeDocument/2006/relationships" xmlns:p="http://schemas.openxmlformats.org/presentationml/2006/main">
-  <p:cSld>
-    <p:bg>
-      <p:bgPr>
-        <a:solidFill>
-          <a:schemeClr val="tx1"/>
-        </a:solidFill>
-        <a:effectLst/>
-      </p:bgPr>
-    </p:bg>
-    <p:spTree>
-      <p:nvGrpSpPr>
-        <p:cNvPr id="1" name="">
-          <a:extLst>
-            <a:ext uri="{FF2B5EF4-FFF2-40B4-BE49-F238E27FC236}">
-              <a16:creationId xmlns:a16="http://schemas.microsoft.com/office/drawing/2014/main" id="{FE2941C4-E37D-A15E-24B1-EE43A754F81F}"/>
-            </a:ext>
-          </a:extLst>
-        </p:cNvPr>
-        <p:cNvGrpSpPr/>
-        <p:nvPr/>
-      </p:nvGrpSpPr>
-      <p:grpSpPr>
-        <a:xfrm>
-          <a:off x="0" y="0"/>
-          <a:ext cx="0" cy="0"/>
-          <a:chOff x="0" y="0"/>
-          <a:chExt cx="0" cy="0"/>
-        </a:xfrm>
-      </p:grpSpPr>
-      <p:sp>
-        <p:nvSpPr>
-          <p:cNvPr id="3" name="Subtitle 2">
-            <a:extLst>
-              <a:ext uri="{FF2B5EF4-FFF2-40B4-BE49-F238E27FC236}">
-                <a16:creationId xmlns:a16="http://schemas.microsoft.com/office/drawing/2014/main" id="{17904550-4DEF-3AC9-7F25-88D355DAC93F}"/>
-              </a:ext>
-            </a:extLst>
-          </p:cNvPr>
-          <p:cNvSpPr>
-            <a:spLocks noGrp="1"/>
-          </p:cNvSpPr>
-          <p:nvPr>
-            <p:ph type="subTitle" idx="1"/>
-          </p:nvPr>
-        </p:nvSpPr>
-        <p:spPr>
-          <a:xfrm>
-            <a:off x="144379" y="127591"/>
-            <a:ext cx="8903369" cy="6528390"/>
-          </a:xfrm>
-        </p:spPr>
-        <p:txBody>
-          <a:bodyPr>
-            <a:noAutofit/>
-          </a:bodyPr>
-          <a:lstStyle/>
-          <a:p>
-            <a:r>
-              <a:rPr lang="en-US" sz="4400" dirty="0">
-                <a:solidFill>
-                  <a:schemeClr val="bg1"/>
-                </a:solidFill>
-                <a:latin typeface="Avenir Medium" panose="02000503020000020003" pitchFamily="2" charset="0"/>
-                <a:ea typeface="Bodoni Ornaments" pitchFamily="2" charset="0"/>
-              </a:rPr>
-              <a:t> </a:t>
-            </a:r>
-          </a:p>
-          <a:p>
-            <a:endParaRPr lang="en-US" sz="4400" dirty="0">
-              <a:solidFill>
-                <a:schemeClr val="bg1"/>
-              </a:solidFill>
-              <a:latin typeface="Avenir Medium" panose="02000503020000020003" pitchFamily="2" charset="0"/>
-              <a:ea typeface="Bodoni Ornaments" pitchFamily="2" charset="0"/>
-            </a:endParaRPr>
-          </a:p>
-          <a:p>
-            <a:r>
-              <a:rPr lang="en-US" sz="4400" dirty="0">
-                <a:solidFill>
-                  <a:schemeClr val="bg1"/>
-                </a:solidFill>
-                <a:latin typeface="Avenir Medium" panose="02000503020000020003" pitchFamily="2" charset="0"/>
-                <a:ea typeface="Bodoni Ornaments" pitchFamily="2" charset="0"/>
-              </a:rPr>
-              <a:t>Hear your people sing "Holy"</a:t>
-            </a:r>
-          </a:p>
-          <a:p>
-            <a:r>
-              <a:rPr lang="en-US" sz="4400" dirty="0">
-                <a:solidFill>
-                  <a:schemeClr val="bg1"/>
-                </a:solidFill>
-                <a:latin typeface="Avenir Medium" panose="02000503020000020003" pitchFamily="2" charset="0"/>
-                <a:ea typeface="Bodoni Ornaments" pitchFamily="2" charset="0"/>
-              </a:rPr>
-              <a:t>To the King of Kings "Holy"</a:t>
-            </a:r>
-          </a:p>
-          <a:p>
-            <a:r>
-              <a:rPr lang="en-US" sz="4400" dirty="0">
-                <a:solidFill>
-                  <a:schemeClr val="bg1"/>
-                </a:solidFill>
-                <a:latin typeface="Avenir Medium" panose="02000503020000020003" pitchFamily="2" charset="0"/>
-                <a:ea typeface="Bodoni Ornaments" pitchFamily="2" charset="0"/>
-              </a:rPr>
-              <a:t>You will always be holy</a:t>
-            </a:r>
-          </a:p>
-          <a:p>
-            <a:r>
-              <a:rPr lang="en-US" sz="4400" dirty="0">
-                <a:solidFill>
-                  <a:schemeClr val="bg1"/>
-                </a:solidFill>
-                <a:latin typeface="Avenir Medium" panose="02000503020000020003" pitchFamily="2" charset="0"/>
-                <a:ea typeface="Bodoni Ornaments" pitchFamily="2" charset="0"/>
-              </a:rPr>
-              <a:t>Holy forever</a:t>
-            </a:r>
-          </a:p>
-        </p:txBody>
-      </p:sp>
-    </p:spTree>
-    <p:extLst>
-      <p:ext uri="{BB962C8B-B14F-4D97-AF65-F5344CB8AC3E}">
-        <p14:creationId xmlns:p14="http://schemas.microsoft.com/office/powerpoint/2010/main" val="1732739995"/>
-      </p:ext>
-    </p:extLst>
-  </p:cSld>
-  <p:clrMapOvr>
-    <a:masterClrMapping/>
-  </p:clrMapOvr>
-</p:sld>
-</file>
-
-<file path=ppt/slides/slide18.xml><?xml version="1.0" encoding="utf-8"?>
-<p:sld xmlns:a="http://schemas.openxmlformats.org/drawingml/2006/main" xmlns:r="http://schemas.openxmlformats.org/officeDocument/2006/relationships" xmlns:p="http://schemas.openxmlformats.org/presentationml/2006/main">
-  <p:cSld>
-    <p:bg>
-      <p:bgPr>
-        <a:solidFill>
-          <a:schemeClr val="tx1"/>
-        </a:solidFill>
-        <a:effectLst/>
-      </p:bgPr>
-    </p:bg>
-    <p:spTree>
-      <p:nvGrpSpPr>
-        <p:cNvPr id="1" name="">
-          <a:extLst>
-            <a:ext uri="{FF2B5EF4-FFF2-40B4-BE49-F238E27FC236}">
-              <a16:creationId xmlns:a16="http://schemas.microsoft.com/office/drawing/2014/main" id="{F0302E6B-F34D-D984-3E50-D0F78CD4AF8B}"/>
-            </a:ext>
-          </a:extLst>
-        </p:cNvPr>
-        <p:cNvGrpSpPr/>
-        <p:nvPr/>
-      </p:nvGrpSpPr>
-      <p:grpSpPr>
-        <a:xfrm>
-          <a:off x="0" y="0"/>
-          <a:ext cx="0" cy="0"/>
-          <a:chOff x="0" y="0"/>
-          <a:chExt cx="0" cy="0"/>
-        </a:xfrm>
-      </p:grpSpPr>
-      <p:sp>
-        <p:nvSpPr>
-          <p:cNvPr id="3" name="Subtitle 2">
-            <a:extLst>
-              <a:ext uri="{FF2B5EF4-FFF2-40B4-BE49-F238E27FC236}">
-                <a16:creationId xmlns:a16="http://schemas.microsoft.com/office/drawing/2014/main" id="{58C723EF-F302-BF13-BFE7-8A6535FCBC3B}"/>
-              </a:ext>
-            </a:extLst>
-          </p:cNvPr>
-          <p:cNvSpPr>
-            <a:spLocks noGrp="1"/>
-          </p:cNvSpPr>
-          <p:nvPr>
-            <p:ph type="subTitle" idx="1"/>
-          </p:nvPr>
-        </p:nvSpPr>
-        <p:spPr>
-          <a:xfrm>
-            <a:off x="144379" y="127591"/>
-            <a:ext cx="8903369" cy="6528390"/>
-          </a:xfrm>
-        </p:spPr>
-        <p:txBody>
-          <a:bodyPr>
-            <a:noAutofit/>
-          </a:bodyPr>
-          <a:lstStyle/>
-          <a:p>
-            <a:r>
-              <a:rPr lang="en-US" sz="4400" dirty="0">
-                <a:solidFill>
-                  <a:schemeClr val="bg1"/>
-                </a:solidFill>
-                <a:latin typeface="Avenir Medium" panose="02000503020000020003" pitchFamily="2" charset="0"/>
-                <a:ea typeface="Bodoni Ornaments" pitchFamily="2" charset="0"/>
-              </a:rPr>
-              <a:t> </a:t>
-            </a:r>
-          </a:p>
-          <a:p>
-            <a:endParaRPr lang="en-US" sz="4400" dirty="0">
-              <a:solidFill>
-                <a:schemeClr val="bg1"/>
-              </a:solidFill>
-              <a:latin typeface="Avenir Medium" panose="02000503020000020003" pitchFamily="2" charset="0"/>
-              <a:ea typeface="Bodoni Ornaments" pitchFamily="2" charset="0"/>
-            </a:endParaRPr>
-          </a:p>
-          <a:p>
-            <a:r>
-              <a:rPr lang="en-US" sz="4400" dirty="0">
-                <a:solidFill>
-                  <a:schemeClr val="bg1"/>
-                </a:solidFill>
-                <a:latin typeface="Avenir Medium" panose="02000503020000020003" pitchFamily="2" charset="0"/>
-                <a:ea typeface="Bodoni Ornaments" pitchFamily="2" charset="0"/>
-              </a:rPr>
-              <a:t>You will always be holy</a:t>
-            </a:r>
-          </a:p>
-          <a:p>
-            <a:r>
-              <a:rPr lang="en-US" sz="4400" dirty="0">
-                <a:solidFill>
-                  <a:schemeClr val="bg1"/>
-                </a:solidFill>
-                <a:latin typeface="Avenir Medium" panose="02000503020000020003" pitchFamily="2" charset="0"/>
-                <a:ea typeface="Bodoni Ornaments" pitchFamily="2" charset="0"/>
-              </a:rPr>
-              <a:t>Holy forever</a:t>
-            </a:r>
-          </a:p>
-        </p:txBody>
-      </p:sp>
-      <p:sp>
-        <p:nvSpPr>
-          <p:cNvPr id="2" name="TextBox 1">
-            <a:extLst>
-              <a:ext uri="{FF2B5EF4-FFF2-40B4-BE49-F238E27FC236}">
-                <a16:creationId xmlns:a16="http://schemas.microsoft.com/office/drawing/2014/main" id="{33CC1A8E-22E7-A125-34F9-DF56526AB4F0}"/>
-              </a:ext>
-            </a:extLst>
-          </p:cNvPr>
-          <p:cNvSpPr txBox="1"/>
-          <p:nvPr/>
-        </p:nvSpPr>
-        <p:spPr>
-          <a:xfrm>
-            <a:off x="7390614" y="6488668"/>
-            <a:ext cx="1753386" cy="369332"/>
-          </a:xfrm>
-          <a:prstGeom prst="rect">
-            <a:avLst/>
-          </a:prstGeom>
-          <a:noFill/>
-        </p:spPr>
-        <p:txBody>
-          <a:bodyPr wrap="square" rtlCol="0">
-            <a:spAutoFit/>
-          </a:bodyPr>
-          <a:lstStyle/>
-          <a:p>
-            <a:r>
-              <a:rPr lang="en-US" dirty="0">
-                <a:solidFill>
-                  <a:schemeClr val="bg1"/>
-                </a:solidFill>
-              </a:rPr>
-              <a:t>CCLI#7102397</a:t>
-            </a:r>
-          </a:p>
-        </p:txBody>
-      </p:sp>
-    </p:spTree>
-    <p:extLst>
-      <p:ext uri="{BB962C8B-B14F-4D97-AF65-F5344CB8AC3E}">
-        <p14:creationId xmlns:p14="http://schemas.microsoft.com/office/powerpoint/2010/main" val="1665531096"/>
-      </p:ext>
-    </p:extLst>
-  </p:cSld>
-  <p:clrMapOvr>
-    <a:masterClrMapping/>
-  </p:clrMapOvr>
-</p:sld>
-</file>
-
-<file path=ppt/slides/slide2.xml><?xml version="1.0" encoding="utf-8"?>
-<p:sld xmlns:a="http://schemas.openxmlformats.org/drawingml/2006/main" xmlns:r="http://schemas.openxmlformats.org/officeDocument/2006/relationships" xmlns:p="http://schemas.openxmlformats.org/presentationml/2006/main">
-  <p:cSld>
-    <p:bg>
-      <p:bgPr>
-        <a:solidFill>
-          <a:schemeClr val="tx1"/>
-        </a:solidFill>
-        <a:effectLst/>
-      </p:bgPr>
-    </p:bg>
-    <p:spTree>
-      <p:nvGrpSpPr>
-        <p:cNvPr id="1" name="">
-          <a:extLst>
-            <a:ext uri="{FF2B5EF4-FFF2-40B4-BE49-F238E27FC236}">
-              <a16:creationId xmlns:a16="http://schemas.microsoft.com/office/drawing/2014/main" id="{0C7F1709-70D9-7011-5D92-F7E57F5604D0}"/>
-            </a:ext>
-          </a:extLst>
-        </p:cNvPr>
-        <p:cNvGrpSpPr/>
-        <p:nvPr/>
-      </p:nvGrpSpPr>
-      <p:grpSpPr>
-        <a:xfrm>
-          <a:off x="0" y="0"/>
-          <a:ext cx="0" cy="0"/>
-          <a:chOff x="0" y="0"/>
-          <a:chExt cx="0" cy="0"/>
-        </a:xfrm>
-      </p:grpSpPr>
-      <p:sp>
-        <p:nvSpPr>
-          <p:cNvPr id="3" name="Subtitle 2">
-            <a:extLst>
-              <a:ext uri="{FF2B5EF4-FFF2-40B4-BE49-F238E27FC236}">
-                <a16:creationId xmlns:a16="http://schemas.microsoft.com/office/drawing/2014/main" id="{C25DBF04-8174-1226-1E95-AC7FB0F1B0E0}"/>
-              </a:ext>
-            </a:extLst>
-          </p:cNvPr>
-          <p:cNvSpPr>
-            <a:spLocks noGrp="1"/>
-          </p:cNvSpPr>
-          <p:nvPr>
-            <p:ph type="subTitle" idx="1"/>
-          </p:nvPr>
-        </p:nvSpPr>
-        <p:spPr>
-          <a:xfrm>
-            <a:off x="84221" y="159488"/>
-            <a:ext cx="8964086" cy="6485861"/>
-          </a:xfrm>
-        </p:spPr>
-        <p:txBody>
-          <a:bodyPr>
-            <a:noAutofit/>
-          </a:bodyPr>
-          <a:lstStyle/>
-          <a:p>
-            <a:pPr algn="l"/>
-            <a:r>
-              <a:rPr lang="en-US" sz="7200" dirty="0">
-                <a:solidFill>
-                  <a:schemeClr val="bg1"/>
-                </a:solidFill>
-                <a:latin typeface="Avenir Medium" panose="02000503020000020003" pitchFamily="2" charset="0"/>
-                <a:ea typeface="Bodoni Ornaments" pitchFamily="2" charset="0"/>
-              </a:rPr>
-              <a:t>Holy Forever</a:t>
-            </a:r>
-          </a:p>
-        </p:txBody>
-      </p:sp>
-    </p:spTree>
-    <p:extLst>
-      <p:ext uri="{BB962C8B-B14F-4D97-AF65-F5344CB8AC3E}">
-        <p14:creationId xmlns:p14="http://schemas.microsoft.com/office/powerpoint/2010/main" val="3164163406"/>
-      </p:ext>
-    </p:extLst>
-  </p:cSld>
-  <p:clrMapOvr>
-    <a:masterClrMapping/>
-  </p:clrMapOvr>
-</p:sld>
-</file>
-
-<file path=ppt/slides/slide3.xml><?xml version="1.0" encoding="utf-8"?>
-<p:sld xmlns:a="http://schemas.openxmlformats.org/drawingml/2006/main" xmlns:r="http://schemas.openxmlformats.org/officeDocument/2006/relationships" xmlns:p="http://schemas.openxmlformats.org/presentationml/2006/main">
-  <p:cSld>
-    <p:bg>
-      <p:bgPr>
-        <a:solidFill>
-          <a:schemeClr val="tx1"/>
-        </a:solidFill>
-        <a:effectLst/>
-      </p:bgPr>
-    </p:bg>
-    <p:spTree>
-      <p:nvGrpSpPr>
-        <p:cNvPr id="1" name="">
-          <a:extLst>
-            <a:ext uri="{FF2B5EF4-FFF2-40B4-BE49-F238E27FC236}">
-              <a16:creationId xmlns:a16="http://schemas.microsoft.com/office/drawing/2014/main" id="{065384FE-5B61-896B-8EC0-010050A299D1}"/>
-            </a:ext>
-          </a:extLst>
-        </p:cNvPr>
-        <p:cNvGrpSpPr/>
-        <p:nvPr/>
-      </p:nvGrpSpPr>
-      <p:grpSpPr>
-        <a:xfrm>
-          <a:off x="0" y="0"/>
-          <a:ext cx="0" cy="0"/>
-          <a:chOff x="0" y="0"/>
-          <a:chExt cx="0" cy="0"/>
-        </a:xfrm>
-      </p:grpSpPr>
-      <p:sp>
-        <p:nvSpPr>
-          <p:cNvPr id="3" name="Subtitle 2">
-            <a:extLst>
-              <a:ext uri="{FF2B5EF4-FFF2-40B4-BE49-F238E27FC236}">
-                <a16:creationId xmlns:a16="http://schemas.microsoft.com/office/drawing/2014/main" id="{04F408B4-DABE-FDF3-0507-47C81F6EC961}"/>
-              </a:ext>
-            </a:extLst>
-          </p:cNvPr>
-          <p:cNvSpPr>
-            <a:spLocks noGrp="1"/>
-          </p:cNvSpPr>
-          <p:nvPr>
-            <p:ph type="subTitle" idx="1"/>
-          </p:nvPr>
-        </p:nvSpPr>
-        <p:spPr>
-          <a:xfrm>
-            <a:off x="84221" y="159488"/>
-            <a:ext cx="8964086" cy="6485861"/>
-          </a:xfrm>
-        </p:spPr>
-        <p:txBody>
-          <a:bodyPr>
-            <a:noAutofit/>
-          </a:bodyPr>
-          <a:lstStyle/>
-          <a:p>
-            <a:r>
-              <a:rPr lang="en-US" sz="4400" dirty="0">
-                <a:solidFill>
-                  <a:schemeClr val="bg1"/>
-                </a:solidFill>
-                <a:latin typeface="Avenir Medium" panose="02000503020000020003" pitchFamily="2" charset="0"/>
-                <a:ea typeface="Bodoni Ornaments" pitchFamily="2" charset="0"/>
-              </a:rPr>
-              <a:t>  </a:t>
-            </a:r>
-          </a:p>
-          <a:p>
-            <a:endParaRPr lang="en-US" sz="4400" dirty="0">
-              <a:solidFill>
-                <a:schemeClr val="bg1"/>
-              </a:solidFill>
-              <a:latin typeface="Avenir Medium" panose="02000503020000020003" pitchFamily="2" charset="0"/>
-              <a:ea typeface="Bodoni Ornaments" pitchFamily="2" charset="0"/>
-            </a:endParaRPr>
-          </a:p>
-          <a:p>
-            <a:r>
-              <a:rPr lang="en-US" sz="4400" dirty="0">
-                <a:solidFill>
-                  <a:schemeClr val="bg1"/>
-                </a:solidFill>
-                <a:latin typeface="Avenir Medium" panose="02000503020000020003" pitchFamily="2" charset="0"/>
-                <a:ea typeface="Bodoni Ornaments" pitchFamily="2" charset="0"/>
-              </a:rPr>
-              <a:t>A thousand generations </a:t>
-            </a:r>
-          </a:p>
-          <a:p>
-            <a:r>
-              <a:rPr lang="en-US" sz="4400" dirty="0">
-                <a:solidFill>
-                  <a:schemeClr val="bg1"/>
-                </a:solidFill>
-                <a:latin typeface="Avenir Medium" panose="02000503020000020003" pitchFamily="2" charset="0"/>
-                <a:ea typeface="Bodoni Ornaments" pitchFamily="2" charset="0"/>
-              </a:rPr>
-              <a:t>falling down in worship</a:t>
-            </a:r>
-          </a:p>
-          <a:p>
-            <a:r>
-              <a:rPr lang="en-US" sz="4400" dirty="0">
-                <a:solidFill>
-                  <a:schemeClr val="bg1"/>
-                </a:solidFill>
-                <a:latin typeface="Avenir Medium" panose="02000503020000020003" pitchFamily="2" charset="0"/>
-                <a:ea typeface="Bodoni Ornaments" pitchFamily="2" charset="0"/>
-              </a:rPr>
-              <a:t>To sing the song of ages </a:t>
-            </a:r>
-          </a:p>
-          <a:p>
-            <a:r>
-              <a:rPr lang="en-US" sz="4400" dirty="0">
-                <a:solidFill>
-                  <a:schemeClr val="bg1"/>
-                </a:solidFill>
-                <a:latin typeface="Avenir Medium" panose="02000503020000020003" pitchFamily="2" charset="0"/>
-                <a:ea typeface="Bodoni Ornaments" pitchFamily="2" charset="0"/>
-              </a:rPr>
-              <a:t>to the Lamb</a:t>
-            </a:r>
-          </a:p>
-        </p:txBody>
-      </p:sp>
-    </p:spTree>
-    <p:extLst>
-      <p:ext uri="{BB962C8B-B14F-4D97-AF65-F5344CB8AC3E}">
-        <p14:creationId xmlns:p14="http://schemas.microsoft.com/office/powerpoint/2010/main" val="1882323952"/>
-      </p:ext>
-    </p:extLst>
-  </p:cSld>
-  <p:clrMapOvr>
-    <a:masterClrMapping/>
-  </p:clrMapOvr>
-</p:sld>
-</file>
-
-<file path=ppt/slides/slide4.xml><?xml version="1.0" encoding="utf-8"?>
-<p:sld xmlns:a="http://schemas.openxmlformats.org/drawingml/2006/main" xmlns:r="http://schemas.openxmlformats.org/officeDocument/2006/relationships" xmlns:p="http://schemas.openxmlformats.org/presentationml/2006/main">
-  <p:cSld>
-    <p:bg>
-      <p:bgPr>
-        <a:solidFill>
-          <a:schemeClr val="tx1"/>
-        </a:solidFill>
-        <a:effectLst/>
-      </p:bgPr>
-    </p:bg>
-    <p:spTree>
-      <p:nvGrpSpPr>
-        <p:cNvPr id="1" name="">
-          <a:extLst>
-            <a:ext uri="{FF2B5EF4-FFF2-40B4-BE49-F238E27FC236}">
-              <a16:creationId xmlns:a16="http://schemas.microsoft.com/office/drawing/2014/main" id="{B3AADDD7-57D2-B1D4-1258-836FE4D35F75}"/>
-            </a:ext>
-          </a:extLst>
-        </p:cNvPr>
-        <p:cNvGrpSpPr/>
-        <p:nvPr/>
-      </p:nvGrpSpPr>
-      <p:grpSpPr>
-        <a:xfrm>
-          <a:off x="0" y="0"/>
-          <a:ext cx="0" cy="0"/>
-          <a:chOff x="0" y="0"/>
-          <a:chExt cx="0" cy="0"/>
-        </a:xfrm>
-      </p:grpSpPr>
-      <p:sp>
-        <p:nvSpPr>
-          <p:cNvPr id="3" name="Subtitle 2">
-            <a:extLst>
-              <a:ext uri="{FF2B5EF4-FFF2-40B4-BE49-F238E27FC236}">
-                <a16:creationId xmlns:a16="http://schemas.microsoft.com/office/drawing/2014/main" id="{A279A8AE-78F0-D6F8-6202-3F6FAC65CB09}"/>
-              </a:ext>
-            </a:extLst>
-          </p:cNvPr>
-          <p:cNvSpPr>
-            <a:spLocks noGrp="1"/>
-          </p:cNvSpPr>
-          <p:nvPr>
-            <p:ph type="subTitle" idx="1"/>
-          </p:nvPr>
-        </p:nvSpPr>
-        <p:spPr>
-          <a:xfrm>
-            <a:off x="84221" y="159488"/>
-            <a:ext cx="8964086" cy="6485861"/>
-          </a:xfrm>
-        </p:spPr>
-        <p:txBody>
-          <a:bodyPr>
-            <a:noAutofit/>
-          </a:bodyPr>
-          <a:lstStyle/>
-          <a:p>
-            <a:r>
-              <a:rPr lang="en-US" sz="4400" dirty="0">
-                <a:solidFill>
-                  <a:schemeClr val="bg1"/>
-                </a:solidFill>
-                <a:latin typeface="Avenir Medium" panose="02000503020000020003" pitchFamily="2" charset="0"/>
-                <a:ea typeface="Bodoni Ornaments" pitchFamily="2" charset="0"/>
-              </a:rPr>
-              <a:t>  </a:t>
-            </a:r>
-          </a:p>
-          <a:p>
-            <a:endParaRPr lang="en-US" sz="4400" dirty="0">
-              <a:solidFill>
-                <a:schemeClr val="bg1"/>
-              </a:solidFill>
-              <a:latin typeface="Avenir Medium" panose="02000503020000020003" pitchFamily="2" charset="0"/>
-              <a:ea typeface="Bodoni Ornaments" pitchFamily="2" charset="0"/>
-            </a:endParaRPr>
-          </a:p>
-          <a:p>
-            <a:r>
-              <a:rPr lang="en-US" sz="4400" dirty="0">
-                <a:solidFill>
-                  <a:schemeClr val="bg1"/>
-                </a:solidFill>
-                <a:latin typeface="Avenir Medium" panose="02000503020000020003" pitchFamily="2" charset="0"/>
-                <a:ea typeface="Bodoni Ornaments" pitchFamily="2" charset="0"/>
-              </a:rPr>
-              <a:t>And all who've gone before us </a:t>
-            </a:r>
-          </a:p>
-          <a:p>
-            <a:r>
-              <a:rPr lang="en-US" sz="4400" dirty="0">
-                <a:solidFill>
-                  <a:schemeClr val="bg1"/>
-                </a:solidFill>
-                <a:latin typeface="Avenir Medium" panose="02000503020000020003" pitchFamily="2" charset="0"/>
-                <a:ea typeface="Bodoni Ornaments" pitchFamily="2" charset="0"/>
-              </a:rPr>
-              <a:t>and all who will believe</a:t>
-            </a:r>
-          </a:p>
-          <a:p>
-            <a:r>
-              <a:rPr lang="en-US" sz="4400" dirty="0">
-                <a:solidFill>
-                  <a:schemeClr val="bg1"/>
-                </a:solidFill>
-                <a:latin typeface="Avenir Medium" panose="02000503020000020003" pitchFamily="2" charset="0"/>
-                <a:ea typeface="Bodoni Ornaments" pitchFamily="2" charset="0"/>
-              </a:rPr>
-              <a:t>Will sing the song of ages </a:t>
-            </a:r>
-          </a:p>
-          <a:p>
-            <a:r>
-              <a:rPr lang="en-US" sz="4400" dirty="0">
-                <a:solidFill>
-                  <a:schemeClr val="bg1"/>
-                </a:solidFill>
-                <a:latin typeface="Avenir Medium" panose="02000503020000020003" pitchFamily="2" charset="0"/>
-                <a:ea typeface="Bodoni Ornaments" pitchFamily="2" charset="0"/>
-              </a:rPr>
-              <a:t>to the Lamb</a:t>
-            </a:r>
-          </a:p>
-        </p:txBody>
-      </p:sp>
-    </p:spTree>
-    <p:extLst>
-      <p:ext uri="{BB962C8B-B14F-4D97-AF65-F5344CB8AC3E}">
-        <p14:creationId xmlns:p14="http://schemas.microsoft.com/office/powerpoint/2010/main" val="1123141326"/>
-      </p:ext>
-    </p:extLst>
-  </p:cSld>
-  <p:clrMapOvr>
-    <a:masterClrMapping/>
-  </p:clrMapOvr>
-</p:sld>
-</file>
-
-<file path=ppt/slides/slide5.xml><?xml version="1.0" encoding="utf-8"?>
-<p:sld xmlns:a="http://schemas.openxmlformats.org/drawingml/2006/main" xmlns:r="http://schemas.openxmlformats.org/officeDocument/2006/relationships" xmlns:p="http://schemas.openxmlformats.org/presentationml/2006/main">
-  <p:cSld>
-    <p:bg>
-      <p:bgPr>
-        <a:solidFill>
-          <a:schemeClr val="tx1"/>
-        </a:solidFill>
-        <a:effectLst/>
-      </p:bgPr>
-    </p:bg>
-    <p:spTree>
-      <p:nvGrpSpPr>
-        <p:cNvPr id="1" name="">
-          <a:extLst>
-            <a:ext uri="{FF2B5EF4-FFF2-40B4-BE49-F238E27FC236}">
-              <a16:creationId xmlns:a16="http://schemas.microsoft.com/office/drawing/2014/main" id="{1968B144-2502-C8D6-B70F-58B7B0905A68}"/>
-            </a:ext>
-          </a:extLst>
-        </p:cNvPr>
-        <p:cNvGrpSpPr/>
-        <p:nvPr/>
-      </p:nvGrpSpPr>
-      <p:grpSpPr>
-        <a:xfrm>
-          <a:off x="0" y="0"/>
-          <a:ext cx="0" cy="0"/>
-          <a:chOff x="0" y="0"/>
-          <a:chExt cx="0" cy="0"/>
-        </a:xfrm>
-      </p:grpSpPr>
-      <p:sp>
-        <p:nvSpPr>
-          <p:cNvPr id="3" name="Subtitle 2">
-            <a:extLst>
-              <a:ext uri="{FF2B5EF4-FFF2-40B4-BE49-F238E27FC236}">
-                <a16:creationId xmlns:a16="http://schemas.microsoft.com/office/drawing/2014/main" id="{204984C5-02C7-13A0-BE52-02F7D3A1514B}"/>
-              </a:ext>
-            </a:extLst>
-          </p:cNvPr>
-          <p:cNvSpPr>
-            <a:spLocks noGrp="1"/>
-          </p:cNvSpPr>
-          <p:nvPr>
-            <p:ph type="subTitle" idx="1"/>
-          </p:nvPr>
-        </p:nvSpPr>
-        <p:spPr>
-          <a:xfrm>
-            <a:off x="84221" y="116958"/>
-            <a:ext cx="8891337" cy="6602819"/>
-          </a:xfrm>
-        </p:spPr>
-        <p:txBody>
-          <a:bodyPr>
-            <a:noAutofit/>
-          </a:bodyPr>
-          <a:lstStyle/>
-          <a:p>
-            <a:endParaRPr lang="en-US" sz="4400" dirty="0">
-              <a:solidFill>
-                <a:schemeClr val="bg1"/>
-              </a:solidFill>
-              <a:latin typeface="Avenir Medium" panose="02000503020000020003" pitchFamily="2" charset="0"/>
-              <a:ea typeface="Bodoni Ornaments" pitchFamily="2" charset="0"/>
-            </a:endParaRPr>
-          </a:p>
-          <a:p>
-            <a:endParaRPr lang="en-US" sz="4400" dirty="0">
-              <a:solidFill>
-                <a:schemeClr val="bg1"/>
-              </a:solidFill>
-              <a:latin typeface="Avenir Medium" panose="02000503020000020003" pitchFamily="2" charset="0"/>
-              <a:ea typeface="Bodoni Ornaments" pitchFamily="2" charset="0"/>
-            </a:endParaRPr>
-          </a:p>
-          <a:p>
-            <a:r>
-              <a:rPr lang="en-US" sz="4400" dirty="0">
-                <a:solidFill>
-                  <a:schemeClr val="bg1"/>
-                </a:solidFill>
-                <a:latin typeface="Avenir Medium" panose="02000503020000020003" pitchFamily="2" charset="0"/>
-                <a:ea typeface="Bodoni Ornaments" pitchFamily="2" charset="0"/>
-              </a:rPr>
-              <a:t>Your name is the highest</a:t>
-            </a:r>
-          </a:p>
-          <a:p>
-            <a:r>
-              <a:rPr lang="en-US" sz="4400" dirty="0">
-                <a:solidFill>
-                  <a:schemeClr val="bg1"/>
-                </a:solidFill>
-                <a:latin typeface="Avenir Medium" panose="02000503020000020003" pitchFamily="2" charset="0"/>
-                <a:ea typeface="Bodoni Ornaments" pitchFamily="2" charset="0"/>
-              </a:rPr>
-              <a:t>Your name is the greatest</a:t>
-            </a:r>
-          </a:p>
-          <a:p>
-            <a:r>
-              <a:rPr lang="en-US" sz="4400" dirty="0">
-                <a:solidFill>
-                  <a:schemeClr val="bg1"/>
-                </a:solidFill>
-                <a:latin typeface="Avenir Medium" panose="02000503020000020003" pitchFamily="2" charset="0"/>
-                <a:ea typeface="Bodoni Ornaments" pitchFamily="2" charset="0"/>
-              </a:rPr>
-              <a:t>Your name stands above them all</a:t>
-            </a:r>
-          </a:p>
-          <a:p>
-            <a:r>
-              <a:rPr lang="en-US" sz="4400" dirty="0">
-                <a:solidFill>
-                  <a:schemeClr val="bg1"/>
-                </a:solidFill>
-                <a:latin typeface="Avenir Medium" panose="02000503020000020003" pitchFamily="2" charset="0"/>
-                <a:ea typeface="Bodoni Ornaments" pitchFamily="2" charset="0"/>
-              </a:rPr>
-              <a:t> </a:t>
-            </a:r>
-          </a:p>
-        </p:txBody>
-      </p:sp>
-    </p:spTree>
-    <p:extLst>
-      <p:ext uri="{BB962C8B-B14F-4D97-AF65-F5344CB8AC3E}">
-        <p14:creationId xmlns:p14="http://schemas.microsoft.com/office/powerpoint/2010/main" val="1323221337"/>
-      </p:ext>
-    </p:extLst>
-  </p:cSld>
-  <p:clrMapOvr>
-    <a:masterClrMapping/>
-  </p:clrMapOvr>
-</p:sld>
-</file>
-
-<file path=ppt/slides/slide6.xml><?xml version="1.0" encoding="utf-8"?>
-<p:sld xmlns:a="http://schemas.openxmlformats.org/drawingml/2006/main" xmlns:r="http://schemas.openxmlformats.org/officeDocument/2006/relationships" xmlns:p="http://schemas.openxmlformats.org/presentationml/2006/main">
-  <p:cSld>
-    <p:bg>
-      <p:bgPr>
-        <a:solidFill>
-          <a:schemeClr val="tx1"/>
-        </a:solidFill>
-        <a:effectLst/>
-      </p:bgPr>
-    </p:bg>
-    <p:spTree>
-      <p:nvGrpSpPr>
-        <p:cNvPr id="1" name="">
-          <a:extLst>
-            <a:ext uri="{FF2B5EF4-FFF2-40B4-BE49-F238E27FC236}">
-              <a16:creationId xmlns:a16="http://schemas.microsoft.com/office/drawing/2014/main" id="{93BC0E4B-EF7E-96A0-25C8-1E8A65D6CC7A}"/>
-            </a:ext>
-          </a:extLst>
-        </p:cNvPr>
-        <p:cNvGrpSpPr/>
-        <p:nvPr/>
-      </p:nvGrpSpPr>
-      <p:grpSpPr>
-        <a:xfrm>
-          <a:off x="0" y="0"/>
-          <a:ext cx="0" cy="0"/>
-          <a:chOff x="0" y="0"/>
-          <a:chExt cx="0" cy="0"/>
-        </a:xfrm>
-      </p:grpSpPr>
-      <p:sp>
-        <p:nvSpPr>
-          <p:cNvPr id="3" name="Subtitle 2">
-            <a:extLst>
-              <a:ext uri="{FF2B5EF4-FFF2-40B4-BE49-F238E27FC236}">
-                <a16:creationId xmlns:a16="http://schemas.microsoft.com/office/drawing/2014/main" id="{3A686E00-20B6-BF05-EE16-16E46A809120}"/>
-              </a:ext>
-            </a:extLst>
-          </p:cNvPr>
-          <p:cNvSpPr>
-            <a:spLocks noGrp="1"/>
-          </p:cNvSpPr>
-          <p:nvPr>
-            <p:ph type="subTitle" idx="1"/>
-          </p:nvPr>
-        </p:nvSpPr>
-        <p:spPr>
-          <a:xfrm>
-            <a:off x="84221" y="116958"/>
-            <a:ext cx="8891337" cy="6602819"/>
-          </a:xfrm>
-        </p:spPr>
-        <p:txBody>
-          <a:bodyPr>
-            <a:noAutofit/>
-          </a:bodyPr>
-          <a:lstStyle/>
-          <a:p>
-            <a:endParaRPr lang="en-US" sz="4400" dirty="0">
-              <a:solidFill>
-                <a:schemeClr val="bg1"/>
-              </a:solidFill>
-              <a:latin typeface="Avenir Medium" panose="02000503020000020003" pitchFamily="2" charset="0"/>
-              <a:ea typeface="Bodoni Ornaments" pitchFamily="2" charset="0"/>
-            </a:endParaRPr>
-          </a:p>
-          <a:p>
-            <a:endParaRPr lang="en-US" sz="4400" dirty="0">
-              <a:solidFill>
-                <a:schemeClr val="bg1"/>
-              </a:solidFill>
-              <a:latin typeface="Avenir Medium" panose="02000503020000020003" pitchFamily="2" charset="0"/>
-              <a:ea typeface="Bodoni Ornaments" pitchFamily="2" charset="0"/>
-            </a:endParaRPr>
-          </a:p>
-          <a:p>
-            <a:r>
-              <a:rPr lang="en-US" sz="4400" dirty="0">
-                <a:solidFill>
-                  <a:schemeClr val="bg1"/>
-                </a:solidFill>
-                <a:latin typeface="Avenir Medium" panose="02000503020000020003" pitchFamily="2" charset="0"/>
-                <a:ea typeface="Bodoni Ornaments" pitchFamily="2" charset="0"/>
-              </a:rPr>
-              <a:t>All thrones and dominions</a:t>
-            </a:r>
-          </a:p>
-          <a:p>
-            <a:r>
-              <a:rPr lang="en-US" sz="4400" dirty="0">
-                <a:solidFill>
-                  <a:schemeClr val="bg1"/>
-                </a:solidFill>
-                <a:latin typeface="Avenir Medium" panose="02000503020000020003" pitchFamily="2" charset="0"/>
-                <a:ea typeface="Bodoni Ornaments" pitchFamily="2" charset="0"/>
-              </a:rPr>
-              <a:t>All powers and positions</a:t>
-            </a:r>
-          </a:p>
-          <a:p>
-            <a:r>
-              <a:rPr lang="en-US" sz="4400" dirty="0">
-                <a:solidFill>
-                  <a:schemeClr val="bg1"/>
-                </a:solidFill>
-                <a:latin typeface="Avenir Medium" panose="02000503020000020003" pitchFamily="2" charset="0"/>
-                <a:ea typeface="Bodoni Ornaments" pitchFamily="2" charset="0"/>
-              </a:rPr>
-              <a:t>Your name stands above them all</a:t>
-            </a:r>
-          </a:p>
-          <a:p>
-            <a:r>
-              <a:rPr lang="en-US" sz="4400" dirty="0">
-                <a:solidFill>
-                  <a:schemeClr val="bg1"/>
-                </a:solidFill>
-                <a:latin typeface="Avenir Medium" panose="02000503020000020003" pitchFamily="2" charset="0"/>
-                <a:ea typeface="Bodoni Ornaments" pitchFamily="2" charset="0"/>
-              </a:rPr>
-              <a:t> </a:t>
-            </a:r>
-          </a:p>
-        </p:txBody>
-      </p:sp>
-    </p:spTree>
-    <p:extLst>
-      <p:ext uri="{BB962C8B-B14F-4D97-AF65-F5344CB8AC3E}">
-        <p14:creationId xmlns:p14="http://schemas.microsoft.com/office/powerpoint/2010/main" val="124969372"/>
-      </p:ext>
-    </p:extLst>
-  </p:cSld>
-  <p:clrMapOvr>
-    <a:masterClrMapping/>
-  </p:clrMapOvr>
-</p:sld>
-</file>
-
-<file path=ppt/slides/slide7.xml><?xml version="1.0" encoding="utf-8"?>
-<p:sld xmlns:a="http://schemas.openxmlformats.org/drawingml/2006/main" xmlns:r="http://schemas.openxmlformats.org/officeDocument/2006/relationships" xmlns:p="http://schemas.openxmlformats.org/presentationml/2006/main">
-  <p:cSld>
-    <p:bg>
-      <p:bgPr>
-        <a:solidFill>
-          <a:schemeClr val="tx1"/>
-        </a:solidFill>
-        <a:effectLst/>
-      </p:bgPr>
-    </p:bg>
-    <p:spTree>
-      <p:nvGrpSpPr>
-        <p:cNvPr id="1" name="">
-          <a:extLst>
-            <a:ext uri="{FF2B5EF4-FFF2-40B4-BE49-F238E27FC236}">
-              <a16:creationId xmlns:a16="http://schemas.microsoft.com/office/drawing/2014/main" id="{105C7419-E011-28A7-9A00-12DEA80269EF}"/>
-            </a:ext>
-          </a:extLst>
-        </p:cNvPr>
-        <p:cNvGrpSpPr/>
-        <p:nvPr/>
-      </p:nvGrpSpPr>
-      <p:grpSpPr>
-        <a:xfrm>
-          <a:off x="0" y="0"/>
-          <a:ext cx="0" cy="0"/>
-          <a:chOff x="0" y="0"/>
-          <a:chExt cx="0" cy="0"/>
-        </a:xfrm>
-      </p:grpSpPr>
-      <p:sp>
-        <p:nvSpPr>
-          <p:cNvPr id="3" name="Subtitle 2">
-            <a:extLst>
-              <a:ext uri="{FF2B5EF4-FFF2-40B4-BE49-F238E27FC236}">
-                <a16:creationId xmlns:a16="http://schemas.microsoft.com/office/drawing/2014/main" id="{76DA5D01-CA66-E4A3-D9BB-F19A657F5172}"/>
-              </a:ext>
-            </a:extLst>
-          </p:cNvPr>
-          <p:cNvSpPr>
-            <a:spLocks noGrp="1"/>
-          </p:cNvSpPr>
-          <p:nvPr>
-            <p:ph type="subTitle" idx="1"/>
-          </p:nvPr>
-        </p:nvSpPr>
-        <p:spPr>
-          <a:xfrm>
-            <a:off x="144379" y="207818"/>
-            <a:ext cx="8903369" cy="6386945"/>
-          </a:xfrm>
-        </p:spPr>
-        <p:txBody>
-          <a:bodyPr>
-            <a:noAutofit/>
-          </a:bodyPr>
-          <a:lstStyle/>
-          <a:p>
-            <a:r>
-              <a:rPr lang="en-US" sz="4400" dirty="0">
-                <a:solidFill>
-                  <a:schemeClr val="bg1"/>
-                </a:solidFill>
-                <a:latin typeface="Avenir Medium" panose="02000503020000020003" pitchFamily="2" charset="0"/>
-                <a:ea typeface="Bodoni Ornaments" pitchFamily="2" charset="0"/>
-              </a:rPr>
-              <a:t> </a:t>
-            </a:r>
-          </a:p>
-          <a:p>
-            <a:endParaRPr lang="en-US" sz="4400" dirty="0">
-              <a:solidFill>
-                <a:schemeClr val="bg1"/>
-              </a:solidFill>
-              <a:latin typeface="Avenir Medium" panose="02000503020000020003" pitchFamily="2" charset="0"/>
-              <a:ea typeface="Bodoni Ornaments" pitchFamily="2" charset="0"/>
-            </a:endParaRPr>
-          </a:p>
-          <a:p>
-            <a:r>
-              <a:rPr lang="en-US" sz="4400" dirty="0">
-                <a:solidFill>
-                  <a:schemeClr val="bg1"/>
-                </a:solidFill>
-                <a:latin typeface="Avenir Medium" panose="02000503020000020003" pitchFamily="2" charset="0"/>
-                <a:ea typeface="Bodoni Ornaments" pitchFamily="2" charset="0"/>
-              </a:rPr>
-              <a:t>And the angels cry "Holy"</a:t>
-            </a:r>
-          </a:p>
-          <a:p>
-            <a:r>
-              <a:rPr lang="en-US" sz="4400" dirty="0">
-                <a:solidFill>
-                  <a:schemeClr val="bg1"/>
-                </a:solidFill>
-                <a:latin typeface="Avenir Medium" panose="02000503020000020003" pitchFamily="2" charset="0"/>
-                <a:ea typeface="Bodoni Ornaments" pitchFamily="2" charset="0"/>
-              </a:rPr>
-              <a:t>All creation cries "Holy"</a:t>
-            </a:r>
-          </a:p>
-          <a:p>
-            <a:r>
-              <a:rPr lang="en-US" sz="4400" dirty="0">
-                <a:solidFill>
-                  <a:schemeClr val="bg1"/>
-                </a:solidFill>
-                <a:latin typeface="Avenir Medium" panose="02000503020000020003" pitchFamily="2" charset="0"/>
-                <a:ea typeface="Bodoni Ornaments" pitchFamily="2" charset="0"/>
-              </a:rPr>
-              <a:t>You are lifted high, holy</a:t>
-            </a:r>
-          </a:p>
-          <a:p>
-            <a:r>
-              <a:rPr lang="en-US" sz="4400" dirty="0">
-                <a:solidFill>
-                  <a:schemeClr val="bg1"/>
-                </a:solidFill>
-                <a:latin typeface="Avenir Medium" panose="02000503020000020003" pitchFamily="2" charset="0"/>
-                <a:ea typeface="Bodoni Ornaments" pitchFamily="2" charset="0"/>
-              </a:rPr>
-              <a:t>Holy forever</a:t>
-            </a:r>
-          </a:p>
-        </p:txBody>
-      </p:sp>
-    </p:spTree>
-    <p:extLst>
-      <p:ext uri="{BB962C8B-B14F-4D97-AF65-F5344CB8AC3E}">
-        <p14:creationId xmlns:p14="http://schemas.microsoft.com/office/powerpoint/2010/main" val="4254184139"/>
-      </p:ext>
-    </p:extLst>
-  </p:cSld>
-  <p:clrMapOvr>
-    <a:masterClrMapping/>
-  </p:clrMapOvr>
-</p:sld>
-</file>
-
-<file path=ppt/slides/slide8.xml><?xml version="1.0" encoding="utf-8"?>
-<p:sld xmlns:a="http://schemas.openxmlformats.org/drawingml/2006/main" xmlns:r="http://schemas.openxmlformats.org/officeDocument/2006/relationships" xmlns:p="http://schemas.openxmlformats.org/presentationml/2006/main">
-  <p:cSld>
-    <p:bg>
-      <p:bgPr>
-        <a:solidFill>
-          <a:schemeClr val="tx1"/>
-        </a:solidFill>
-        <a:effectLst/>
-      </p:bgPr>
-    </p:bg>
-    <p:spTree>
-      <p:nvGrpSpPr>
-        <p:cNvPr id="1" name="">
-          <a:extLst>
-            <a:ext uri="{FF2B5EF4-FFF2-40B4-BE49-F238E27FC236}">
-              <a16:creationId xmlns:a16="http://schemas.microsoft.com/office/drawing/2014/main" id="{1F68937F-1B0B-D60E-8A2F-8779586E2582}"/>
-            </a:ext>
-          </a:extLst>
-        </p:cNvPr>
-        <p:cNvGrpSpPr/>
-        <p:nvPr/>
-      </p:nvGrpSpPr>
-      <p:grpSpPr>
-        <a:xfrm>
-          <a:off x="0" y="0"/>
-          <a:ext cx="0" cy="0"/>
-          <a:chOff x="0" y="0"/>
-          <a:chExt cx="0" cy="0"/>
-        </a:xfrm>
-      </p:grpSpPr>
-      <p:sp>
-        <p:nvSpPr>
-          <p:cNvPr id="3" name="Subtitle 2">
-            <a:extLst>
-              <a:ext uri="{FF2B5EF4-FFF2-40B4-BE49-F238E27FC236}">
-                <a16:creationId xmlns:a16="http://schemas.microsoft.com/office/drawing/2014/main" id="{56EA6FD0-A174-4866-B88D-F0BE10171AD4}"/>
-              </a:ext>
-            </a:extLst>
-          </p:cNvPr>
-          <p:cNvSpPr>
-            <a:spLocks noGrp="1"/>
-          </p:cNvSpPr>
-          <p:nvPr>
-            <p:ph type="subTitle" idx="1"/>
-          </p:nvPr>
-        </p:nvSpPr>
-        <p:spPr>
-          <a:xfrm>
-            <a:off x="84221" y="207818"/>
-            <a:ext cx="8891337" cy="6373091"/>
-          </a:xfrm>
-        </p:spPr>
-        <p:txBody>
-          <a:bodyPr>
-            <a:noAutofit/>
-          </a:bodyPr>
-          <a:lstStyle/>
-          <a:p>
-            <a:endParaRPr lang="en-US" sz="4400" dirty="0">
-              <a:solidFill>
-                <a:schemeClr val="bg1"/>
-              </a:solidFill>
-              <a:latin typeface="Avenir Medium" panose="02000503020000020003" pitchFamily="2" charset="0"/>
-              <a:ea typeface="Bodoni Ornaments" pitchFamily="2" charset="0"/>
-            </a:endParaRPr>
-          </a:p>
-          <a:p>
-            <a:endParaRPr lang="en-US" sz="4400" dirty="0">
-              <a:solidFill>
-                <a:schemeClr val="bg1"/>
-              </a:solidFill>
-              <a:latin typeface="Avenir Medium" panose="02000503020000020003" pitchFamily="2" charset="0"/>
-              <a:ea typeface="Bodoni Ornaments" pitchFamily="2" charset="0"/>
-            </a:endParaRPr>
-          </a:p>
-          <a:p>
-            <a:r>
-              <a:rPr lang="en-US" sz="4400" dirty="0">
-                <a:solidFill>
-                  <a:schemeClr val="bg1"/>
-                </a:solidFill>
-                <a:latin typeface="Avenir Medium" panose="02000503020000020003" pitchFamily="2" charset="0"/>
-                <a:ea typeface="Bodoni Ornaments" pitchFamily="2" charset="0"/>
-              </a:rPr>
-              <a:t>If you've been forgiven </a:t>
-            </a:r>
-          </a:p>
-          <a:p>
-            <a:r>
-              <a:rPr lang="en-US" sz="4400" dirty="0">
-                <a:solidFill>
-                  <a:schemeClr val="bg1"/>
-                </a:solidFill>
-                <a:latin typeface="Avenir Medium" panose="02000503020000020003" pitchFamily="2" charset="0"/>
-                <a:ea typeface="Bodoni Ornaments" pitchFamily="2" charset="0"/>
-              </a:rPr>
-              <a:t>and if you've been redeemed</a:t>
-            </a:r>
-          </a:p>
-          <a:p>
-            <a:r>
-              <a:rPr lang="en-US" sz="4400" dirty="0">
-                <a:solidFill>
-                  <a:schemeClr val="bg1"/>
-                </a:solidFill>
-                <a:latin typeface="Avenir Medium" panose="02000503020000020003" pitchFamily="2" charset="0"/>
-                <a:ea typeface="Bodoni Ornaments" pitchFamily="2" charset="0"/>
-              </a:rPr>
-              <a:t>Sing the song forever to the Lamb</a:t>
-            </a:r>
-          </a:p>
-        </p:txBody>
-      </p:sp>
-    </p:spTree>
-    <p:extLst>
-      <p:ext uri="{BB962C8B-B14F-4D97-AF65-F5344CB8AC3E}">
-        <p14:creationId xmlns:p14="http://schemas.microsoft.com/office/powerpoint/2010/main" val="1413920667"/>
-      </p:ext>
-    </p:extLst>
-  </p:cSld>
-  <p:clrMapOvr>
-    <a:masterClrMapping/>
-  </p:clrMapOvr>
-</p:sld>
-</file>
-
-<file path=ppt/slides/slide9.xml><?xml version="1.0" encoding="utf-8"?>
-<p:sld xmlns:a="http://schemas.openxmlformats.org/drawingml/2006/main" xmlns:r="http://schemas.openxmlformats.org/officeDocument/2006/relationships" xmlns:p="http://schemas.openxmlformats.org/presentationml/2006/main">
-  <p:cSld>
-    <p:bg>
-      <p:bgPr>
-        <a:solidFill>
-          <a:schemeClr val="tx1"/>
-        </a:solidFill>
-        <a:effectLst/>
-      </p:bgPr>
-    </p:bg>
-    <p:spTree>
-      <p:nvGrpSpPr>
-        <p:cNvPr id="1" name="">
-          <a:extLst>
-            <a:ext uri="{FF2B5EF4-FFF2-40B4-BE49-F238E27FC236}">
-              <a16:creationId xmlns:a16="http://schemas.microsoft.com/office/drawing/2014/main" id="{04162A7D-98CC-40A0-1098-723B4393BE60}"/>
-            </a:ext>
-          </a:extLst>
-        </p:cNvPr>
-        <p:cNvGrpSpPr/>
-        <p:nvPr/>
-      </p:nvGrpSpPr>
-      <p:grpSpPr>
-        <a:xfrm>
-          <a:off x="0" y="0"/>
-          <a:ext cx="0" cy="0"/>
-          <a:chOff x="0" y="0"/>
-          <a:chExt cx="0" cy="0"/>
-        </a:xfrm>
-      </p:grpSpPr>
-      <p:sp>
-        <p:nvSpPr>
-          <p:cNvPr id="3" name="Subtitle 2">
-            <a:extLst>
-              <a:ext uri="{FF2B5EF4-FFF2-40B4-BE49-F238E27FC236}">
-                <a16:creationId xmlns:a16="http://schemas.microsoft.com/office/drawing/2014/main" id="{9C0F5C40-B05A-418B-371B-12542CFEA7E3}"/>
-              </a:ext>
-            </a:extLst>
-          </p:cNvPr>
-          <p:cNvSpPr>
-            <a:spLocks noGrp="1"/>
-          </p:cNvSpPr>
-          <p:nvPr>
-            <p:ph type="subTitle" idx="1"/>
-          </p:nvPr>
-        </p:nvSpPr>
-        <p:spPr>
-          <a:xfrm>
-            <a:off x="84221" y="207818"/>
-            <a:ext cx="8891337" cy="6373091"/>
-          </a:xfrm>
-        </p:spPr>
-        <p:txBody>
-          <a:bodyPr>
-            <a:noAutofit/>
-          </a:bodyPr>
-          <a:lstStyle/>
-          <a:p>
-            <a:endParaRPr lang="en-US" sz="4400" dirty="0">
-              <a:solidFill>
-                <a:schemeClr val="bg1"/>
-              </a:solidFill>
-              <a:latin typeface="Avenir Medium" panose="02000503020000020003" pitchFamily="2" charset="0"/>
-              <a:ea typeface="Bodoni Ornaments" pitchFamily="2" charset="0"/>
-            </a:endParaRPr>
-          </a:p>
-          <a:p>
-            <a:r>
-              <a:rPr lang="en-US" sz="4400" dirty="0">
-                <a:solidFill>
-                  <a:schemeClr val="bg1"/>
-                </a:solidFill>
-                <a:latin typeface="Avenir Medium" panose="02000503020000020003" pitchFamily="2" charset="0"/>
-                <a:ea typeface="Bodoni Ornaments" pitchFamily="2" charset="0"/>
-              </a:rPr>
-              <a:t>If you walk in freedom </a:t>
-            </a:r>
-          </a:p>
-          <a:p>
-            <a:r>
-              <a:rPr lang="en-US" sz="4400" dirty="0">
-                <a:solidFill>
-                  <a:schemeClr val="bg1"/>
-                </a:solidFill>
-                <a:latin typeface="Avenir Medium" panose="02000503020000020003" pitchFamily="2" charset="0"/>
-                <a:ea typeface="Bodoni Ornaments" pitchFamily="2" charset="0"/>
-              </a:rPr>
-              <a:t>and if you bear His name</a:t>
-            </a:r>
-          </a:p>
-          <a:p>
-            <a:r>
-              <a:rPr lang="en-US" sz="4400" dirty="0">
-                <a:solidFill>
-                  <a:schemeClr val="bg1"/>
-                </a:solidFill>
-                <a:latin typeface="Avenir Medium" panose="02000503020000020003" pitchFamily="2" charset="0"/>
-                <a:ea typeface="Bodoni Ornaments" pitchFamily="2" charset="0"/>
-              </a:rPr>
-              <a:t>Sing the song forever to the Lamb</a:t>
-            </a:r>
-          </a:p>
-          <a:p>
-            <a:endParaRPr lang="en-US" sz="4400" dirty="0">
-              <a:solidFill>
-                <a:schemeClr val="bg1"/>
-              </a:solidFill>
-              <a:latin typeface="Avenir Medium" panose="02000503020000020003" pitchFamily="2" charset="0"/>
-              <a:ea typeface="Bodoni Ornaments" pitchFamily="2" charset="0"/>
-            </a:endParaRPr>
-          </a:p>
-          <a:p>
-            <a:r>
-              <a:rPr lang="en-US" sz="4400" dirty="0">
-                <a:solidFill>
-                  <a:schemeClr val="bg1"/>
-                </a:solidFill>
-                <a:latin typeface="Avenir Medium" panose="02000503020000020003" pitchFamily="2" charset="0"/>
-                <a:ea typeface="Bodoni Ornaments" pitchFamily="2" charset="0"/>
-              </a:rPr>
-              <a:t>We'll sing the song forever </a:t>
-            </a:r>
-          </a:p>
-          <a:p>
-            <a:r>
-              <a:rPr lang="en-US" sz="4400" dirty="0">
-                <a:solidFill>
-                  <a:schemeClr val="bg1"/>
-                </a:solidFill>
-                <a:latin typeface="Avenir Medium" panose="02000503020000020003" pitchFamily="2" charset="0"/>
-                <a:ea typeface="Bodoni Ornaments" pitchFamily="2" charset="0"/>
-              </a:rPr>
-              <a:t>and amen</a:t>
-            </a:r>
-          </a:p>
-        </p:txBody>
-      </p:sp>
-    </p:spTree>
-    <p:extLst>
-      <p:ext uri="{BB962C8B-B14F-4D97-AF65-F5344CB8AC3E}">
-        <p14:creationId xmlns:p14="http://schemas.microsoft.com/office/powerpoint/2010/main" val="3917643275"/>
       </p:ext>
     </p:extLst>
   </p:cSld>

--- a/Holy Forever.pptx
+++ b/Holy Forever.pptx
@@ -259,7 +259,7 @@
           <a:p>
             <a:fld id="{E759A0DE-F190-5444-87AC-4719D5F20D15}" type="datetimeFigureOut">
               <a:rPr lang="en-US" smtClean="0"/>
-              <a:t>6/13/26</a:t>
+              <a:t>8/22/26</a:t>
             </a:fld>
             <a:endParaRPr lang="en-US"/>
           </a:p>
@@ -429,7 +429,7 @@
           <a:p>
             <a:fld id="{E759A0DE-F190-5444-87AC-4719D5F20D15}" type="datetimeFigureOut">
               <a:rPr lang="en-US" smtClean="0"/>
-              <a:t>6/13/26</a:t>
+              <a:t>8/22/26</a:t>
             </a:fld>
             <a:endParaRPr lang="en-US"/>
           </a:p>
@@ -609,7 +609,7 @@
           <a:p>
             <a:fld id="{E759A0DE-F190-5444-87AC-4719D5F20D15}" type="datetimeFigureOut">
               <a:rPr lang="en-US" smtClean="0"/>
-              <a:t>6/13/26</a:t>
+              <a:t>8/22/26</a:t>
             </a:fld>
             <a:endParaRPr lang="en-US"/>
           </a:p>
@@ -779,7 +779,7 @@
           <a:p>
             <a:fld id="{E759A0DE-F190-5444-87AC-4719D5F20D15}" type="datetimeFigureOut">
               <a:rPr lang="en-US" smtClean="0"/>
-              <a:t>6/13/26</a:t>
+              <a:t>8/22/26</a:t>
             </a:fld>
             <a:endParaRPr lang="en-US"/>
           </a:p>
@@ -1025,7 +1025,7 @@
           <a:p>
             <a:fld id="{E759A0DE-F190-5444-87AC-4719D5F20D15}" type="datetimeFigureOut">
               <a:rPr lang="en-US" smtClean="0"/>
-              <a:t>6/13/26</a:t>
+              <a:t>8/22/26</a:t>
             </a:fld>
             <a:endParaRPr lang="en-US"/>
           </a:p>
@@ -1257,7 +1257,7 @@
           <a:p>
             <a:fld id="{E759A0DE-F190-5444-87AC-4719D5F20D15}" type="datetimeFigureOut">
               <a:rPr lang="en-US" smtClean="0"/>
-              <a:t>6/13/26</a:t>
+              <a:t>8/22/26</a:t>
             </a:fld>
             <a:endParaRPr lang="en-US"/>
           </a:p>
@@ -1624,7 +1624,7 @@
           <a:p>
             <a:fld id="{E759A0DE-F190-5444-87AC-4719D5F20D15}" type="datetimeFigureOut">
               <a:rPr lang="en-US" smtClean="0"/>
-              <a:t>6/13/26</a:t>
+              <a:t>8/22/26</a:t>
             </a:fld>
             <a:endParaRPr lang="en-US"/>
           </a:p>
@@ -1742,7 +1742,7 @@
           <a:p>
             <a:fld id="{E759A0DE-F190-5444-87AC-4719D5F20D15}" type="datetimeFigureOut">
               <a:rPr lang="en-US" smtClean="0"/>
-              <a:t>6/13/26</a:t>
+              <a:t>8/22/26</a:t>
             </a:fld>
             <a:endParaRPr lang="en-US"/>
           </a:p>
@@ -1837,7 +1837,7 @@
           <a:p>
             <a:fld id="{E759A0DE-F190-5444-87AC-4719D5F20D15}" type="datetimeFigureOut">
               <a:rPr lang="en-US" smtClean="0"/>
-              <a:t>6/13/26</a:t>
+              <a:t>8/22/26</a:t>
             </a:fld>
             <a:endParaRPr lang="en-US"/>
           </a:p>
@@ -2114,7 +2114,7 @@
           <a:p>
             <a:fld id="{E759A0DE-F190-5444-87AC-4719D5F20D15}" type="datetimeFigureOut">
               <a:rPr lang="en-US" smtClean="0"/>
-              <a:t>6/13/26</a:t>
+              <a:t>8/22/26</a:t>
             </a:fld>
             <a:endParaRPr lang="en-US"/>
           </a:p>
@@ -2371,7 +2371,7 @@
           <a:p>
             <a:fld id="{E759A0DE-F190-5444-87AC-4719D5F20D15}" type="datetimeFigureOut">
               <a:rPr lang="en-US" smtClean="0"/>
-              <a:t>6/13/26</a:t>
+              <a:t>8/22/26</a:t>
             </a:fld>
             <a:endParaRPr lang="en-US"/>
           </a:p>
@@ -2584,7 +2584,7 @@
           <a:p>
             <a:fld id="{E759A0DE-F190-5444-87AC-4719D5F20D15}" type="datetimeFigureOut">
               <a:rPr lang="en-US" smtClean="0"/>
-              <a:t>6/13/26</a:t>
+              <a:t>8/22/26</a:t>
             </a:fld>
             <a:endParaRPr lang="en-US"/>
           </a:p>
@@ -3045,6 +3045,90 @@
           </a:p>
         </p:txBody>
       </p:sp>
+      <p:sp>
+        <p:nvSpPr>
+          <p:cNvPr id="5" name="TextBox 4">
+            <a:extLst>
+              <a:ext uri="{FF2B5EF4-FFF2-40B4-BE49-F238E27FC236}">
+                <a16:creationId xmlns:a16="http://schemas.microsoft.com/office/drawing/2014/main" id="{BEBAFAE3-CD01-2265-3B87-BE68900C4A0A}"/>
+              </a:ext>
+            </a:extLst>
+          </p:cNvPr>
+          <p:cNvSpPr txBox="1"/>
+          <p:nvPr/>
+        </p:nvSpPr>
+        <p:spPr>
+          <a:xfrm>
+            <a:off x="168442" y="5444311"/>
+            <a:ext cx="8807115" cy="1477328"/>
+          </a:xfrm>
+          <a:prstGeom prst="rect">
+            <a:avLst/>
+          </a:prstGeom>
+          <a:noFill/>
+        </p:spPr>
+        <p:txBody>
+          <a:bodyPr wrap="square" rtlCol="0">
+            <a:spAutoFit/>
+          </a:bodyPr>
+          <a:lstStyle/>
+          <a:p>
+            <a:pPr algn="ctr"/>
+            <a:r>
+              <a:rPr lang="en-US" dirty="0">
+                <a:solidFill>
+                  <a:schemeClr val="bg1"/>
+                </a:solidFill>
+              </a:rPr>
+              <a:t>Words &amp; Music by Chris Tomlin, Phil Wickham, Brian Johnson, </a:t>
+            </a:r>
+          </a:p>
+          <a:p>
+            <a:pPr algn="ctr"/>
+            <a:r>
+              <a:rPr lang="en-US" dirty="0">
+                <a:solidFill>
+                  <a:schemeClr val="bg1"/>
+                </a:solidFill>
+              </a:rPr>
+              <a:t>Jenn Johnson, and Jason Ingram (2022)</a:t>
+            </a:r>
+          </a:p>
+          <a:p>
+            <a:pPr algn="ctr"/>
+            <a:r>
+              <a:rPr lang="en-US" dirty="0">
+                <a:solidFill>
+                  <a:schemeClr val="bg1"/>
+                </a:solidFill>
+              </a:rPr>
+              <a:t>Brian and Jenn Publishing, Capitol CMG Paragon, </a:t>
+            </a:r>
+          </a:p>
+          <a:p>
+            <a:pPr algn="ctr"/>
+            <a:r>
+              <a:rPr lang="en-US" dirty="0">
+                <a:solidFill>
+                  <a:schemeClr val="bg1"/>
+                </a:solidFill>
+              </a:rPr>
+              <a:t>S.D.G. Publishing, Bethel Music Publishing, and Be Essential Songs</a:t>
+            </a:r>
+          </a:p>
+          <a:p>
+            <a:pPr algn="ctr"/>
+            <a:r>
+              <a:rPr lang="en-US" dirty="0">
+                <a:solidFill>
+                  <a:schemeClr val="bg1"/>
+                </a:solidFill>
+              </a:rPr>
+              <a:t>CCLI License #137776</a:t>
+            </a:r>
+          </a:p>
+        </p:txBody>
+      </p:sp>
     </p:spTree>
     <p:extLst>
       <p:ext uri="{BB962C8B-B14F-4D97-AF65-F5344CB8AC3E}">
@@ -4141,45 +4225,6 @@
                 <a:ea typeface="Bodoni Ornaments" pitchFamily="2" charset="0"/>
               </a:rPr>
               <a:t>Holy forever</a:t>
-            </a:r>
-          </a:p>
-        </p:txBody>
-      </p:sp>
-      <p:sp>
-        <p:nvSpPr>
-          <p:cNvPr id="2" name="TextBox 1">
-            <a:extLst>
-              <a:ext uri="{FF2B5EF4-FFF2-40B4-BE49-F238E27FC236}">
-                <a16:creationId xmlns:a16="http://schemas.microsoft.com/office/drawing/2014/main" id="{33CC1A8E-22E7-A125-34F9-DF56526AB4F0}"/>
-              </a:ext>
-            </a:extLst>
-          </p:cNvPr>
-          <p:cNvSpPr txBox="1"/>
-          <p:nvPr/>
-        </p:nvSpPr>
-        <p:spPr>
-          <a:xfrm>
-            <a:off x="7390614" y="6488668"/>
-            <a:ext cx="1753386" cy="369332"/>
-          </a:xfrm>
-          <a:prstGeom prst="rect">
-            <a:avLst/>
-          </a:prstGeom>
-          <a:noFill/>
-        </p:spPr>
-        <p:txBody>
-          <a:bodyPr wrap="square" rtlCol="0">
-            <a:spAutoFit/>
-          </a:bodyPr>
-          <a:lstStyle/>
-          <a:p>
-            <a:r>
-              <a:rPr lang="en-US" dirty="0">
-                <a:solidFill>
-                  <a:schemeClr val="bg1"/>
-                </a:solidFill>
-              </a:rPr>
-              <a:t>CCLI#7102397</a:t>
             </a:r>
           </a:p>
         </p:txBody>
